--- a/Infografía sobre Tipos de Modelos Vectoriales y sus aplicaciones.pptx
+++ b/Infografía sobre Tipos de Modelos Vectoriales y sus aplicaciones.pptx
@@ -202,7 +202,7 @@
 <file path=ppt/revisionInfo.xml><?xml version="1.0" encoding="utf-8"?>
 <p1510:revInfo xmlns:a="http://schemas.openxmlformats.org/drawingml/2006/main" xmlns:r="http://schemas.openxmlformats.org/officeDocument/2006/relationships" xmlns:p1510="http://schemas.microsoft.com/office/powerpoint/2015/10/main">
   <p1510:revLst>
-    <p1510:client id="{D955883F-B946-40F1-BFEB-003862376058}" v="5" dt="2025-08-07T20:32:21.602"/>
+    <p1510:client id="{D955883F-B946-40F1-BFEB-003862376058}" v="106" dt="2025-08-21T00:42:10.261"/>
   </p1510:revLst>
 </p1510:revInfo>
 </file>
@@ -211,13 +211,13 @@
 <pc:chgInfo xmlns:a="http://schemas.openxmlformats.org/drawingml/2006/main" xmlns:r="http://schemas.openxmlformats.org/officeDocument/2006/relationships" xmlns:ac="http://schemas.microsoft.com/office/drawing/2013/main/command" xmlns:pc="http://schemas.microsoft.com/office/powerpoint/2013/main/command">
   <pc:docChgLst>
     <pc:chgData name="Luis de la Garza" userId="5365f7fcd4da17b0" providerId="LiveId" clId="{D955883F-B946-40F1-BFEB-003862376058}"/>
-    <pc:docChg chg="custSel addSld modSld">
-      <pc:chgData name="Luis de la Garza" userId="5365f7fcd4da17b0" providerId="LiveId" clId="{D955883F-B946-40F1-BFEB-003862376058}" dt="2025-08-07T20:32:21.602" v="10"/>
+    <pc:docChg chg="undo custSel addSld modSld">
+      <pc:chgData name="Luis de la Garza" userId="5365f7fcd4da17b0" providerId="LiveId" clId="{D955883F-B946-40F1-BFEB-003862376058}" dt="2025-08-21T00:42:13.095" v="175" actId="1076"/>
       <pc:docMkLst>
         <pc:docMk/>
       </pc:docMkLst>
-      <pc:sldChg chg="modSp">
-        <pc:chgData name="Luis de la Garza" userId="5365f7fcd4da17b0" providerId="LiveId" clId="{D955883F-B946-40F1-BFEB-003862376058}" dt="2025-08-07T20:21:24.468" v="0" actId="6549"/>
+      <pc:sldChg chg="addSp modSp mod">
+        <pc:chgData name="Luis de la Garza" userId="5365f7fcd4da17b0" providerId="LiveId" clId="{D955883F-B946-40F1-BFEB-003862376058}" dt="2025-08-21T00:00:09.383" v="12" actId="1076"/>
         <pc:sldMkLst>
           <pc:docMk/>
           <pc:sldMk cId="285946382" sldId="2561"/>
@@ -230,201 +230,325 @@
             <ac:spMk id="2" creationId="{17D06AEF-2A4A-6CB3-AF8E-6DC81B698F9F}"/>
           </ac:spMkLst>
         </pc:spChg>
+        <pc:picChg chg="add mod">
+          <ac:chgData name="Luis de la Garza" userId="5365f7fcd4da17b0" providerId="LiveId" clId="{D955883F-B946-40F1-BFEB-003862376058}" dt="2025-08-21T00:00:09.383" v="12" actId="1076"/>
+          <ac:picMkLst>
+            <pc:docMk/>
+            <pc:sldMk cId="285946382" sldId="2561"/>
+            <ac:picMk id="5" creationId="{4F242255-1E7D-02B2-E942-31899175A173}"/>
+          </ac:picMkLst>
+        </pc:picChg>
       </pc:sldChg>
-      <pc:sldChg chg="delSp add setBg delDesignElem">
-        <pc:chgData name="Luis de la Garza" userId="5365f7fcd4da17b0" providerId="LiveId" clId="{D955883F-B946-40F1-BFEB-003862376058}" dt="2025-08-07T20:30:36.748" v="5"/>
+      <pc:sldChg chg="addSp delSp modSp add mod setBg delDesignElem">
+        <pc:chgData name="Luis de la Garza" userId="5365f7fcd4da17b0" providerId="LiveId" clId="{D955883F-B946-40F1-BFEB-003862376058}" dt="2025-08-21T00:06:18.449" v="32" actId="1076"/>
         <pc:sldMkLst>
           <pc:docMk/>
           <pc:sldMk cId="104034423" sldId="2566"/>
         </pc:sldMkLst>
-        <pc:spChg chg="del">
-          <ac:chgData name="Luis de la Garza" userId="5365f7fcd4da17b0" providerId="LiveId" clId="{D955883F-B946-40F1-BFEB-003862376058}" dt="2025-08-07T20:30:36.748" v="5"/>
+        <pc:spChg chg="add del mod">
+          <ac:chgData name="Luis de la Garza" userId="5365f7fcd4da17b0" providerId="LiveId" clId="{D955883F-B946-40F1-BFEB-003862376058}" dt="2025-08-21T00:04:53.097" v="23" actId="478"/>
           <ac:spMkLst>
             <pc:docMk/>
             <pc:sldMk cId="104034423" sldId="2566"/>
-            <ac:spMk id="14" creationId="{E49D7415-2F11-44C2-B6AA-13A25B6814B9}"/>
+            <ac:spMk id="6" creationId="{53F2DBF0-BE9E-98A8-67E9-AFA4EDFD3AD8}"/>
           </ac:spMkLst>
         </pc:spChg>
-        <pc:cxnChg chg="del">
-          <ac:chgData name="Luis de la Garza" userId="5365f7fcd4da17b0" providerId="LiveId" clId="{D955883F-B946-40F1-BFEB-003862376058}" dt="2025-08-07T20:30:36.748" v="5"/>
-          <ac:cxnSpMkLst>
+        <pc:picChg chg="del">
+          <ac:chgData name="Luis de la Garza" userId="5365f7fcd4da17b0" providerId="LiveId" clId="{D955883F-B946-40F1-BFEB-003862376058}" dt="2025-08-21T00:04:39.480" v="19" actId="478"/>
+          <ac:picMkLst>
             <pc:docMk/>
             <pc:sldMk cId="104034423" sldId="2566"/>
-            <ac:cxnSpMk id="10" creationId="{F64F9B95-9045-48D2-B9F3-2927E98F54AA}"/>
-          </ac:cxnSpMkLst>
-        </pc:cxnChg>
-        <pc:cxnChg chg="del">
-          <ac:chgData name="Luis de la Garza" userId="5365f7fcd4da17b0" providerId="LiveId" clId="{D955883F-B946-40F1-BFEB-003862376058}" dt="2025-08-07T20:30:36.748" v="5"/>
-          <ac:cxnSpMkLst>
+            <ac:picMk id="5" creationId="{B542A540-B736-4566-B4D1-4690093041C3}"/>
+          </ac:picMkLst>
+        </pc:picChg>
+        <pc:picChg chg="add del mod">
+          <ac:chgData name="Luis de la Garza" userId="5365f7fcd4da17b0" providerId="LiveId" clId="{D955883F-B946-40F1-BFEB-003862376058}" dt="2025-08-21T00:05:36.628" v="26" actId="478"/>
+          <ac:picMkLst>
             <pc:docMk/>
             <pc:sldMk cId="104034423" sldId="2566"/>
-            <ac:cxnSpMk id="12" creationId="{085AA86F-6A4D-4BCB-A045-D992CDC2959B}"/>
-          </ac:cxnSpMkLst>
-        </pc:cxnChg>
-        <pc:cxnChg chg="del">
-          <ac:chgData name="Luis de la Garza" userId="5365f7fcd4da17b0" providerId="LiveId" clId="{D955883F-B946-40F1-BFEB-003862376058}" dt="2025-08-07T20:30:36.748" v="5"/>
-          <ac:cxnSpMkLst>
+            <ac:picMk id="1026" creationId="{F2D58015-C0C4-5C55-EF60-13B074E95A37}"/>
+          </ac:picMkLst>
+        </pc:picChg>
+        <pc:picChg chg="add mod">
+          <ac:chgData name="Luis de la Garza" userId="5365f7fcd4da17b0" providerId="LiveId" clId="{D955883F-B946-40F1-BFEB-003862376058}" dt="2025-08-21T00:06:18.449" v="32" actId="1076"/>
+          <ac:picMkLst>
             <pc:docMk/>
             <pc:sldMk cId="104034423" sldId="2566"/>
-            <ac:cxnSpMk id="16" creationId="{D2E57F3D-33BE-4306-87E6-245763719516}"/>
-          </ac:cxnSpMkLst>
-        </pc:cxnChg>
-        <pc:cxnChg chg="del">
-          <ac:chgData name="Luis de la Garza" userId="5365f7fcd4da17b0" providerId="LiveId" clId="{D955883F-B946-40F1-BFEB-003862376058}" dt="2025-08-07T20:30:36.748" v="5"/>
-          <ac:cxnSpMkLst>
+            <ac:picMk id="1028" creationId="{4D1C0A48-DECF-5E1C-D588-484F82D1184D}"/>
+          </ac:picMkLst>
+        </pc:picChg>
+      </pc:sldChg>
+      <pc:sldChg chg="addSp modSp mod">
+        <pc:chgData name="Luis de la Garza" userId="5365f7fcd4da17b0" providerId="LiveId" clId="{D955883F-B946-40F1-BFEB-003862376058}" dt="2025-08-21T00:15:52.008" v="61" actId="14100"/>
+        <pc:sldMkLst>
+          <pc:docMk/>
+          <pc:sldMk cId="3082582587" sldId="2567"/>
+        </pc:sldMkLst>
+        <pc:picChg chg="add mod">
+          <ac:chgData name="Luis de la Garza" userId="5365f7fcd4da17b0" providerId="LiveId" clId="{D955883F-B946-40F1-BFEB-003862376058}" dt="2025-08-21T00:15:52.008" v="61" actId="14100"/>
+          <ac:picMkLst>
             <pc:docMk/>
-            <pc:sldMk cId="104034423" sldId="2566"/>
-            <ac:cxnSpMk id="18" creationId="{CBA3C59D-8641-484F-A35C-361AD7E1553B}"/>
-          </ac:cxnSpMkLst>
-        </pc:cxnChg>
+            <pc:sldMk cId="3082582587" sldId="2567"/>
+            <ac:picMk id="3" creationId="{17886FE3-13F4-5D6A-E8B9-6F67B8EA3F66}"/>
+          </ac:picMkLst>
+        </pc:picChg>
       </pc:sldChg>
-      <pc:sldChg chg="modSp mod">
-        <pc:chgData name="Luis de la Garza" userId="5365f7fcd4da17b0" providerId="LiveId" clId="{D955883F-B946-40F1-BFEB-003862376058}" dt="2025-08-07T20:23:44.674" v="1" actId="1076"/>
+      <pc:sldChg chg="addSp modSp mod modAnim">
+        <pc:chgData name="Luis de la Garza" userId="5365f7fcd4da17b0" providerId="LiveId" clId="{D955883F-B946-40F1-BFEB-003862376058}" dt="2025-08-21T00:20:45.208" v="95" actId="1076"/>
+        <pc:sldMkLst>
+          <pc:docMk/>
+          <pc:sldMk cId="1161297401" sldId="2568"/>
+        </pc:sldMkLst>
+        <pc:spChg chg="mod">
+          <ac:chgData name="Luis de la Garza" userId="5365f7fcd4da17b0" providerId="LiveId" clId="{D955883F-B946-40F1-BFEB-003862376058}" dt="2025-08-21T00:20:28.086" v="93" actId="20577"/>
+          <ac:spMkLst>
+            <pc:docMk/>
+            <pc:sldMk cId="1161297401" sldId="2568"/>
+            <ac:spMk id="4" creationId="{9D58028B-7740-7D27-71E9-A7393E04CB10}"/>
+          </ac:spMkLst>
+        </pc:spChg>
+        <pc:picChg chg="add mod modCrop">
+          <ac:chgData name="Luis de la Garza" userId="5365f7fcd4da17b0" providerId="LiveId" clId="{D955883F-B946-40F1-BFEB-003862376058}" dt="2025-08-21T00:18:50.838" v="73" actId="1076"/>
+          <ac:picMkLst>
+            <pc:docMk/>
+            <pc:sldMk cId="1161297401" sldId="2568"/>
+            <ac:picMk id="3" creationId="{E27B5525-65B0-C2E6-C9D2-842091BDAAD2}"/>
+          </ac:picMkLst>
+        </pc:picChg>
+        <pc:picChg chg="add mod">
+          <ac:chgData name="Luis de la Garza" userId="5365f7fcd4da17b0" providerId="LiveId" clId="{D955883F-B946-40F1-BFEB-003862376058}" dt="2025-08-21T00:20:45.208" v="95" actId="1076"/>
+          <ac:picMkLst>
+            <pc:docMk/>
+            <pc:sldMk cId="1161297401" sldId="2568"/>
+            <ac:picMk id="5" creationId="{6E765B05-0909-E54A-1149-D52FCA4516FD}"/>
+          </ac:picMkLst>
+        </pc:picChg>
+      </pc:sldChg>
+      <pc:sldChg chg="addSp modSp mod">
+        <pc:chgData name="Luis de la Garza" userId="5365f7fcd4da17b0" providerId="LiveId" clId="{D955883F-B946-40F1-BFEB-003862376058}" dt="2025-08-21T00:28:31.614" v="103" actId="1076"/>
         <pc:sldMkLst>
           <pc:docMk/>
           <pc:sldMk cId="4215076882" sldId="2569"/>
         </pc:sldMkLst>
         <pc:spChg chg="mod">
-          <ac:chgData name="Luis de la Garza" userId="5365f7fcd4da17b0" providerId="LiveId" clId="{D955883F-B946-40F1-BFEB-003862376058}" dt="2025-08-07T20:23:44.674" v="1" actId="1076"/>
+          <ac:chgData name="Luis de la Garza" userId="5365f7fcd4da17b0" providerId="LiveId" clId="{D955883F-B946-40F1-BFEB-003862376058}" dt="2025-08-21T00:28:27.640" v="102" actId="1076"/>
+          <ac:spMkLst>
+            <pc:docMk/>
+            <pc:sldMk cId="4215076882" sldId="2569"/>
+            <ac:spMk id="2" creationId="{98CCAB00-651C-F53F-BDE4-144F093BC19D}"/>
+          </ac:spMkLst>
+        </pc:spChg>
+        <pc:spChg chg="mod">
+          <ac:chgData name="Luis de la Garza" userId="5365f7fcd4da17b0" providerId="LiveId" clId="{D955883F-B946-40F1-BFEB-003862376058}" dt="2025-08-21T00:27:58.341" v="101" actId="1076"/>
           <ac:spMkLst>
             <pc:docMk/>
             <pc:sldMk cId="4215076882" sldId="2569"/>
             <ac:spMk id="4" creationId="{48D0D694-772F-B59A-A9EA-E63DC966934F}"/>
           </ac:spMkLst>
         </pc:spChg>
+        <pc:picChg chg="add mod">
+          <ac:chgData name="Luis de la Garza" userId="5365f7fcd4da17b0" providerId="LiveId" clId="{D955883F-B946-40F1-BFEB-003862376058}" dt="2025-08-21T00:28:31.614" v="103" actId="1076"/>
+          <ac:picMkLst>
+            <pc:docMk/>
+            <pc:sldMk cId="4215076882" sldId="2569"/>
+            <ac:picMk id="3074" creationId="{CC93D7A5-3BC9-287C-078E-B27794E43C23}"/>
+          </ac:picMkLst>
+        </pc:picChg>
       </pc:sldChg>
-      <pc:sldChg chg="delSp add setBg delDesignElem">
-        <pc:chgData name="Luis de la Garza" userId="5365f7fcd4da17b0" providerId="LiveId" clId="{D955883F-B946-40F1-BFEB-003862376058}" dt="2025-08-07T20:29:45.396" v="3"/>
+      <pc:sldChg chg="addSp delSp modSp mod modClrScheme delDesignElem chgLayout">
+        <pc:chgData name="Luis de la Garza" userId="5365f7fcd4da17b0" providerId="LiveId" clId="{D955883F-B946-40F1-BFEB-003862376058}" dt="2025-08-21T00:32:36.740" v="116" actId="1076"/>
+        <pc:sldMkLst>
+          <pc:docMk/>
+          <pc:sldMk cId="1241161601" sldId="2571"/>
+        </pc:sldMkLst>
+        <pc:spChg chg="mod ord">
+          <ac:chgData name="Luis de la Garza" userId="5365f7fcd4da17b0" providerId="LiveId" clId="{D955883F-B946-40F1-BFEB-003862376058}" dt="2025-08-21T00:31:32.575" v="110" actId="1076"/>
+          <ac:spMkLst>
+            <pc:docMk/>
+            <pc:sldMk cId="1241161601" sldId="2571"/>
+            <ac:spMk id="2" creationId="{6889527F-42AA-9C3C-4986-70A45598FEDA}"/>
+          </ac:spMkLst>
+        </pc:spChg>
+        <pc:spChg chg="mod ord">
+          <ac:chgData name="Luis de la Garza" userId="5365f7fcd4da17b0" providerId="LiveId" clId="{D955883F-B946-40F1-BFEB-003862376058}" dt="2025-08-21T00:32:36.740" v="116" actId="1076"/>
+          <ac:spMkLst>
+            <pc:docMk/>
+            <pc:sldMk cId="1241161601" sldId="2571"/>
+            <ac:spMk id="4" creationId="{2085F439-537B-6E5C-568D-B42D644EB5F0}"/>
+          </ac:spMkLst>
+        </pc:spChg>
+        <pc:picChg chg="add mod">
+          <ac:chgData name="Luis de la Garza" userId="5365f7fcd4da17b0" providerId="LiveId" clId="{D955883F-B946-40F1-BFEB-003862376058}" dt="2025-08-21T00:31:34.313" v="111" actId="1076"/>
+          <ac:picMkLst>
+            <pc:docMk/>
+            <pc:sldMk cId="1241161601" sldId="2571"/>
+            <ac:picMk id="5" creationId="{BC602C80-D958-DC41-ADFB-ECF002549F01}"/>
+          </ac:picMkLst>
+        </pc:picChg>
+        <pc:cxnChg chg="del">
+          <ac:chgData name="Luis de la Garza" userId="5365f7fcd4da17b0" providerId="LiveId" clId="{D955883F-B946-40F1-BFEB-003862376058}" dt="2025-08-21T00:31:22.584" v="109" actId="700"/>
+          <ac:cxnSpMkLst>
+            <pc:docMk/>
+            <pc:sldMk cId="1241161601" sldId="2571"/>
+            <ac:cxnSpMk id="10" creationId="{CD8BC200-CFA3-C21D-9306-5C7BA0186540}"/>
+          </ac:cxnSpMkLst>
+        </pc:cxnChg>
+      </pc:sldChg>
+      <pc:sldChg chg="addSp modSp mod">
+        <pc:chgData name="Luis de la Garza" userId="5365f7fcd4da17b0" providerId="LiveId" clId="{D955883F-B946-40F1-BFEB-003862376058}" dt="2025-08-21T00:42:13.095" v="175" actId="1076"/>
+        <pc:sldMkLst>
+          <pc:docMk/>
+          <pc:sldMk cId="3965055174" sldId="2572"/>
+        </pc:sldMkLst>
+        <pc:spChg chg="mod">
+          <ac:chgData name="Luis de la Garza" userId="5365f7fcd4da17b0" providerId="LiveId" clId="{D955883F-B946-40F1-BFEB-003862376058}" dt="2025-08-21T00:42:13.095" v="175" actId="1076"/>
+          <ac:spMkLst>
+            <pc:docMk/>
+            <pc:sldMk cId="3965055174" sldId="2572"/>
+            <ac:spMk id="4" creationId="{999B1821-CBC5-AFA4-9C93-91EF307707B0}"/>
+          </ac:spMkLst>
+        </pc:spChg>
+        <pc:picChg chg="add mod">
+          <ac:chgData name="Luis de la Garza" userId="5365f7fcd4da17b0" providerId="LiveId" clId="{D955883F-B946-40F1-BFEB-003862376058}" dt="2025-08-21T00:37:37.176" v="133" actId="1076"/>
+          <ac:picMkLst>
+            <pc:docMk/>
+            <pc:sldMk cId="3965055174" sldId="2572"/>
+            <ac:picMk id="3" creationId="{6B5272D2-FD1D-3536-CB99-2616077A74F0}"/>
+          </ac:picMkLst>
+        </pc:picChg>
+      </pc:sldChg>
+      <pc:sldChg chg="delSp modSp add setBg delDesignElem">
+        <pc:chgData name="Luis de la Garza" userId="5365f7fcd4da17b0" providerId="LiveId" clId="{D955883F-B946-40F1-BFEB-003862376058}" dt="2025-08-21T00:10:11.127" v="44"/>
         <pc:sldMkLst>
           <pc:docMk/>
           <pc:sldMk cId="4217892579" sldId="2579"/>
         </pc:sldMkLst>
-        <pc:spChg chg="del">
-          <ac:chgData name="Luis de la Garza" userId="5365f7fcd4da17b0" providerId="LiveId" clId="{D955883F-B946-40F1-BFEB-003862376058}" dt="2025-08-07T20:29:45.396" v="3"/>
-          <ac:spMkLst>
+        <pc:graphicFrameChg chg="mod">
+          <ac:chgData name="Luis de la Garza" userId="5365f7fcd4da17b0" providerId="LiveId" clId="{D955883F-B946-40F1-BFEB-003862376058}" dt="2025-08-21T00:10:11.127" v="44"/>
+          <ac:graphicFrameMkLst>
             <pc:docMk/>
             <pc:sldMk cId="4217892579" sldId="2579"/>
-            <ac:spMk id="9" creationId="{5F710FDB-0919-493E-8539-8240C23F1EB2}"/>
-          </ac:spMkLst>
-        </pc:spChg>
-        <pc:cxnChg chg="del">
-          <ac:chgData name="Luis de la Garza" userId="5365f7fcd4da17b0" providerId="LiveId" clId="{D955883F-B946-40F1-BFEB-003862376058}" dt="2025-08-07T20:29:45.396" v="3"/>
-          <ac:cxnSpMkLst>
-            <pc:docMk/>
-            <pc:sldMk cId="4217892579" sldId="2579"/>
-            <ac:cxnSpMk id="11" creationId="{22F20000-FD86-48F6-9363-FEC90C932DCD}"/>
-          </ac:cxnSpMkLst>
-        </pc:cxnChg>
-        <pc:cxnChg chg="del">
-          <ac:chgData name="Luis de la Garza" userId="5365f7fcd4da17b0" providerId="LiveId" clId="{D955883F-B946-40F1-BFEB-003862376058}" dt="2025-08-07T20:29:45.396" v="3"/>
-          <ac:cxnSpMkLst>
-            <pc:docMk/>
-            <pc:sldMk cId="4217892579" sldId="2579"/>
-            <ac:cxnSpMk id="13" creationId="{872AE332-6ACA-45BE-875F-91A291D4A40D}"/>
-          </ac:cxnSpMkLst>
-        </pc:cxnChg>
+            <ac:graphicFrameMk id="4" creationId="{89311F04-4F11-4CF0-AA31-6B04AC235966}"/>
+          </ac:graphicFrameMkLst>
+        </pc:graphicFrameChg>
       </pc:sldChg>
-      <pc:sldChg chg="delSp modSp add mod setBg delDesignElem">
-        <pc:chgData name="Luis de la Garza" userId="5365f7fcd4da17b0" providerId="LiveId" clId="{D955883F-B946-40F1-BFEB-003862376058}" dt="2025-08-07T20:31:09.537" v="8" actId="27636"/>
+      <pc:sldChg chg="addSp delSp modSp add mod setBg delDesignElem">
+        <pc:chgData name="Luis de la Garza" userId="5365f7fcd4da17b0" providerId="LiveId" clId="{D955883F-B946-40F1-BFEB-003862376058}" dt="2025-08-21T00:01:59.463" v="18" actId="26606"/>
         <pc:sldMkLst>
           <pc:docMk/>
           <pc:sldMk cId="1890312496" sldId="2580"/>
         </pc:sldMkLst>
         <pc:spChg chg="mod">
-          <ac:chgData name="Luis de la Garza" userId="5365f7fcd4da17b0" providerId="LiveId" clId="{D955883F-B946-40F1-BFEB-003862376058}" dt="2025-08-07T20:31:09.537" v="8" actId="27636"/>
+          <ac:chgData name="Luis de la Garza" userId="5365f7fcd4da17b0" providerId="LiveId" clId="{D955883F-B946-40F1-BFEB-003862376058}" dt="2025-08-21T00:01:59.463" v="18" actId="26606"/>
           <ac:spMkLst>
             <pc:docMk/>
             <pc:sldMk cId="1890312496" sldId="2580"/>
             <ac:spMk id="2" creationId="{97BE603B-1E81-CFDE-B32A-5ECBC6D69676}"/>
           </ac:spMkLst>
         </pc:spChg>
-        <pc:spChg chg="del">
-          <ac:chgData name="Luis de la Garza" userId="5365f7fcd4da17b0" providerId="LiveId" clId="{D955883F-B946-40F1-BFEB-003862376058}" dt="2025-08-07T20:31:09.498" v="7"/>
+        <pc:spChg chg="mod">
+          <ac:chgData name="Luis de la Garza" userId="5365f7fcd4da17b0" providerId="LiveId" clId="{D955883F-B946-40F1-BFEB-003862376058}" dt="2025-08-21T00:01:59.463" v="18" actId="26606"/>
           <ac:spMkLst>
             <pc:docMk/>
             <pc:sldMk cId="1890312496" sldId="2580"/>
-            <ac:spMk id="14" creationId="{E49D7415-2F11-44C2-B6AA-13A25B6814B9}"/>
+            <ac:spMk id="4" creationId="{C21B9B35-135E-A23E-3848-61AF188F042E}"/>
           </ac:spMkLst>
         </pc:spChg>
-        <pc:cxnChg chg="del">
-          <ac:chgData name="Luis de la Garza" userId="5365f7fcd4da17b0" providerId="LiveId" clId="{D955883F-B946-40F1-BFEB-003862376058}" dt="2025-08-07T20:31:09.498" v="7"/>
-          <ac:cxnSpMkLst>
+        <pc:spChg chg="add del mod">
+          <ac:chgData name="Luis de la Garza" userId="5365f7fcd4da17b0" providerId="LiveId" clId="{D955883F-B946-40F1-BFEB-003862376058}" dt="2025-08-21T00:01:29.423" v="14" actId="478"/>
+          <ac:spMkLst>
             <pc:docMk/>
             <pc:sldMk cId="1890312496" sldId="2580"/>
-            <ac:cxnSpMk id="10" creationId="{F64F9B95-9045-48D2-B9F3-2927E98F54AA}"/>
-          </ac:cxnSpMkLst>
-        </pc:cxnChg>
-        <pc:cxnChg chg="del">
-          <ac:chgData name="Luis de la Garza" userId="5365f7fcd4da17b0" providerId="LiveId" clId="{D955883F-B946-40F1-BFEB-003862376058}" dt="2025-08-07T20:31:09.498" v="7"/>
-          <ac:cxnSpMkLst>
+            <ac:spMk id="6" creationId="{3007F93B-B469-65F6-0E76-8DCCEC1C7DAC}"/>
+          </ac:spMkLst>
+        </pc:spChg>
+        <pc:spChg chg="add">
+          <ac:chgData name="Luis de la Garza" userId="5365f7fcd4da17b0" providerId="LiveId" clId="{D955883F-B946-40F1-BFEB-003862376058}" dt="2025-08-21T00:01:59.463" v="18" actId="26606"/>
+          <ac:spMkLst>
             <pc:docMk/>
             <pc:sldMk cId="1890312496" sldId="2580"/>
-            <ac:cxnSpMk id="12" creationId="{085AA86F-6A4D-4BCB-A045-D992CDC2959B}"/>
-          </ac:cxnSpMkLst>
-        </pc:cxnChg>
-        <pc:cxnChg chg="del">
-          <ac:chgData name="Luis de la Garza" userId="5365f7fcd4da17b0" providerId="LiveId" clId="{D955883F-B946-40F1-BFEB-003862376058}" dt="2025-08-07T20:31:09.498" v="7"/>
-          <ac:cxnSpMkLst>
+            <ac:spMk id="12" creationId="{B6FACB3C-9069-4791-BC5C-0DB7CD19B853}"/>
+          </ac:spMkLst>
+        </pc:spChg>
+        <pc:spChg chg="add">
+          <ac:chgData name="Luis de la Garza" userId="5365f7fcd4da17b0" providerId="LiveId" clId="{D955883F-B946-40F1-BFEB-003862376058}" dt="2025-08-21T00:01:59.463" v="18" actId="26606"/>
+          <ac:spMkLst>
             <pc:docMk/>
             <pc:sldMk cId="1890312496" sldId="2580"/>
-            <ac:cxnSpMk id="16" creationId="{511FC409-B3C2-4F68-865C-C5333D6F2710}"/>
-          </ac:cxnSpMkLst>
-        </pc:cxnChg>
-        <pc:cxnChg chg="del">
-          <ac:chgData name="Luis de la Garza" userId="5365f7fcd4da17b0" providerId="LiveId" clId="{D955883F-B946-40F1-BFEB-003862376058}" dt="2025-08-07T20:31:09.498" v="7"/>
-          <ac:cxnSpMkLst>
+            <ac:spMk id="14" creationId="{71F2038E-D777-4B76-81DD-DD13EE91B9DD}"/>
+          </ac:spMkLst>
+        </pc:spChg>
+        <pc:grpChg chg="add">
+          <ac:chgData name="Luis de la Garza" userId="5365f7fcd4da17b0" providerId="LiveId" clId="{D955883F-B946-40F1-BFEB-003862376058}" dt="2025-08-21T00:01:59.463" v="18" actId="26606"/>
+          <ac:grpSpMkLst>
             <pc:docMk/>
             <pc:sldMk cId="1890312496" sldId="2580"/>
-            <ac:cxnSpMk id="18" creationId="{B810270D-76A7-44B3-9746-7EDF5788602E}"/>
-          </ac:cxnSpMkLst>
-        </pc:cxnChg>
+            <ac:grpSpMk id="16" creationId="{DD354807-230F-4402-B1B9-F733A8F1F190}"/>
+          </ac:grpSpMkLst>
+        </pc:grpChg>
+        <pc:picChg chg="del">
+          <ac:chgData name="Luis de la Garza" userId="5365f7fcd4da17b0" providerId="LiveId" clId="{D955883F-B946-40F1-BFEB-003862376058}" dt="2025-08-21T00:01:16.763" v="13" actId="478"/>
+          <ac:picMkLst>
+            <pc:docMk/>
+            <pc:sldMk cId="1890312496" sldId="2580"/>
+            <ac:picMk id="5" creationId="{79B2EDD8-DF47-4229-B649-477652E6E1EB}"/>
+          </ac:picMkLst>
+        </pc:picChg>
+        <pc:picChg chg="add mod">
+          <ac:chgData name="Luis de la Garza" userId="5365f7fcd4da17b0" providerId="LiveId" clId="{D955883F-B946-40F1-BFEB-003862376058}" dt="2025-08-21T00:01:59.463" v="18" actId="26606"/>
+          <ac:picMkLst>
+            <pc:docMk/>
+            <pc:sldMk cId="1890312496" sldId="2580"/>
+            <ac:picMk id="7" creationId="{78DECC96-2693-7B08-33AB-D5B0D8CB3771}"/>
+          </ac:picMkLst>
+        </pc:picChg>
       </pc:sldChg>
-      <pc:sldChg chg="delSp add setBg delDesignElem">
-        <pc:chgData name="Luis de la Garza" userId="5365f7fcd4da17b0" providerId="LiveId" clId="{D955883F-B946-40F1-BFEB-003862376058}" dt="2025-08-07T20:32:21.602" v="10"/>
+      <pc:sldChg chg="addSp delSp modSp add mod setBg delDesignElem">
+        <pc:chgData name="Luis de la Garza" userId="5365f7fcd4da17b0" providerId="LiveId" clId="{D955883F-B946-40F1-BFEB-003862376058}" dt="2025-08-21T00:12:45.761" v="58" actId="14861"/>
         <pc:sldMkLst>
           <pc:docMk/>
           <pc:sldMk cId="956211739" sldId="2581"/>
         </pc:sldMkLst>
-        <pc:spChg chg="del">
-          <ac:chgData name="Luis de la Garza" userId="5365f7fcd4da17b0" providerId="LiveId" clId="{D955883F-B946-40F1-BFEB-003862376058}" dt="2025-08-07T20:32:21.602" v="10"/>
+        <pc:spChg chg="add del mod">
+          <ac:chgData name="Luis de la Garza" userId="5365f7fcd4da17b0" providerId="LiveId" clId="{D955883F-B946-40F1-BFEB-003862376058}" dt="2025-08-21T00:11:42.899" v="49"/>
           <ac:spMkLst>
             <pc:docMk/>
             <pc:sldMk cId="956211739" sldId="2581"/>
-            <ac:spMk id="14" creationId="{660EB578-C970-4186-B93C-45851BBC6E34}"/>
+            <ac:spMk id="6" creationId="{C2A55B31-E2E1-2BF4-0E81-E60D8920AA60}"/>
           </ac:spMkLst>
         </pc:spChg>
-        <pc:cxnChg chg="del">
-          <ac:chgData name="Luis de la Garza" userId="5365f7fcd4da17b0" providerId="LiveId" clId="{D955883F-B946-40F1-BFEB-003862376058}" dt="2025-08-07T20:32:21.602" v="10"/>
-          <ac:cxnSpMkLst>
+        <pc:spChg chg="add del mod">
+          <ac:chgData name="Luis de la Garza" userId="5365f7fcd4da17b0" providerId="LiveId" clId="{D955883F-B946-40F1-BFEB-003862376058}" dt="2025-08-21T00:11:51.118" v="51" actId="478"/>
+          <ac:spMkLst>
             <pc:docMk/>
             <pc:sldMk cId="956211739" sldId="2581"/>
-            <ac:cxnSpMk id="10" creationId="{F64F9B95-9045-48D2-B9F3-2927E98F54AA}"/>
-          </ac:cxnSpMkLst>
-        </pc:cxnChg>
-        <pc:cxnChg chg="del">
-          <ac:chgData name="Luis de la Garza" userId="5365f7fcd4da17b0" providerId="LiveId" clId="{D955883F-B946-40F1-BFEB-003862376058}" dt="2025-08-07T20:32:21.602" v="10"/>
-          <ac:cxnSpMkLst>
+            <ac:spMk id="7" creationId="{56B50325-1DB6-5E32-79E2-E8CC6760ECE5}"/>
+          </ac:spMkLst>
+        </pc:spChg>
+        <pc:picChg chg="del">
+          <ac:chgData name="Luis de la Garza" userId="5365f7fcd4da17b0" providerId="LiveId" clId="{D955883F-B946-40F1-BFEB-003862376058}" dt="2025-08-21T00:11:35.145" v="45" actId="478"/>
+          <ac:picMkLst>
             <pc:docMk/>
             <pc:sldMk cId="956211739" sldId="2581"/>
-            <ac:cxnSpMk id="12" creationId="{085AA86F-6A4D-4BCB-A045-D992CDC2959B}"/>
-          </ac:cxnSpMkLst>
-        </pc:cxnChg>
-        <pc:cxnChg chg="del">
-          <ac:chgData name="Luis de la Garza" userId="5365f7fcd4da17b0" providerId="LiveId" clId="{D955883F-B946-40F1-BFEB-003862376058}" dt="2025-08-07T20:32:21.602" v="10"/>
-          <ac:cxnSpMkLst>
+            <ac:picMk id="5" creationId="{D52FA85D-39D6-4F9D-97E6-883E24848591}"/>
+          </ac:picMkLst>
+        </pc:picChg>
+        <pc:picChg chg="add mod">
+          <ac:chgData name="Luis de la Garza" userId="5365f7fcd4da17b0" providerId="LiveId" clId="{D955883F-B946-40F1-BFEB-003862376058}" dt="2025-08-21T00:12:45.761" v="58" actId="14861"/>
+          <ac:picMkLst>
             <pc:docMk/>
             <pc:sldMk cId="956211739" sldId="2581"/>
-            <ac:cxnSpMk id="16" creationId="{CDF57B02-07BB-407B-BB36-06D9C64A673E}"/>
-          </ac:cxnSpMkLst>
-        </pc:cxnChg>
-        <pc:cxnChg chg="del">
-          <ac:chgData name="Luis de la Garza" userId="5365f7fcd4da17b0" providerId="LiveId" clId="{D955883F-B946-40F1-BFEB-003862376058}" dt="2025-08-07T20:32:21.602" v="10"/>
-          <ac:cxnSpMkLst>
+            <ac:picMk id="2050" creationId="{0120E4BD-475D-5627-5638-6C75EB1FEB2E}"/>
+          </ac:picMkLst>
+        </pc:picChg>
+        <pc:picChg chg="add del mod">
+          <ac:chgData name="Luis de la Garza" userId="5365f7fcd4da17b0" providerId="LiveId" clId="{D955883F-B946-40F1-BFEB-003862376058}" dt="2025-08-21T00:11:46.238" v="50" actId="478"/>
+          <ac:picMkLst>
             <pc:docMk/>
             <pc:sldMk cId="956211739" sldId="2581"/>
-            <ac:cxnSpMk id="18" creationId="{C6855964-C920-48EB-8804-74291211C8A9}"/>
-          </ac:cxnSpMkLst>
-        </pc:cxnChg>
+            <ac:picMk id="2052" creationId="{A5F4D026-C2BB-71FE-A49D-A5B8AA692EE5}"/>
+          </ac:picMkLst>
+        </pc:picChg>
       </pc:sldChg>
     </pc:docChg>
   </pc:docChgLst>
@@ -1529,23 +1653,14 @@
     <dgm:pt modelId="{121638D5-03DA-4985-9332-68259CA37D0F}" type="pres">
       <dgm:prSet presAssocID="{96B6CB47-D1DD-4D44-B782-826B6A7E47A0}" presName="Picture" presStyleLbl="node1" presStyleIdx="0" presStyleCnt="3"/>
       <dgm:spPr>
-        <a:blipFill>
-          <a:blip xmlns:r="http://schemas.openxmlformats.org/officeDocument/2006/relationships" r:embed="rId1">
-            <a:extLst>
-              <a:ext uri="{28A0092B-C50C-407E-A947-70E740481C1C}">
-                <a14:useLocalDpi xmlns:a14="http://schemas.microsoft.com/office/drawing/2010/main" val="0"/>
-              </a:ext>
-            </a:extLst>
-          </a:blip>
-          <a:srcRect l="2015" r="2728" b="-7"/>
-          <a:stretch/>
+        <a:blipFill rotWithShape="1">
+          <a:blip xmlns:r="http://schemas.openxmlformats.org/officeDocument/2006/relationships" r:embed="rId1"/>
+          <a:srcRect/>
+          <a:stretch>
+            <a:fillRect/>
+          </a:stretch>
         </a:blipFill>
       </dgm:spPr>
-      <dgm:extLst>
-        <a:ext uri="{E40237B7-FDA0-4F09-8148-C483321AD2D9}">
-          <dgm14:cNvPr xmlns:dgm14="http://schemas.microsoft.com/office/drawing/2010/diagram" id="0" name="" descr="Conjunto de flechas circulares coloreadas en azul, verde, rojo, naranja y amarillo aisladas sobre fondo blanco"/>
-        </a:ext>
-      </dgm:extLst>
     </dgm:pt>
     <dgm:pt modelId="{FF12BC47-F3F6-4C19-9DEF-7CB40A79861D}" type="pres">
       <dgm:prSet presAssocID="{96B6CB47-D1DD-4D44-B782-826B6A7E47A0}" presName="Subtitle" presStyleLbl="revTx" presStyleIdx="0" presStyleCnt="6">
@@ -1575,23 +1690,14 @@
     <dgm:pt modelId="{844C6BBD-4448-4A9D-9824-9BC4EADF4FE4}" type="pres">
       <dgm:prSet presAssocID="{E7A65F91-F810-4960-90FC-B9063D3A7EA0}" presName="Picture" presStyleLbl="node1" presStyleIdx="1" presStyleCnt="3"/>
       <dgm:spPr>
-        <a:blipFill>
-          <a:blip xmlns:r="http://schemas.openxmlformats.org/officeDocument/2006/relationships" r:embed="rId2">
-            <a:extLst>
-              <a:ext uri="{28A0092B-C50C-407E-A947-70E740481C1C}">
-                <a14:useLocalDpi xmlns:a14="http://schemas.microsoft.com/office/drawing/2010/main" val="0"/>
-              </a:ext>
-            </a:extLst>
-          </a:blip>
-          <a:srcRect r="-11" b="-11"/>
-          <a:stretch/>
+        <a:blipFill rotWithShape="1">
+          <a:blip xmlns:r="http://schemas.openxmlformats.org/officeDocument/2006/relationships" r:embed="rId2"/>
+          <a:srcRect/>
+          <a:stretch>
+            <a:fillRect l="-21000" r="-21000"/>
+          </a:stretch>
         </a:blipFill>
       </dgm:spPr>
-      <dgm:extLst>
-        <a:ext uri="{E40237B7-FDA0-4F09-8148-C483321AD2D9}">
-          <dgm14:cNvPr xmlns:dgm14="http://schemas.microsoft.com/office/drawing/2010/diagram" id="0" name="" descr="Varias líneas rectas combinadas crean este diseño.  Las líneas negras tienen 10 píxeles de ancho. Imagen disponible de hasta 16 megapíxeles de tamaño (4000x4000)&lt;br&gt;&lt;b&gt;Incluye trazado de recorte.&lt;/b&gt;"/>
-        </a:ext>
-      </dgm:extLst>
     </dgm:pt>
     <dgm:pt modelId="{3A8D17E1-B80E-4A10-AB35-3054969601E7}" type="pres">
       <dgm:prSet presAssocID="{E7A65F91-F810-4960-90FC-B9063D3A7EA0}" presName="Subtitle" presStyleLbl="revTx" presStyleIdx="2" presStyleCnt="6">
@@ -1619,25 +1725,16 @@
       <dgm:spPr/>
     </dgm:pt>
     <dgm:pt modelId="{F2C46890-49E9-41F1-8267-DF4C14AF2353}" type="pres">
-      <dgm:prSet presAssocID="{66DE5077-7568-40AF-9D96-9C6E415A57F1}" presName="Picture" presStyleLbl="node1" presStyleIdx="2" presStyleCnt="3"/>
+      <dgm:prSet presAssocID="{66DE5077-7568-40AF-9D96-9C6E415A57F1}" presName="Picture" presStyleLbl="node1" presStyleIdx="2" presStyleCnt="3" custLinFactNeighborY="15"/>
       <dgm:spPr>
-        <a:blipFill>
-          <a:blip xmlns:r="http://schemas.openxmlformats.org/officeDocument/2006/relationships" r:embed="rId3">
-            <a:extLst>
-              <a:ext uri="{28A0092B-C50C-407E-A947-70E740481C1C}">
-                <a14:useLocalDpi xmlns:a14="http://schemas.microsoft.com/office/drawing/2010/main" val="0"/>
-              </a:ext>
-            </a:extLst>
-          </a:blip>
-          <a:srcRect l="23353" r="9901" b="6"/>
-          <a:stretch/>
+        <a:blipFill rotWithShape="1">
+          <a:blip xmlns:r="http://schemas.openxmlformats.org/officeDocument/2006/relationships" r:embed="rId3"/>
+          <a:srcRect/>
+          <a:stretch>
+            <a:fillRect l="-25000" r="-25000"/>
+          </a:stretch>
         </a:blipFill>
       </dgm:spPr>
-      <dgm:extLst>
-        <a:ext uri="{E40237B7-FDA0-4F09-8148-C483321AD2D9}">
-          <dgm14:cNvPr xmlns:dgm14="http://schemas.microsoft.com/office/drawing/2010/diagram" id="0" name="" descr="Vista de parte del impresionante archipiélago de Fernando De Noronha en 'Forte Sao Joaquim do Sueste'"/>
-        </a:ext>
-      </dgm:extLst>
     </dgm:pt>
     <dgm:pt modelId="{FEFC75E6-13A7-4D49-AEE9-1CB2F701E638}" type="pres">
       <dgm:prSet presAssocID="{66DE5077-7568-40AF-9D96-9C6E415A57F1}" presName="Subtitle" presStyleLbl="revTx" presStyleIdx="4" presStyleCnt="6">
@@ -1719,16 +1816,12 @@
         <a:prstGeom prst="rect">
           <a:avLst/>
         </a:prstGeom>
-        <a:blipFill>
-          <a:blip xmlns:r="http://schemas.openxmlformats.org/officeDocument/2006/relationships" r:embed="rId1">
-            <a:extLst>
-              <a:ext uri="{28A0092B-C50C-407E-A947-70E740481C1C}">
-                <a14:useLocalDpi xmlns:a14="http://schemas.microsoft.com/office/drawing/2010/main" val="0"/>
-              </a:ext>
-            </a:extLst>
-          </a:blip>
-          <a:srcRect l="2015" r="2728" b="-7"/>
-          <a:stretch/>
+        <a:blipFill rotWithShape="1">
+          <a:blip xmlns:r="http://schemas.openxmlformats.org/officeDocument/2006/relationships" r:embed="rId1"/>
+          <a:srcRect/>
+          <a:stretch>
+            <a:fillRect/>
+          </a:stretch>
         </a:blipFill>
         <a:ln>
           <a:noFill/>
@@ -1884,16 +1977,12 @@
         <a:prstGeom prst="rect">
           <a:avLst/>
         </a:prstGeom>
-        <a:blipFill>
-          <a:blip xmlns:r="http://schemas.openxmlformats.org/officeDocument/2006/relationships" r:embed="rId2">
-            <a:extLst>
-              <a:ext uri="{28A0092B-C50C-407E-A947-70E740481C1C}">
-                <a14:useLocalDpi xmlns:a14="http://schemas.microsoft.com/office/drawing/2010/main" val="0"/>
-              </a:ext>
-            </a:extLst>
-          </a:blip>
-          <a:srcRect r="-11" b="-11"/>
-          <a:stretch/>
+        <a:blipFill rotWithShape="1">
+          <a:blip xmlns:r="http://schemas.openxmlformats.org/officeDocument/2006/relationships" r:embed="rId2"/>
+          <a:srcRect/>
+          <a:stretch>
+            <a:fillRect l="-21000" r="-21000"/>
+          </a:stretch>
         </a:blipFill>
         <a:ln>
           <a:noFill/>
@@ -2043,22 +2132,18 @@
       </dsp:nvSpPr>
       <dsp:spPr>
         <a:xfrm>
-          <a:off x="0" y="3479718"/>
+          <a:off x="0" y="3479960"/>
           <a:ext cx="1610980" cy="1610980"/>
         </a:xfrm>
         <a:prstGeom prst="rect">
           <a:avLst/>
         </a:prstGeom>
-        <a:blipFill>
-          <a:blip xmlns:r="http://schemas.openxmlformats.org/officeDocument/2006/relationships" r:embed="rId3">
-            <a:extLst>
-              <a:ext uri="{28A0092B-C50C-407E-A947-70E740481C1C}">
-                <a14:useLocalDpi xmlns:a14="http://schemas.microsoft.com/office/drawing/2010/main" val="0"/>
-              </a:ext>
-            </a:extLst>
-          </a:blip>
-          <a:srcRect l="23353" r="9901" b="6"/>
-          <a:stretch/>
+        <a:blipFill rotWithShape="1">
+          <a:blip xmlns:r="http://schemas.openxmlformats.org/officeDocument/2006/relationships" r:embed="rId3"/>
+          <a:srcRect/>
+          <a:stretch>
+            <a:fillRect l="-25000" r="-25000"/>
+          </a:stretch>
         </a:blipFill>
         <a:ln>
           <a:noFill/>
@@ -3568,7 +3653,7 @@
           <a:p>
             <a:fld id="{AB505267-8F40-4A5B-806C-35C64449E8D6}" type="datetime1">
               <a:rPr lang="es-MX" smtClean="0"/>
-              <a:t>07/08/2025</a:t>
+              <a:t>20/08/2025</a:t>
             </a:fld>
             <a:endParaRPr lang="es-MX"/>
           </a:p>
@@ -3748,7 +3833,7 @@
             <a:pPr rtl="0"/>
             <a:fld id="{A1C2A63E-AC03-4FF8-BE60-543974565F08}" type="datetime1">
               <a:rPr lang="es-MX" noProof="0" smtClean="0"/>
-              <a:t>07/08/2025</a:t>
+              <a:t>20/08/2025</a:t>
             </a:fld>
             <a:endParaRPr lang="es-MX" noProof="0"/>
           </a:p>
@@ -5827,7 +5912,7 @@
             <a:pPr rtl="0"/>
             <a:fld id="{9A1095BD-2D6F-4C94-B78D-4BA24B78BE5F}" type="datetime1">
               <a:rPr lang="es-MX" noProof="0" smtClean="0"/>
-              <a:t>07/08/2025</a:t>
+              <a:t>20/08/2025</a:t>
             </a:fld>
             <a:endParaRPr lang="es-MX" noProof="0"/>
           </a:p>
@@ -6047,7 +6132,7 @@
             <a:pPr rtl="0"/>
             <a:fld id="{93A3F6A2-DF51-4D55-B5E3-408D4E3D00E8}" type="datetime1">
               <a:rPr lang="es-MX" noProof="0" smtClean="0"/>
-              <a:t>07/08/2025</a:t>
+              <a:t>20/08/2025</a:t>
             </a:fld>
             <a:endParaRPr lang="es-MX" noProof="0"/>
           </a:p>
@@ -6249,7 +6334,7 @@
           <a:p>
             <a:fld id="{157B6794-849E-4626-908B-D15793550EFB}" type="datetime1">
               <a:rPr lang="en-US" smtClean="0"/>
-              <a:t>8/7/2025</a:t>
+              <a:t>8/20/2025</a:t>
             </a:fld>
             <a:endParaRPr lang="en-US"/>
           </a:p>
@@ -6571,7 +6656,7 @@
             <a:pPr rtl="0"/>
             <a:fld id="{D1D7B879-DB92-4F7E-89A0-251D0539E6AF}" type="datetime1">
               <a:rPr lang="es-MX" noProof="0" smtClean="0"/>
-              <a:t>07/08/2025</a:t>
+              <a:t>20/08/2025</a:t>
             </a:fld>
             <a:endParaRPr lang="es-MX" noProof="0"/>
           </a:p>
@@ -7279,7 +7364,7 @@
             <a:pPr rtl="0"/>
             <a:fld id="{F3597D2B-C196-4B48-8A8F-D73EC5DA8CC3}" type="datetime1">
               <a:rPr lang="es-MX" noProof="0" smtClean="0"/>
-              <a:t>07/08/2025</a:t>
+              <a:t>20/08/2025</a:t>
             </a:fld>
             <a:endParaRPr lang="es-MX" noProof="0"/>
           </a:p>
@@ -7713,7 +7798,7 @@
             <a:pPr rtl="0"/>
             <a:fld id="{63228F18-82D7-416B-822F-F90BEBADB8B6}" type="datetime1">
               <a:rPr lang="es-MX" noProof="0" smtClean="0"/>
-              <a:t>07/08/2025</a:t>
+              <a:t>20/08/2025</a:t>
             </a:fld>
             <a:endParaRPr lang="es-MX" noProof="0"/>
           </a:p>
@@ -7867,7 +7952,7 @@
             <a:pPr rtl="0"/>
             <a:fld id="{BF75BBF6-87F1-4259-ACE2-18F6CF7F572C}" type="datetime1">
               <a:rPr lang="es-MX" noProof="0" smtClean="0"/>
-              <a:t>07/08/2025</a:t>
+              <a:t>20/08/2025</a:t>
             </a:fld>
             <a:endParaRPr lang="es-MX" noProof="0"/>
           </a:p>
@@ -7983,7 +8068,7 @@
             <a:pPr rtl="0"/>
             <a:fld id="{2D0193F4-B3A5-4614-9212-3A3F22F60B66}" type="datetime1">
               <a:rPr lang="es-MX" noProof="0" smtClean="0"/>
-              <a:t>07/08/2025</a:t>
+              <a:t>20/08/2025</a:t>
             </a:fld>
             <a:endParaRPr lang="es-MX" noProof="0"/>
           </a:p>
@@ -8309,7 +8394,7 @@
             <a:pPr rtl="0"/>
             <a:fld id="{DB93246C-3CD3-489B-86D0-90FB76E7C5ED}" type="datetime1">
               <a:rPr lang="es-MX" noProof="0" smtClean="0"/>
-              <a:t>07/08/2025</a:t>
+              <a:t>20/08/2025</a:t>
             </a:fld>
             <a:endParaRPr lang="es-MX" noProof="0"/>
           </a:p>
@@ -8616,7 +8701,7 @@
             <a:pPr rtl="0"/>
             <a:fld id="{28B4A694-2858-4143-8702-54EF74EB0EFF}" type="datetime1">
               <a:rPr lang="es-MX" noProof="0" smtClean="0"/>
-              <a:t>07/08/2025</a:t>
+              <a:t>20/08/2025</a:t>
             </a:fld>
             <a:endParaRPr lang="es-MX" noProof="0"/>
           </a:p>
@@ -8864,7 +8949,7 @@
             <a:pPr rtl="0"/>
             <a:fld id="{6D7440A9-06B7-4A73-9E19-B3D9CAB48B8D}" type="datetime1">
               <a:rPr lang="es-MX" noProof="0" smtClean="0"/>
-              <a:t>07/08/2025</a:t>
+              <a:t>20/08/2025</a:t>
             </a:fld>
             <a:endParaRPr lang="es-MX" noProof="0"/>
           </a:p>
@@ -9490,6 +9575,36 @@
           </a:p>
         </p:txBody>
       </p:sp>
+      <p:pic>
+        <p:nvPicPr>
+          <p:cNvPr id="5" name="Imagen 4">
+            <a:extLst>
+              <a:ext uri="{FF2B5EF4-FFF2-40B4-BE49-F238E27FC236}">
+                <a16:creationId xmlns:a16="http://schemas.microsoft.com/office/drawing/2014/main" id="{4F242255-1E7D-02B2-E942-31899175A173}"/>
+              </a:ext>
+            </a:extLst>
+          </p:cNvPr>
+          <p:cNvPicPr>
+            <a:picLocks noChangeAspect="1"/>
+          </p:cNvPicPr>
+          <p:nvPr/>
+        </p:nvPicPr>
+        <p:blipFill>
+          <a:blip r:embed="rId3"/>
+          <a:stretch>
+            <a:fillRect/>
+          </a:stretch>
+        </p:blipFill>
+        <p:spPr>
+          <a:xfrm>
+            <a:off x="4510165" y="2638488"/>
+            <a:ext cx="2524477" cy="3124636"/>
+          </a:xfrm>
+          <a:prstGeom prst="rect">
+            <a:avLst/>
+          </a:prstGeom>
+        </p:spPr>
+      </p:pic>
     </p:spTree>
     <p:extLst>
       <p:ext uri="{BB962C8B-B14F-4D97-AF65-F5344CB8AC3E}">
@@ -9698,7 +9813,7 @@
         </p:nvSpPr>
         <p:spPr>
           <a:xfrm>
-            <a:off x="761800" y="762001"/>
+            <a:off x="6476900" y="734704"/>
             <a:ext cx="5334197" cy="1708242"/>
           </a:xfrm>
         </p:spPr>
@@ -9710,9 +9825,42 @@
           <a:p>
             <a:pPr defTabSz="914400"/>
             <a:r>
-              <a:rPr lang="en-US" sz="3700"/>
-              <a:t>Aplicaciones en geometría y análisis de datos</a:t>
-            </a:r>
+              <a:rPr lang="en-US" sz="3700" dirty="0" err="1"/>
+              <a:t>Aplicaciones</a:t>
+            </a:r>
+            <a:r>
+              <a:rPr lang="en-US" sz="3700" dirty="0"/>
+              <a:t> </a:t>
+            </a:r>
+            <a:r>
+              <a:rPr lang="en-US" sz="3700" dirty="0" err="1"/>
+              <a:t>en</a:t>
+            </a:r>
+            <a:r>
+              <a:rPr lang="en-US" sz="3700" dirty="0"/>
+              <a:t> </a:t>
+            </a:r>
+            <a:r>
+              <a:rPr lang="en-US" sz="3700" dirty="0" err="1"/>
+              <a:t>geometría</a:t>
+            </a:r>
+            <a:r>
+              <a:rPr lang="en-US" sz="3700" dirty="0"/>
+              <a:t> y </a:t>
+            </a:r>
+            <a:r>
+              <a:rPr lang="en-US" sz="3700" dirty="0" err="1"/>
+              <a:t>análisis</a:t>
+            </a:r>
+            <a:r>
+              <a:rPr lang="en-US" sz="3700" dirty="0"/>
+              <a:t> de </a:t>
+            </a:r>
+            <a:r>
+              <a:rPr lang="en-US" sz="3700" dirty="0" err="1"/>
+              <a:t>datos</a:t>
+            </a:r>
+            <a:endParaRPr lang="en-US" sz="3700" dirty="0"/>
           </a:p>
         </p:txBody>
       </p:sp>
@@ -9744,7 +9892,7 @@
         </p:nvSpPr>
         <p:spPr>
           <a:xfrm>
-            <a:off x="6476900" y="762001"/>
+            <a:off x="6476900" y="2794800"/>
             <a:ext cx="5334197" cy="3769835"/>
           </a:xfrm>
         </p:spPr>
@@ -9824,6 +9972,60 @@
           </a:p>
         </p:txBody>
       </p:sp>
+      <p:pic>
+        <p:nvPicPr>
+          <p:cNvPr id="3074" name="Picture 2" descr="Redes neuronales | ¿La panacea de la inteligencia artificial?">
+            <a:extLst>
+              <a:ext uri="{FF2B5EF4-FFF2-40B4-BE49-F238E27FC236}">
+                <a16:creationId xmlns:a16="http://schemas.microsoft.com/office/drawing/2014/main" id="{CC93D7A5-3BC9-287C-078E-B27794E43C23}"/>
+              </a:ext>
+            </a:extLst>
+          </p:cNvPr>
+          <p:cNvPicPr>
+            <a:picLocks noChangeAspect="1" noChangeArrowheads="1"/>
+          </p:cNvPicPr>
+          <p:nvPr/>
+        </p:nvPicPr>
+        <p:blipFill>
+          <a:blip r:embed="rId3">
+            <a:extLst>
+              <a:ext uri="{28A0092B-C50C-407E-A947-70E740481C1C}">
+                <a14:useLocalDpi xmlns:a14="http://schemas.microsoft.com/office/drawing/2010/main" val="0"/>
+              </a:ext>
+            </a:extLst>
+          </a:blip>
+          <a:srcRect/>
+          <a:stretch>
+            <a:fillRect/>
+          </a:stretch>
+        </p:blipFill>
+        <p:spPr bwMode="auto">
+          <a:xfrm>
+            <a:off x="761799" y="777909"/>
+            <a:ext cx="4953302" cy="2958422"/>
+          </a:xfrm>
+          <a:prstGeom prst="rect">
+            <a:avLst/>
+          </a:prstGeom>
+          <a:noFill/>
+          <a:effectLst>
+            <a:outerShdw blurRad="50800" dist="38100" dir="2700000" algn="tl" rotWithShape="0">
+              <a:prstClr val="black">
+                <a:alpha val="40000"/>
+              </a:prstClr>
+            </a:outerShdw>
+          </a:effectLst>
+          <a:extLst>
+            <a:ext uri="{909E8E84-426E-40DD-AFC4-6F175D3DCCD1}">
+              <a14:hiddenFill xmlns:a14="http://schemas.microsoft.com/office/drawing/2010/main">
+                <a:solidFill>
+                  <a:srgbClr val="FFFFFF"/>
+                </a:solidFill>
+              </a14:hiddenFill>
+            </a:ext>
+          </a:extLst>
+        </p:spPr>
+      </p:pic>
     </p:spTree>
     <p:extLst>
       <p:ext uri="{BB962C8B-B14F-4D97-AF65-F5344CB8AC3E}">
@@ -10016,13 +10218,13 @@
             <a:spLocks noGrp="1"/>
           </p:cNvSpPr>
           <p:nvPr>
-            <p:ph type="title"/>
+            <p:ph type="title" idx="4294967295"/>
           </p:nvPr>
         </p:nvSpPr>
         <p:spPr>
           <a:xfrm>
-            <a:off x="762000" y="1147119"/>
-            <a:ext cx="6149789" cy="1220619"/>
+            <a:off x="1200150" y="776288"/>
+            <a:ext cx="6149975" cy="1219200"/>
           </a:xfrm>
         </p:spPr>
         <p:txBody>
@@ -10051,58 +10253,6 @@
           </a:p>
         </p:txBody>
       </p:sp>
-      <p:cxnSp>
-        <p:nvCxnSpPr>
-          <p:cNvPr id="10" name="Straight Connector 9">
-            <a:extLst>
-              <a:ext uri="{FF2B5EF4-FFF2-40B4-BE49-F238E27FC236}">
-                <a16:creationId xmlns:a16="http://schemas.microsoft.com/office/drawing/2014/main" id="{CD8BC200-CFA3-C21D-9306-5C7BA0186540}"/>
-              </a:ext>
-              <a:ext uri="{C183D7F6-B498-43B3-948B-1728B52AA6E4}">
-                <adec:decorative xmlns:adec="http://schemas.microsoft.com/office/drawing/2017/decorative" val="1"/>
-              </a:ext>
-            </a:extLst>
-          </p:cNvPr>
-          <p:cNvCxnSpPr>
-            <a:cxnSpLocks noGrp="1" noRot="1" noChangeAspect="1" noMove="1" noResize="1" noEditPoints="1" noAdjustHandles="1" noChangeArrowheads="1" noChangeShapeType="1"/>
-          </p:cNvCxnSpPr>
-          <p:nvPr>
-            <p:extLst>
-              <p:ext uri="{386F3935-93C4-4BCD-93E2-E3B085C9AB24}">
-                <p16:designElem xmlns:p16="http://schemas.microsoft.com/office/powerpoint/2015/main" val="1"/>
-              </p:ext>
-            </p:extLst>
-          </p:nvPr>
-        </p:nvCxnSpPr>
-        <p:spPr>
-          <a:xfrm>
-            <a:off x="7551917" y="871146"/>
-            <a:ext cx="736939" cy="0"/>
-          </a:xfrm>
-          <a:prstGeom prst="line">
-            <a:avLst/>
-          </a:prstGeom>
-          <a:ln w="57150">
-            <a:solidFill>
-              <a:schemeClr val="accent4"/>
-            </a:solidFill>
-          </a:ln>
-        </p:spPr>
-        <p:style>
-          <a:lnRef idx="1">
-            <a:schemeClr val="accent1"/>
-          </a:lnRef>
-          <a:fillRef idx="0">
-            <a:schemeClr val="accent1"/>
-          </a:fillRef>
-          <a:effectRef idx="0">
-            <a:schemeClr val="accent1"/>
-          </a:effectRef>
-          <a:fontRef idx="minor">
-            <a:schemeClr val="tx1"/>
-          </a:fontRef>
-        </p:style>
-      </p:cxnSp>
       <p:sp>
         <p:nvSpPr>
           <p:cNvPr id="4" name="Marcador de contenido 3">
@@ -10116,7 +10266,7 @@
             <a:spLocks noGrp="1"/>
           </p:cNvSpPr>
           <p:nvPr>
-            <p:ph sz="half" idx="2"/>
+            <p:ph sz="half" idx="4294967295"/>
             <p:extLst>
               <p:ext uri="{E7BDC344-281C-4309-B0C6-D0EE65EED2A8}">
                 <p202:designPr xmlns:p202="http://schemas.microsoft.com/office/powerpoint/2020/02/main">
@@ -10131,8 +10281,8 @@
         </p:nvSpPr>
         <p:spPr>
           <a:xfrm>
-            <a:off x="7485202" y="1143000"/>
-            <a:ext cx="3929558" cy="4962466"/>
+            <a:off x="7235825" y="2381250"/>
+            <a:ext cx="3929062" cy="4062413"/>
           </a:xfrm>
         </p:spPr>
         <p:txBody>
@@ -10148,7 +10298,7 @@
               <a:buNone/>
             </a:pPr>
             <a:r>
-              <a:rPr lang="es-ES" sz="1400" b="1"/>
+              <a:rPr lang="es-ES" sz="1600" b="1" dirty="0"/>
               <a:t>Definición de distancia Manhattan</a:t>
             </a:r>
           </a:p>
@@ -10157,7 +10307,7 @@
               <a:buNone/>
             </a:pPr>
             <a:r>
-              <a:rPr lang="es-ES" sz="1400"/>
+              <a:rPr lang="es-ES" sz="1600" dirty="0"/>
               <a:t>La distancia Manhattan suma las diferencias absolutas entre las coordenadas de dos puntos.</a:t>
             </a:r>
           </a:p>
@@ -10169,7 +10319,7 @@
               <a:buNone/>
             </a:pPr>
             <a:r>
-              <a:rPr lang="es-ES" sz="1400" b="1"/>
+              <a:rPr lang="es-ES" sz="1600" b="1" dirty="0"/>
               <a:t>Aplicación en entornos urbanos</a:t>
             </a:r>
           </a:p>
@@ -10178,7 +10328,7 @@
               <a:buNone/>
             </a:pPr>
             <a:r>
-              <a:rPr lang="es-ES" sz="1400"/>
+              <a:rPr lang="es-ES" sz="1600" dirty="0"/>
               <a:t>Este modelo es útil para medir distancias en ciudades con calles en cuadrícula y rutas ortogonales.</a:t>
             </a:r>
           </a:p>
@@ -10190,7 +10340,7 @@
               <a:buNone/>
             </a:pPr>
             <a:r>
-              <a:rPr lang="es-ES" sz="1400" b="1"/>
+              <a:rPr lang="es-ES" sz="1600" b="1" dirty="0"/>
               <a:t>Restricción de movimiento</a:t>
             </a:r>
           </a:p>
@@ -10199,13 +10349,50 @@
               <a:buNone/>
             </a:pPr>
             <a:r>
-              <a:rPr lang="es-ES" sz="1400"/>
+              <a:rPr lang="es-ES" sz="1600" dirty="0"/>
               <a:t>Considera movimientos limitados a rutas verticales y horizontales, no diagonales.</a:t>
             </a:r>
-            <a:endParaRPr lang="es-MX" sz="1400"/>
+            <a:endParaRPr lang="es-MX" sz="1600" dirty="0"/>
           </a:p>
         </p:txBody>
       </p:sp>
+      <p:pic>
+        <p:nvPicPr>
+          <p:cNvPr id="5" name="Imagen 4">
+            <a:extLst>
+              <a:ext uri="{FF2B5EF4-FFF2-40B4-BE49-F238E27FC236}">
+                <a16:creationId xmlns:a16="http://schemas.microsoft.com/office/drawing/2014/main" id="{BC602C80-D958-DC41-ADFB-ECF002549F01}"/>
+              </a:ext>
+            </a:extLst>
+          </p:cNvPr>
+          <p:cNvPicPr>
+            <a:picLocks noChangeAspect="1"/>
+          </p:cNvPicPr>
+          <p:nvPr/>
+        </p:nvPicPr>
+        <p:blipFill>
+          <a:blip r:embed="rId3"/>
+          <a:stretch>
+            <a:fillRect/>
+          </a:stretch>
+        </p:blipFill>
+        <p:spPr>
+          <a:xfrm>
+            <a:off x="1386754" y="2367738"/>
+            <a:ext cx="5084618" cy="3613185"/>
+          </a:xfrm>
+          <a:prstGeom prst="rect">
+            <a:avLst/>
+          </a:prstGeom>
+          <a:effectLst>
+            <a:outerShdw blurRad="50800" dist="38100" dir="2700000" algn="tl" rotWithShape="0">
+              <a:prstClr val="black">
+                <a:alpha val="40000"/>
+              </a:prstClr>
+            </a:outerShdw>
+          </a:effectLst>
+        </p:spPr>
+      </p:pic>
     </p:spTree>
     <p:extLst>
       <p:ext uri="{BB962C8B-B14F-4D97-AF65-F5344CB8AC3E}">
@@ -10612,13 +10799,13 @@
         </p:nvSpPr>
         <p:spPr>
           <a:xfrm>
-            <a:off x="7116170" y="1069425"/>
-            <a:ext cx="3822189" cy="3742762"/>
+            <a:off x="7554680" y="481246"/>
+            <a:ext cx="3822189" cy="6276183"/>
           </a:xfrm>
         </p:spPr>
         <p:txBody>
           <a:bodyPr>
-            <a:normAutofit/>
+            <a:noAutofit/>
           </a:bodyPr>
           <a:lstStyle/>
           <a:p>
@@ -10629,17 +10816,16 @@
               <a:buNone/>
             </a:pPr>
             <a:r>
-              <a:rPr lang="es-ES" sz="1400" b="1" dirty="0"/>
-              <a:t>Generalización de métricas</a:t>
-            </a:r>
-          </a:p>
-          <a:p>
-            <a:pPr marL="0" lvl="1" indent="0">
-              <a:buNone/>
-            </a:pPr>
-            <a:r>
-              <a:rPr lang="es-ES" sz="1400" dirty="0"/>
-              <a:t>La distancia de Minkowski unifica la métrica euclidiana y Manhattan usando un parámetro p ajustable para mayor flexibilidad.</a:t>
+              <a:rPr lang="es-ES" sz="1600" b="1" dirty="0">
+                <a:latin typeface="Aptos" panose="020B0004020202020204" pitchFamily="34" charset="0"/>
+              </a:rPr>
+              <a:t>La distancia de Minkowski </a:t>
+            </a:r>
+            <a:r>
+              <a:rPr lang="es-ES" sz="1600" dirty="0">
+                <a:latin typeface="Aptos" panose="020B0004020202020204" pitchFamily="34" charset="0"/>
+              </a:rPr>
+              <a:t>es una fórmula matemática que permite medir la distancia entre dos puntos en un espacio multidimensional, ajustando la forma del cálculo mediante un parámetro 𝑝. Es una generalización de otras métricas conocidas como la distancia euclidiana (cuando 𝑝=2) y la distancia Manhattan (cuando 𝑝=1)</a:t>
             </a:r>
           </a:p>
           <a:p>
@@ -10650,7 +10836,9 @@
               <a:buNone/>
             </a:pPr>
             <a:r>
-              <a:rPr lang="es-ES" sz="1400" b="1" dirty="0"/>
+              <a:rPr lang="es-ES" sz="1600" b="1" dirty="0">
+                <a:latin typeface="Aptos" panose="020B0004020202020204" pitchFamily="34" charset="0"/>
+              </a:rPr>
               <a:t>Parámetro p ajustable</a:t>
             </a:r>
           </a:p>
@@ -10659,13 +10847,124 @@
               <a:buNone/>
             </a:pPr>
             <a:r>
-              <a:rPr lang="es-ES" sz="1400" dirty="0"/>
-              <a:t>El parámetro p permite adaptar la métrica a diferentes problemas optimizando la medida de distancia.</a:t>
-            </a:r>
-            <a:endParaRPr lang="es-MX" sz="1400" dirty="0"/>
+              <a:rPr lang="es-ES" sz="1600" dirty="0">
+                <a:latin typeface="Aptos" panose="020B0004020202020204" pitchFamily="34" charset="0"/>
+              </a:rPr>
+              <a:t>El parámetro “p” permite adaptar la métrica a diferentes problemas optimizando la medida de distancia.</a:t>
+            </a:r>
+          </a:p>
+          <a:p>
+            <a:pPr marL="0" lvl="1" indent="0">
+              <a:buNone/>
+            </a:pPr>
+            <a:endParaRPr lang="es-ES" sz="1600" b="1" dirty="0">
+              <a:latin typeface="Aptos" panose="020B0004020202020204" pitchFamily="34" charset="0"/>
+            </a:endParaRPr>
+          </a:p>
+          <a:p>
+            <a:pPr marL="0" lvl="1" indent="0">
+              <a:buNone/>
+            </a:pPr>
+            <a:r>
+              <a:rPr lang="es-ES" sz="1600" b="1" dirty="0">
+                <a:latin typeface="Aptos" panose="020B0004020202020204" pitchFamily="34" charset="0"/>
+              </a:rPr>
+              <a:t>Usos: </a:t>
+            </a:r>
+          </a:p>
+          <a:p>
+            <a:pPr marL="285750" lvl="1" indent="-285750"/>
+            <a:r>
+              <a:rPr lang="es-ES" sz="1600" dirty="0">
+                <a:latin typeface="Aptos" panose="020B0004020202020204" pitchFamily="34" charset="0"/>
+              </a:rPr>
+              <a:t>En machine </a:t>
+            </a:r>
+            <a:r>
+              <a:rPr lang="es-ES" sz="1600" dirty="0" err="1">
+                <a:latin typeface="Aptos" panose="020B0004020202020204" pitchFamily="34" charset="0"/>
+              </a:rPr>
+              <a:t>learning</a:t>
+            </a:r>
+            <a:r>
+              <a:rPr lang="es-ES" sz="1600" dirty="0">
+                <a:latin typeface="Aptos" panose="020B0004020202020204" pitchFamily="34" charset="0"/>
+              </a:rPr>
+              <a:t>, especialmente en algoritmos como k-NN y K-</a:t>
+            </a:r>
+            <a:r>
+              <a:rPr lang="es-ES" sz="1600" dirty="0" err="1">
+                <a:latin typeface="Aptos" panose="020B0004020202020204" pitchFamily="34" charset="0"/>
+              </a:rPr>
+              <a:t>means</a:t>
+            </a:r>
+            <a:r>
+              <a:rPr lang="es-ES" sz="1600" dirty="0">
+                <a:latin typeface="Aptos" panose="020B0004020202020204" pitchFamily="34" charset="0"/>
+              </a:rPr>
+              <a:t>, para medir similitud entre datos.</a:t>
+            </a:r>
+          </a:p>
+          <a:p>
+            <a:pPr marL="285750" lvl="1" indent="-285750"/>
+            <a:r>
+              <a:rPr lang="es-ES" sz="1600" dirty="0">
+                <a:latin typeface="Aptos" panose="020B0004020202020204" pitchFamily="34" charset="0"/>
+              </a:rPr>
+              <a:t>En análisis de datos, para detectar anomalías o agrupar elementos similares.</a:t>
+            </a:r>
+          </a:p>
+          <a:p>
+            <a:pPr marL="285750" lvl="1" indent="-285750"/>
+            <a:r>
+              <a:rPr lang="es-ES" sz="1600" dirty="0">
+                <a:latin typeface="Aptos" panose="020B0004020202020204" pitchFamily="34" charset="0"/>
+              </a:rPr>
+              <a:t>En espacios vectoriales normados, donde se requiere flexibilidad para adaptar la métrica a la geometría del problema.</a:t>
+            </a:r>
+            <a:endParaRPr lang="es-MX" sz="1600" dirty="0">
+              <a:latin typeface="Aptos" panose="020B0004020202020204" pitchFamily="34" charset="0"/>
+            </a:endParaRPr>
           </a:p>
         </p:txBody>
       </p:sp>
+      <p:pic>
+        <p:nvPicPr>
+          <p:cNvPr id="3" name="Imagen 2">
+            <a:extLst>
+              <a:ext uri="{FF2B5EF4-FFF2-40B4-BE49-F238E27FC236}">
+                <a16:creationId xmlns:a16="http://schemas.microsoft.com/office/drawing/2014/main" id="{6B5272D2-FD1D-3536-CB99-2616077A74F0}"/>
+              </a:ext>
+            </a:extLst>
+          </p:cNvPr>
+          <p:cNvPicPr>
+            <a:picLocks noChangeAspect="1"/>
+          </p:cNvPicPr>
+          <p:nvPr/>
+        </p:nvPicPr>
+        <p:blipFill>
+          <a:blip r:embed="rId3"/>
+          <a:stretch>
+            <a:fillRect/>
+          </a:stretch>
+        </p:blipFill>
+        <p:spPr>
+          <a:xfrm>
+            <a:off x="1253641" y="3171825"/>
+            <a:ext cx="5238750" cy="3143250"/>
+          </a:xfrm>
+          <a:prstGeom prst="rect">
+            <a:avLst/>
+          </a:prstGeom>
+          <a:effectLst>
+            <a:outerShdw blurRad="50800" dist="38100" dir="2700000" algn="tl" rotWithShape="0">
+              <a:prstClr val="black">
+                <a:alpha val="40000"/>
+              </a:prstClr>
+            </a:outerShdw>
+          </a:effectLst>
+        </p:spPr>
+      </p:pic>
     </p:spTree>
     <p:extLst>
       <p:ext uri="{BB962C8B-B14F-4D97-AF65-F5344CB8AC3E}">
@@ -13464,6 +13763,14 @@
 <file path=ppt/slides/slide3.xml><?xml version="1.0" encoding="utf-8"?>
 <p:sld xmlns:a="http://schemas.openxmlformats.org/drawingml/2006/main" xmlns:r="http://schemas.openxmlformats.org/officeDocument/2006/relationships" xmlns:p="http://schemas.openxmlformats.org/presentationml/2006/main">
   <p:cSld>
+    <p:bg>
+      <p:bgPr>
+        <a:solidFill>
+          <a:schemeClr val="bg1"/>
+        </a:solidFill>
+        <a:effectLst/>
+      </p:bgPr>
+    </p:bg>
     <p:spTree>
       <p:nvGrpSpPr>
         <p:cNvPr id="1" name=""/>
@@ -13478,6 +13785,129 @@
           <a:chExt cx="0" cy="0"/>
         </a:xfrm>
       </p:grpSpPr>
+      <p:sp useBgFill="1">
+        <p:nvSpPr>
+          <p:cNvPr id="12" name="Rectangle 11">
+            <a:extLst>
+              <a:ext uri="{FF2B5EF4-FFF2-40B4-BE49-F238E27FC236}">
+                <a16:creationId xmlns:a16="http://schemas.microsoft.com/office/drawing/2014/main" id="{B6FACB3C-9069-4791-BC5C-0DB7CD19B853}"/>
+              </a:ext>
+              <a:ext uri="{C183D7F6-B498-43B3-948B-1728B52AA6E4}">
+                <adec:decorative xmlns:adec="http://schemas.microsoft.com/office/drawing/2017/decorative" val="1"/>
+              </a:ext>
+            </a:extLst>
+          </p:cNvPr>
+          <p:cNvSpPr>
+            <a:spLocks noGrp="1" noRot="1" noChangeAspect="1" noMove="1" noResize="1" noEditPoints="1" noAdjustHandles="1" noChangeArrowheads="1" noChangeShapeType="1" noTextEdit="1"/>
+          </p:cNvSpPr>
+          <p:nvPr>
+            <p:extLst>
+              <p:ext uri="{386F3935-93C4-4BCD-93E2-E3B085C9AB24}">
+                <p16:designElem xmlns:p16="http://schemas.microsoft.com/office/powerpoint/2015/main" val="1"/>
+              </p:ext>
+            </p:extLst>
+          </p:nvPr>
+        </p:nvSpPr>
+        <p:spPr>
+          <a:xfrm>
+            <a:off x="0" y="0"/>
+            <a:ext cx="12192000" cy="6858000"/>
+          </a:xfrm>
+          <a:prstGeom prst="rect">
+            <a:avLst/>
+          </a:prstGeom>
+          <a:ln>
+            <a:noFill/>
+          </a:ln>
+        </p:spPr>
+        <p:style>
+          <a:lnRef idx="2">
+            <a:schemeClr val="accent1">
+              <a:shade val="50000"/>
+            </a:schemeClr>
+          </a:lnRef>
+          <a:fillRef idx="1">
+            <a:schemeClr val="accent1"/>
+          </a:fillRef>
+          <a:effectRef idx="0">
+            <a:schemeClr val="accent1"/>
+          </a:effectRef>
+          <a:fontRef idx="minor">
+            <a:schemeClr val="lt1"/>
+          </a:fontRef>
+        </p:style>
+        <p:txBody>
+          <a:bodyPr rtlCol="0" anchor="ctr"/>
+          <a:lstStyle/>
+          <a:p>
+            <a:pPr algn="ctr"/>
+            <a:endParaRPr lang="en-US"/>
+          </a:p>
+        </p:txBody>
+      </p:sp>
+      <p:sp>
+        <p:nvSpPr>
+          <p:cNvPr id="14" name="Rectangle 13">
+            <a:extLst>
+              <a:ext uri="{FF2B5EF4-FFF2-40B4-BE49-F238E27FC236}">
+                <a16:creationId xmlns:a16="http://schemas.microsoft.com/office/drawing/2014/main" id="{71F2038E-D777-4B76-81DD-DD13EE91B9DD}"/>
+              </a:ext>
+              <a:ext uri="{C183D7F6-B498-43B3-948B-1728B52AA6E4}">
+                <adec:decorative xmlns:adec="http://schemas.microsoft.com/office/drawing/2017/decorative" val="1"/>
+              </a:ext>
+            </a:extLst>
+          </p:cNvPr>
+          <p:cNvSpPr>
+            <a:spLocks noGrp="1" noRot="1" noChangeAspect="1" noMove="1" noResize="1" noEditPoints="1" noAdjustHandles="1" noChangeArrowheads="1" noChangeShapeType="1" noTextEdit="1"/>
+          </p:cNvSpPr>
+          <p:nvPr>
+            <p:extLst>
+              <p:ext uri="{386F3935-93C4-4BCD-93E2-E3B085C9AB24}">
+                <p16:designElem xmlns:p16="http://schemas.microsoft.com/office/powerpoint/2015/main" val="1"/>
+              </p:ext>
+            </p:extLst>
+          </p:nvPr>
+        </p:nvSpPr>
+        <p:spPr>
+          <a:xfrm>
+            <a:off x="305" y="0"/>
+            <a:ext cx="12191695" cy="6858000"/>
+          </a:xfrm>
+          <a:prstGeom prst="rect">
+            <a:avLst/>
+          </a:prstGeom>
+          <a:solidFill>
+            <a:schemeClr val="bg1"/>
+          </a:solidFill>
+          <a:ln>
+            <a:noFill/>
+          </a:ln>
+        </p:spPr>
+        <p:style>
+          <a:lnRef idx="2">
+            <a:schemeClr val="accent1">
+              <a:shade val="50000"/>
+            </a:schemeClr>
+          </a:lnRef>
+          <a:fillRef idx="1">
+            <a:schemeClr val="accent1"/>
+          </a:fillRef>
+          <a:effectRef idx="0">
+            <a:schemeClr val="accent1"/>
+          </a:effectRef>
+          <a:fontRef idx="minor">
+            <a:schemeClr val="lt1"/>
+          </a:fontRef>
+        </p:style>
+        <p:txBody>
+          <a:bodyPr rtlCol="0" anchor="ctr"/>
+          <a:lstStyle/>
+          <a:p>
+            <a:pPr algn="ctr"/>
+            <a:endParaRPr lang="en-US"/>
+          </a:p>
+        </p:txBody>
+      </p:sp>
       <p:sp>
         <p:nvSpPr>
           <p:cNvPr id="2" name="Título 1">
@@ -13496,61 +13926,31 @@
         </p:nvSpPr>
         <p:spPr>
           <a:xfrm>
-            <a:off x="6696186" y="909637"/>
-            <a:ext cx="4800600" cy="1307592"/>
+            <a:off x="804672" y="802955"/>
+            <a:ext cx="4766330" cy="1454051"/>
           </a:xfrm>
         </p:spPr>
         <p:txBody>
-          <a:bodyPr vert="horz" lIns="91440" tIns="45720" rIns="91440" bIns="45720" rtlCol="0" anchor="t">
-            <a:normAutofit fontScale="90000"/>
+          <a:bodyPr vert="horz" lIns="91440" tIns="45720" rIns="91440" bIns="45720" rtlCol="0" anchor="ctr">
+            <a:normAutofit/>
           </a:bodyPr>
           <a:lstStyle/>
           <a:p>
-            <a:pPr>
-              <a:lnSpc>
-                <a:spcPct val="90000"/>
-              </a:lnSpc>
-            </a:pPr>
-            <a:r>
-              <a:rPr lang="en-US"/>
+            <a:pPr defTabSz="914400"/>
+            <a:r>
+              <a:rPr lang="en-US" sz="3600" kern="1200">
+                <a:solidFill>
+                  <a:schemeClr val="tx2"/>
+                </a:solidFill>
+                <a:latin typeface="+mj-lt"/>
+                <a:ea typeface="+mj-ea"/>
+                <a:cs typeface="+mj-cs"/>
+              </a:rPr>
               <a:t>Modelo de espacio vectorial (VSM)</a:t>
             </a:r>
           </a:p>
         </p:txBody>
       </p:sp>
-      <p:pic>
-        <p:nvPicPr>
-          <p:cNvPr id="5" name="Marcador de contenido 4" descr="Fondo abstracto creativo con líneas de luz">
-            <a:extLst>
-              <a:ext uri="{FF2B5EF4-FFF2-40B4-BE49-F238E27FC236}">
-                <a16:creationId xmlns:a16="http://schemas.microsoft.com/office/drawing/2014/main" id="{79B2EDD8-DF47-4229-B649-477652E6E1EB}"/>
-              </a:ext>
-            </a:extLst>
-          </p:cNvPr>
-          <p:cNvPicPr>
-            <a:picLocks noGrp="1" noChangeAspect="1"/>
-          </p:cNvPicPr>
-          <p:nvPr>
-            <p:ph sz="half" idx="1"/>
-          </p:nvPr>
-        </p:nvPicPr>
-        <p:blipFill>
-          <a:blip r:embed="rId3"/>
-          <a:srcRect l="20842" r="20329" b="-1"/>
-          <a:stretch>
-            <a:fillRect/>
-          </a:stretch>
-        </p:blipFill>
-        <p:spPr>
-          <a:xfrm>
-            <a:off x="20" y="10"/>
-            <a:ext cx="6044164" cy="6857990"/>
-          </a:xfrm>
-          <a:prstGeom prst="rect">
-            <a:avLst/>
-          </a:prstGeom>
-        </p:spPr>
-      </p:pic>
       <p:sp>
         <p:nvSpPr>
           <p:cNvPr id="4" name="Marcador de contenido 3">
@@ -13579,8 +13979,8 @@
         </p:nvSpPr>
         <p:spPr>
           <a:xfrm>
-            <a:off x="6696186" y="2221992"/>
-            <a:ext cx="4800600" cy="3739896"/>
+            <a:off x="804672" y="2421683"/>
+            <a:ext cx="4765949" cy="3353476"/>
           </a:xfrm>
         </p:spPr>
         <p:txBody>
@@ -13596,7 +13996,11 @@
               <a:buNone/>
             </a:pPr>
             <a:r>
-              <a:rPr lang="es-ES" sz="1400" b="1"/>
+              <a:rPr lang="es-ES" sz="1400" b="1">
+                <a:solidFill>
+                  <a:schemeClr val="tx2"/>
+                </a:solidFill>
+              </a:rPr>
               <a:t>Representación Vectorial</a:t>
             </a:r>
           </a:p>
@@ -13605,7 +14009,11 @@
               <a:buNone/>
             </a:pPr>
             <a:r>
-              <a:rPr lang="es-ES" sz="1400"/>
+              <a:rPr lang="es-ES" sz="1400">
+                <a:solidFill>
+                  <a:schemeClr val="tx2"/>
+                </a:solidFill>
+              </a:rPr>
               <a:t>Documentos y consultas se representan como vectores en un espacio multidimensional para análisis eficiente.</a:t>
             </a:r>
           </a:p>
@@ -13617,7 +14025,11 @@
               <a:buNone/>
             </a:pPr>
             <a:r>
-              <a:rPr lang="es-ES" sz="1400" b="1"/>
+              <a:rPr lang="es-ES" sz="1400" b="1">
+                <a:solidFill>
+                  <a:schemeClr val="tx2"/>
+                </a:solidFill>
+              </a:rPr>
               <a:t>Recuperación de Información</a:t>
             </a:r>
           </a:p>
@@ -13626,13 +14038,2575 @@
               <a:buNone/>
             </a:pPr>
             <a:r>
-              <a:rPr lang="es-ES" sz="1400"/>
+              <a:rPr lang="es-ES" sz="1400">
+                <a:solidFill>
+                  <a:schemeClr val="tx2"/>
+                </a:solidFill>
+              </a:rPr>
               <a:t>El modelo facilita la recuperación y comparación de información basada en la similitud entre vectores.</a:t>
             </a:r>
-            <a:endParaRPr lang="es-MX" sz="1400"/>
+            <a:endParaRPr lang="es-MX" sz="1400">
+              <a:solidFill>
+                <a:schemeClr val="tx2"/>
+              </a:solidFill>
+            </a:endParaRPr>
           </a:p>
         </p:txBody>
       </p:sp>
+      <p:grpSp>
+        <p:nvGrpSpPr>
+          <p:cNvPr id="16" name="Group 15">
+            <a:extLst>
+              <a:ext uri="{FF2B5EF4-FFF2-40B4-BE49-F238E27FC236}">
+                <a16:creationId xmlns:a16="http://schemas.microsoft.com/office/drawing/2014/main" id="{DD354807-230F-4402-B1B9-F733A8F1F190}"/>
+              </a:ext>
+              <a:ext uri="{C183D7F6-B498-43B3-948B-1728B52AA6E4}">
+                <adec:decorative xmlns:adec="http://schemas.microsoft.com/office/drawing/2017/decorative" val="1"/>
+              </a:ext>
+            </a:extLst>
+          </p:cNvPr>
+          <p:cNvGrpSpPr>
+            <a:grpSpLocks noGrp="1" noUngrp="1" noRot="1" noChangeAspect="1" noMove="1" noResize="1"/>
+          </p:cNvGrpSpPr>
+          <p:nvPr>
+            <p:extLst>
+              <p:ext uri="{386F3935-93C4-4BCD-93E2-E3B085C9AB24}">
+                <p16:designElem xmlns:p16="http://schemas.microsoft.com/office/powerpoint/2015/main" val="1"/>
+              </p:ext>
+            </p:extLst>
+          </p:nvPr>
+        </p:nvGrpSpPr>
+        <p:grpSpPr>
+          <a:xfrm>
+            <a:off x="5818240" y="-16714"/>
+            <a:ext cx="6373761" cy="6874714"/>
+            <a:chOff x="5818240" y="-1"/>
+            <a:chExt cx="6373761" cy="6874714"/>
+          </a:xfrm>
+        </p:grpSpPr>
+        <p:sp>
+          <p:nvSpPr>
+            <p:cNvPr id="17" name="Freeform: Shape 16">
+              <a:extLst>
+                <a:ext uri="{FF2B5EF4-FFF2-40B4-BE49-F238E27FC236}">
+                  <a16:creationId xmlns:a16="http://schemas.microsoft.com/office/drawing/2014/main" id="{BF5A6F4A-CE87-4D5C-9382-8167967CE813}"/>
+                </a:ext>
+                <a:ext uri="{C183D7F6-B498-43B3-948B-1728B52AA6E4}">
+                  <adec:decorative xmlns:adec="http://schemas.microsoft.com/office/drawing/2017/decorative" val="1"/>
+                </a:ext>
+              </a:extLst>
+            </p:cNvPr>
+            <p:cNvSpPr/>
+            <p:nvPr>
+              <p:extLst>
+                <p:ext uri="{386F3935-93C4-4BCD-93E2-E3B085C9AB24}">
+                  <p16:designElem xmlns:p16="http://schemas.microsoft.com/office/powerpoint/2015/main" val="1"/>
+                </p:ext>
+              </p:extLst>
+            </p:nvPr>
+          </p:nvSpPr>
+          <p:spPr>
+            <a:xfrm>
+              <a:off x="5818240" y="-1"/>
+              <a:ext cx="6373761" cy="6874714"/>
+            </a:xfrm>
+            <a:custGeom>
+              <a:avLst/>
+              <a:gdLst>
+                <a:gd name="connsiteX0" fmla="*/ 6373761 w 6373761"/>
+                <a:gd name="connsiteY0" fmla="*/ 5771297 h 6874714"/>
+                <a:gd name="connsiteX1" fmla="*/ 6373761 w 6373761"/>
+                <a:gd name="connsiteY1" fmla="*/ 6247960 h 6874714"/>
+                <a:gd name="connsiteX2" fmla="*/ 6235932 w 6373761"/>
+                <a:gd name="connsiteY2" fmla="*/ 6361930 h 6874714"/>
+                <a:gd name="connsiteX3" fmla="*/ 5960375 w 6373761"/>
+                <a:gd name="connsiteY3" fmla="*/ 6587489 h 6874714"/>
+                <a:gd name="connsiteX4" fmla="*/ 5822907 w 6373761"/>
+                <a:gd name="connsiteY4" fmla="*/ 6701871 h 6874714"/>
+                <a:gd name="connsiteX5" fmla="*/ 5681115 w 6373761"/>
+                <a:gd name="connsiteY5" fmla="*/ 6816896 h 6874714"/>
+                <a:gd name="connsiteX6" fmla="*/ 5604096 w 6373761"/>
+                <a:gd name="connsiteY6" fmla="*/ 6874714 h 6874714"/>
+                <a:gd name="connsiteX7" fmla="*/ 4878485 w 6373761"/>
+                <a:gd name="connsiteY7" fmla="*/ 6874714 h 6874714"/>
+                <a:gd name="connsiteX8" fmla="*/ 5006014 w 6373761"/>
+                <a:gd name="connsiteY8" fmla="*/ 6800200 h 6874714"/>
+                <a:gd name="connsiteX9" fmla="*/ 5149855 w 6373761"/>
+                <a:gd name="connsiteY9" fmla="*/ 6707667 h 6874714"/>
+                <a:gd name="connsiteX10" fmla="*/ 5431866 w 6373761"/>
+                <a:gd name="connsiteY10" fmla="*/ 6506210 h 6874714"/>
+                <a:gd name="connsiteX11" fmla="*/ 5571036 w 6373761"/>
+                <a:gd name="connsiteY11" fmla="*/ 6399557 h 6874714"/>
+                <a:gd name="connsiteX12" fmla="*/ 5711649 w 6373761"/>
+                <a:gd name="connsiteY12" fmla="*/ 6288912 h 6874714"/>
+                <a:gd name="connsiteX13" fmla="*/ 6276589 w 6373761"/>
+                <a:gd name="connsiteY13" fmla="*/ 5852379 h 6874714"/>
+                <a:gd name="connsiteX14" fmla="*/ 3975975 w 6373761"/>
+                <a:gd name="connsiteY14" fmla="*/ 263 h 6874714"/>
+                <a:gd name="connsiteX15" fmla="*/ 4350473 w 6373761"/>
+                <a:gd name="connsiteY15" fmla="*/ 24963 h 6874714"/>
+                <a:gd name="connsiteX16" fmla="*/ 5077909 w 6373761"/>
+                <a:gd name="connsiteY16" fmla="*/ 189450 h 6874714"/>
+                <a:gd name="connsiteX17" fmla="*/ 5746507 w 6373761"/>
+                <a:gd name="connsiteY17" fmla="*/ 505804 h 6874714"/>
+                <a:gd name="connsiteX18" fmla="*/ 6322456 w 6373761"/>
+                <a:gd name="connsiteY18" fmla="*/ 956633 h 6874714"/>
+                <a:gd name="connsiteX19" fmla="*/ 6373761 w 6373761"/>
+                <a:gd name="connsiteY19" fmla="*/ 1011863 h 6874714"/>
+                <a:gd name="connsiteX20" fmla="*/ 6373761 w 6373761"/>
+                <a:gd name="connsiteY20" fmla="*/ 1185075 h 6874714"/>
+                <a:gd name="connsiteX21" fmla="*/ 6359489 w 6373761"/>
+                <a:gd name="connsiteY21" fmla="*/ 1169497 h 6874714"/>
+                <a:gd name="connsiteX22" fmla="*/ 6233869 w 6373761"/>
+                <a:gd name="connsiteY22" fmla="*/ 1047442 h 6874714"/>
+                <a:gd name="connsiteX23" fmla="*/ 5961423 w 6373761"/>
+                <a:gd name="connsiteY23" fmla="*/ 827953 h 6874714"/>
+                <a:gd name="connsiteX24" fmla="*/ 5663555 w 6373761"/>
+                <a:gd name="connsiteY24" fmla="*/ 645304 h 6874714"/>
+                <a:gd name="connsiteX25" fmla="*/ 5013827 w 6373761"/>
+                <a:gd name="connsiteY25" fmla="*/ 397863 h 6874714"/>
+                <a:gd name="connsiteX26" fmla="*/ 4327409 w 6373761"/>
+                <a:gd name="connsiteY26" fmla="*/ 302545 h 6874714"/>
+                <a:gd name="connsiteX27" fmla="*/ 3639939 w 6373761"/>
+                <a:gd name="connsiteY27" fmla="*/ 338868 h 6874714"/>
+                <a:gd name="connsiteX28" fmla="*/ 3302495 w 6373761"/>
+                <a:gd name="connsiteY28" fmla="*/ 403659 h 6874714"/>
+                <a:gd name="connsiteX29" fmla="*/ 2971604 w 6373761"/>
+                <a:gd name="connsiteY29" fmla="*/ 496273 h 6874714"/>
+                <a:gd name="connsiteX30" fmla="*/ 2648706 w 6373761"/>
+                <a:gd name="connsiteY30" fmla="*/ 614389 h 6874714"/>
+                <a:gd name="connsiteX31" fmla="*/ 2335374 w 6373761"/>
+                <a:gd name="connsiteY31" fmla="*/ 757109 h 6874714"/>
+                <a:gd name="connsiteX32" fmla="*/ 1741342 w 6373761"/>
+                <a:gd name="connsiteY32" fmla="*/ 1107725 h 6874714"/>
+                <a:gd name="connsiteX33" fmla="*/ 1600861 w 6373761"/>
+                <a:gd name="connsiteY33" fmla="*/ 1208710 h 6874714"/>
+                <a:gd name="connsiteX34" fmla="*/ 1531799 w 6373761"/>
+                <a:gd name="connsiteY34" fmla="*/ 1260879 h 6874714"/>
+                <a:gd name="connsiteX35" fmla="*/ 1463655 w 6373761"/>
+                <a:gd name="connsiteY35" fmla="*/ 1314333 h 6874714"/>
+                <a:gd name="connsiteX36" fmla="*/ 1200777 w 6373761"/>
+                <a:gd name="connsiteY36" fmla="*/ 1541166 h 6874714"/>
+                <a:gd name="connsiteX37" fmla="*/ 731501 w 6373761"/>
+                <a:gd name="connsiteY37" fmla="*/ 2055754 h 6874714"/>
+                <a:gd name="connsiteX38" fmla="*/ 531393 w 6373761"/>
+                <a:gd name="connsiteY38" fmla="*/ 2342739 h 6874714"/>
+                <a:gd name="connsiteX39" fmla="*/ 361033 w 6373761"/>
+                <a:gd name="connsiteY39" fmla="*/ 2649046 h 6874714"/>
+                <a:gd name="connsiteX40" fmla="*/ 323292 w 6373761"/>
+                <a:gd name="connsiteY40" fmla="*/ 2728263 h 6874714"/>
+                <a:gd name="connsiteX41" fmla="*/ 304945 w 6373761"/>
+                <a:gd name="connsiteY41" fmla="*/ 2768193 h 6874714"/>
+                <a:gd name="connsiteX42" fmla="*/ 287516 w 6373761"/>
+                <a:gd name="connsiteY42" fmla="*/ 2808510 h 6874714"/>
+                <a:gd name="connsiteX43" fmla="*/ 254230 w 6373761"/>
+                <a:gd name="connsiteY43" fmla="*/ 2889788 h 6874714"/>
+                <a:gd name="connsiteX44" fmla="*/ 223042 w 6373761"/>
+                <a:gd name="connsiteY44" fmla="*/ 2971968 h 6874714"/>
+                <a:gd name="connsiteX45" fmla="*/ 121611 w 6373761"/>
+                <a:gd name="connsiteY45" fmla="*/ 3308544 h 6874714"/>
+                <a:gd name="connsiteX46" fmla="*/ 39314 w 6373761"/>
+                <a:gd name="connsiteY46" fmla="*/ 4005912 h 6874714"/>
+                <a:gd name="connsiteX47" fmla="*/ 73910 w 6373761"/>
+                <a:gd name="connsiteY47" fmla="*/ 4354081 h 6874714"/>
+                <a:gd name="connsiteX48" fmla="*/ 179534 w 6373761"/>
+                <a:gd name="connsiteY48" fmla="*/ 4687050 h 6874714"/>
+                <a:gd name="connsiteX49" fmla="*/ 215964 w 6373761"/>
+                <a:gd name="connsiteY49" fmla="*/ 4766654 h 6874714"/>
+                <a:gd name="connsiteX50" fmla="*/ 256457 w 6373761"/>
+                <a:gd name="connsiteY50" fmla="*/ 4844455 h 6874714"/>
+                <a:gd name="connsiteX51" fmla="*/ 346225 w 6373761"/>
+                <a:gd name="connsiteY51" fmla="*/ 4995290 h 6874714"/>
+                <a:gd name="connsiteX52" fmla="*/ 445296 w 6373761"/>
+                <a:gd name="connsiteY52" fmla="*/ 5140971 h 6874714"/>
+                <a:gd name="connsiteX53" fmla="*/ 551443 w 6373761"/>
+                <a:gd name="connsiteY53" fmla="*/ 5282531 h 6874714"/>
+                <a:gd name="connsiteX54" fmla="*/ 772387 w 6373761"/>
+                <a:gd name="connsiteY54" fmla="*/ 5562561 h 6874714"/>
+                <a:gd name="connsiteX55" fmla="*/ 882858 w 6373761"/>
+                <a:gd name="connsiteY55" fmla="*/ 5704507 h 6874714"/>
+                <a:gd name="connsiteX56" fmla="*/ 990316 w 6373761"/>
+                <a:gd name="connsiteY56" fmla="*/ 5848258 h 6874714"/>
+                <a:gd name="connsiteX57" fmla="*/ 1097774 w 6373761"/>
+                <a:gd name="connsiteY57" fmla="*/ 5987114 h 6874714"/>
+                <a:gd name="connsiteX58" fmla="*/ 1210080 w 6373761"/>
+                <a:gd name="connsiteY58" fmla="*/ 6121203 h 6874714"/>
+                <a:gd name="connsiteX59" fmla="*/ 1448192 w 6373761"/>
+                <a:gd name="connsiteY59" fmla="*/ 6374054 h 6874714"/>
+                <a:gd name="connsiteX60" fmla="*/ 1982991 w 6373761"/>
+                <a:gd name="connsiteY60" fmla="*/ 6796158 h 6874714"/>
+                <a:gd name="connsiteX61" fmla="*/ 2118475 w 6373761"/>
+                <a:gd name="connsiteY61" fmla="*/ 6874714 h 6874714"/>
+                <a:gd name="connsiteX62" fmla="*/ 1569874 w 6373761"/>
+                <a:gd name="connsiteY62" fmla="*/ 6874714 h 6874714"/>
+                <a:gd name="connsiteX63" fmla="*/ 1507802 w 6373761"/>
+                <a:gd name="connsiteY63" fmla="*/ 6817815 h 6874714"/>
+                <a:gd name="connsiteX64" fmla="*/ 1256865 w 6373761"/>
+                <a:gd name="connsiteY64" fmla="*/ 6543437 h 6874714"/>
+                <a:gd name="connsiteX65" fmla="*/ 1038410 w 6373761"/>
+                <a:gd name="connsiteY65" fmla="*/ 6248722 h 6874714"/>
+                <a:gd name="connsiteX66" fmla="*/ 845380 w 6373761"/>
+                <a:gd name="connsiteY66" fmla="*/ 5941386 h 6874714"/>
+                <a:gd name="connsiteX67" fmla="*/ 755351 w 6373761"/>
+                <a:gd name="connsiteY67" fmla="*/ 5788877 h 6874714"/>
+                <a:gd name="connsiteX68" fmla="*/ 661784 w 6373761"/>
+                <a:gd name="connsiteY68" fmla="*/ 5638944 h 6874714"/>
+                <a:gd name="connsiteX69" fmla="*/ 466525 w 6373761"/>
+                <a:gd name="connsiteY69" fmla="*/ 5340366 h 6874714"/>
+                <a:gd name="connsiteX70" fmla="*/ 370992 w 6373761"/>
+                <a:gd name="connsiteY70" fmla="*/ 5188502 h 6874714"/>
+                <a:gd name="connsiteX71" fmla="*/ 280046 w 6373761"/>
+                <a:gd name="connsiteY71" fmla="*/ 5033287 h 6874714"/>
+                <a:gd name="connsiteX72" fmla="*/ 126853 w 6373761"/>
+                <a:gd name="connsiteY72" fmla="*/ 4707660 h 6874714"/>
+                <a:gd name="connsiteX73" fmla="*/ 30272 w 6373761"/>
+                <a:gd name="connsiteY73" fmla="*/ 4362068 h 6874714"/>
+                <a:gd name="connsiteX74" fmla="*/ 0 w 6373761"/>
+                <a:gd name="connsiteY74" fmla="*/ 4005912 h 6874714"/>
+                <a:gd name="connsiteX75" fmla="*/ 270480 w 6373761"/>
+                <a:gd name="connsiteY75" fmla="*/ 2610532 h 6874714"/>
+                <a:gd name="connsiteX76" fmla="*/ 415942 w 6373761"/>
+                <a:gd name="connsiteY76" fmla="*/ 2280526 h 6874714"/>
+                <a:gd name="connsiteX77" fmla="*/ 590102 w 6373761"/>
+                <a:gd name="connsiteY77" fmla="*/ 1962626 h 6874714"/>
+                <a:gd name="connsiteX78" fmla="*/ 1020719 w 6373761"/>
+                <a:gd name="connsiteY78" fmla="*/ 1373070 h 6874714"/>
+                <a:gd name="connsiteX79" fmla="*/ 1275080 w 6373761"/>
+                <a:gd name="connsiteY79" fmla="*/ 1107081 h 6874714"/>
+                <a:gd name="connsiteX80" fmla="*/ 1342437 w 6373761"/>
+                <a:gd name="connsiteY80" fmla="*/ 1043965 h 6874714"/>
+                <a:gd name="connsiteX81" fmla="*/ 1411106 w 6373761"/>
+                <a:gd name="connsiteY81" fmla="*/ 982138 h 6874714"/>
+                <a:gd name="connsiteX82" fmla="*/ 1553029 w 6373761"/>
+                <a:gd name="connsiteY82" fmla="*/ 863376 h 6874714"/>
+                <a:gd name="connsiteX83" fmla="*/ 2173401 w 6373761"/>
+                <a:gd name="connsiteY83" fmla="*/ 454409 h 6874714"/>
+                <a:gd name="connsiteX84" fmla="*/ 3599708 w 6373761"/>
+                <a:gd name="connsiteY84" fmla="*/ 16332 h 6874714"/>
+                <a:gd name="connsiteX85" fmla="*/ 3975975 w 6373761"/>
+                <a:gd name="connsiteY85" fmla="*/ 263 h 6874714"/>
+              </a:gdLst>
+              <a:ahLst/>
+              <a:cxnLst>
+                <a:cxn ang="0">
+                  <a:pos x="connsiteX0" y="connsiteY0"/>
+                </a:cxn>
+                <a:cxn ang="0">
+                  <a:pos x="connsiteX1" y="connsiteY1"/>
+                </a:cxn>
+                <a:cxn ang="0">
+                  <a:pos x="connsiteX2" y="connsiteY2"/>
+                </a:cxn>
+                <a:cxn ang="0">
+                  <a:pos x="connsiteX3" y="connsiteY3"/>
+                </a:cxn>
+                <a:cxn ang="0">
+                  <a:pos x="connsiteX4" y="connsiteY4"/>
+                </a:cxn>
+                <a:cxn ang="0">
+                  <a:pos x="connsiteX5" y="connsiteY5"/>
+                </a:cxn>
+                <a:cxn ang="0">
+                  <a:pos x="connsiteX6" y="connsiteY6"/>
+                </a:cxn>
+                <a:cxn ang="0">
+                  <a:pos x="connsiteX7" y="connsiteY7"/>
+                </a:cxn>
+                <a:cxn ang="0">
+                  <a:pos x="connsiteX8" y="connsiteY8"/>
+                </a:cxn>
+                <a:cxn ang="0">
+                  <a:pos x="connsiteX9" y="connsiteY9"/>
+                </a:cxn>
+                <a:cxn ang="0">
+                  <a:pos x="connsiteX10" y="connsiteY10"/>
+                </a:cxn>
+                <a:cxn ang="0">
+                  <a:pos x="connsiteX11" y="connsiteY11"/>
+                </a:cxn>
+                <a:cxn ang="0">
+                  <a:pos x="connsiteX12" y="connsiteY12"/>
+                </a:cxn>
+                <a:cxn ang="0">
+                  <a:pos x="connsiteX13" y="connsiteY13"/>
+                </a:cxn>
+                <a:cxn ang="0">
+                  <a:pos x="connsiteX14" y="connsiteY14"/>
+                </a:cxn>
+                <a:cxn ang="0">
+                  <a:pos x="connsiteX15" y="connsiteY15"/>
+                </a:cxn>
+                <a:cxn ang="0">
+                  <a:pos x="connsiteX16" y="connsiteY16"/>
+                </a:cxn>
+                <a:cxn ang="0">
+                  <a:pos x="connsiteX17" y="connsiteY17"/>
+                </a:cxn>
+                <a:cxn ang="0">
+                  <a:pos x="connsiteX18" y="connsiteY18"/>
+                </a:cxn>
+                <a:cxn ang="0">
+                  <a:pos x="connsiteX19" y="connsiteY19"/>
+                </a:cxn>
+                <a:cxn ang="0">
+                  <a:pos x="connsiteX20" y="connsiteY20"/>
+                </a:cxn>
+                <a:cxn ang="0">
+                  <a:pos x="connsiteX21" y="connsiteY21"/>
+                </a:cxn>
+                <a:cxn ang="0">
+                  <a:pos x="connsiteX22" y="connsiteY22"/>
+                </a:cxn>
+                <a:cxn ang="0">
+                  <a:pos x="connsiteX23" y="connsiteY23"/>
+                </a:cxn>
+                <a:cxn ang="0">
+                  <a:pos x="connsiteX24" y="connsiteY24"/>
+                </a:cxn>
+                <a:cxn ang="0">
+                  <a:pos x="connsiteX25" y="connsiteY25"/>
+                </a:cxn>
+                <a:cxn ang="0">
+                  <a:pos x="connsiteX26" y="connsiteY26"/>
+                </a:cxn>
+                <a:cxn ang="0">
+                  <a:pos x="connsiteX27" y="connsiteY27"/>
+                </a:cxn>
+                <a:cxn ang="0">
+                  <a:pos x="connsiteX28" y="connsiteY28"/>
+                </a:cxn>
+                <a:cxn ang="0">
+                  <a:pos x="connsiteX29" y="connsiteY29"/>
+                </a:cxn>
+                <a:cxn ang="0">
+                  <a:pos x="connsiteX30" y="connsiteY30"/>
+                </a:cxn>
+                <a:cxn ang="0">
+                  <a:pos x="connsiteX31" y="connsiteY31"/>
+                </a:cxn>
+                <a:cxn ang="0">
+                  <a:pos x="connsiteX32" y="connsiteY32"/>
+                </a:cxn>
+                <a:cxn ang="0">
+                  <a:pos x="connsiteX33" y="connsiteY33"/>
+                </a:cxn>
+                <a:cxn ang="0">
+                  <a:pos x="connsiteX34" y="connsiteY34"/>
+                </a:cxn>
+                <a:cxn ang="0">
+                  <a:pos x="connsiteX35" y="connsiteY35"/>
+                </a:cxn>
+                <a:cxn ang="0">
+                  <a:pos x="connsiteX36" y="connsiteY36"/>
+                </a:cxn>
+                <a:cxn ang="0">
+                  <a:pos x="connsiteX37" y="connsiteY37"/>
+                </a:cxn>
+                <a:cxn ang="0">
+                  <a:pos x="connsiteX38" y="connsiteY38"/>
+                </a:cxn>
+                <a:cxn ang="0">
+                  <a:pos x="connsiteX39" y="connsiteY39"/>
+                </a:cxn>
+                <a:cxn ang="0">
+                  <a:pos x="connsiteX40" y="connsiteY40"/>
+                </a:cxn>
+                <a:cxn ang="0">
+                  <a:pos x="connsiteX41" y="connsiteY41"/>
+                </a:cxn>
+                <a:cxn ang="0">
+                  <a:pos x="connsiteX42" y="connsiteY42"/>
+                </a:cxn>
+                <a:cxn ang="0">
+                  <a:pos x="connsiteX43" y="connsiteY43"/>
+                </a:cxn>
+                <a:cxn ang="0">
+                  <a:pos x="connsiteX44" y="connsiteY44"/>
+                </a:cxn>
+                <a:cxn ang="0">
+                  <a:pos x="connsiteX45" y="connsiteY45"/>
+                </a:cxn>
+                <a:cxn ang="0">
+                  <a:pos x="connsiteX46" y="connsiteY46"/>
+                </a:cxn>
+                <a:cxn ang="0">
+                  <a:pos x="connsiteX47" y="connsiteY47"/>
+                </a:cxn>
+                <a:cxn ang="0">
+                  <a:pos x="connsiteX48" y="connsiteY48"/>
+                </a:cxn>
+                <a:cxn ang="0">
+                  <a:pos x="connsiteX49" y="connsiteY49"/>
+                </a:cxn>
+                <a:cxn ang="0">
+                  <a:pos x="connsiteX50" y="connsiteY50"/>
+                </a:cxn>
+                <a:cxn ang="0">
+                  <a:pos x="connsiteX51" y="connsiteY51"/>
+                </a:cxn>
+                <a:cxn ang="0">
+                  <a:pos x="connsiteX52" y="connsiteY52"/>
+                </a:cxn>
+                <a:cxn ang="0">
+                  <a:pos x="connsiteX53" y="connsiteY53"/>
+                </a:cxn>
+                <a:cxn ang="0">
+                  <a:pos x="connsiteX54" y="connsiteY54"/>
+                </a:cxn>
+                <a:cxn ang="0">
+                  <a:pos x="connsiteX55" y="connsiteY55"/>
+                </a:cxn>
+                <a:cxn ang="0">
+                  <a:pos x="connsiteX56" y="connsiteY56"/>
+                </a:cxn>
+                <a:cxn ang="0">
+                  <a:pos x="connsiteX57" y="connsiteY57"/>
+                </a:cxn>
+                <a:cxn ang="0">
+                  <a:pos x="connsiteX58" y="connsiteY58"/>
+                </a:cxn>
+                <a:cxn ang="0">
+                  <a:pos x="connsiteX59" y="connsiteY59"/>
+                </a:cxn>
+                <a:cxn ang="0">
+                  <a:pos x="connsiteX60" y="connsiteY60"/>
+                </a:cxn>
+                <a:cxn ang="0">
+                  <a:pos x="connsiteX61" y="connsiteY61"/>
+                </a:cxn>
+                <a:cxn ang="0">
+                  <a:pos x="connsiteX62" y="connsiteY62"/>
+                </a:cxn>
+                <a:cxn ang="0">
+                  <a:pos x="connsiteX63" y="connsiteY63"/>
+                </a:cxn>
+                <a:cxn ang="0">
+                  <a:pos x="connsiteX64" y="connsiteY64"/>
+                </a:cxn>
+                <a:cxn ang="0">
+                  <a:pos x="connsiteX65" y="connsiteY65"/>
+                </a:cxn>
+                <a:cxn ang="0">
+                  <a:pos x="connsiteX66" y="connsiteY66"/>
+                </a:cxn>
+                <a:cxn ang="0">
+                  <a:pos x="connsiteX67" y="connsiteY67"/>
+                </a:cxn>
+                <a:cxn ang="0">
+                  <a:pos x="connsiteX68" y="connsiteY68"/>
+                </a:cxn>
+                <a:cxn ang="0">
+                  <a:pos x="connsiteX69" y="connsiteY69"/>
+                </a:cxn>
+                <a:cxn ang="0">
+                  <a:pos x="connsiteX70" y="connsiteY70"/>
+                </a:cxn>
+                <a:cxn ang="0">
+                  <a:pos x="connsiteX71" y="connsiteY71"/>
+                </a:cxn>
+                <a:cxn ang="0">
+                  <a:pos x="connsiteX72" y="connsiteY72"/>
+                </a:cxn>
+                <a:cxn ang="0">
+                  <a:pos x="connsiteX73" y="connsiteY73"/>
+                </a:cxn>
+                <a:cxn ang="0">
+                  <a:pos x="connsiteX74" y="connsiteY74"/>
+                </a:cxn>
+                <a:cxn ang="0">
+                  <a:pos x="connsiteX75" y="connsiteY75"/>
+                </a:cxn>
+                <a:cxn ang="0">
+                  <a:pos x="connsiteX76" y="connsiteY76"/>
+                </a:cxn>
+                <a:cxn ang="0">
+                  <a:pos x="connsiteX77" y="connsiteY77"/>
+                </a:cxn>
+                <a:cxn ang="0">
+                  <a:pos x="connsiteX78" y="connsiteY78"/>
+                </a:cxn>
+                <a:cxn ang="0">
+                  <a:pos x="connsiteX79" y="connsiteY79"/>
+                </a:cxn>
+                <a:cxn ang="0">
+                  <a:pos x="connsiteX80" y="connsiteY80"/>
+                </a:cxn>
+                <a:cxn ang="0">
+                  <a:pos x="connsiteX81" y="connsiteY81"/>
+                </a:cxn>
+                <a:cxn ang="0">
+                  <a:pos x="connsiteX82" y="connsiteY82"/>
+                </a:cxn>
+                <a:cxn ang="0">
+                  <a:pos x="connsiteX83" y="connsiteY83"/>
+                </a:cxn>
+                <a:cxn ang="0">
+                  <a:pos x="connsiteX84" y="connsiteY84"/>
+                </a:cxn>
+                <a:cxn ang="0">
+                  <a:pos x="connsiteX85" y="connsiteY85"/>
+                </a:cxn>
+              </a:cxnLst>
+              <a:rect l="l" t="t" r="r" b="b"/>
+              <a:pathLst>
+                <a:path w="6373761" h="6874714">
+                  <a:moveTo>
+                    <a:pt x="6373761" y="5771297"/>
+                  </a:moveTo>
+                  <a:lnTo>
+                    <a:pt x="6373761" y="6247960"/>
+                  </a:lnTo>
+                  <a:lnTo>
+                    <a:pt x="6235932" y="6361930"/>
+                  </a:lnTo>
+                  <a:cubicBezTo>
+                    <a:pt x="6143250" y="6437460"/>
+                    <a:pt x="6051059" y="6512200"/>
+                    <a:pt x="5960375" y="6587489"/>
+                  </a:cubicBezTo>
+                  <a:lnTo>
+                    <a:pt x="5822907" y="6701871"/>
+                  </a:lnTo>
+                  <a:cubicBezTo>
+                    <a:pt x="5776123" y="6740385"/>
+                    <a:pt x="5729079" y="6778899"/>
+                    <a:pt x="5681115" y="6816896"/>
+                  </a:cubicBezTo>
+                  <a:lnTo>
+                    <a:pt x="5604096" y="6874714"/>
+                  </a:lnTo>
+                  <a:lnTo>
+                    <a:pt x="4878485" y="6874714"/>
+                  </a:lnTo>
+                  <a:lnTo>
+                    <a:pt x="5006014" y="6800200"/>
+                  </a:lnTo>
+                  <a:cubicBezTo>
+                    <a:pt x="5054354" y="6770429"/>
+                    <a:pt x="5102285" y="6739483"/>
+                    <a:pt x="5149855" y="6707667"/>
+                  </a:cubicBezTo>
+                  <a:cubicBezTo>
+                    <a:pt x="5244993" y="6643906"/>
+                    <a:pt x="5338561" y="6576025"/>
+                    <a:pt x="5431866" y="6506210"/>
+                  </a:cubicBezTo>
+                  <a:cubicBezTo>
+                    <a:pt x="5478386" y="6471304"/>
+                    <a:pt x="5524777" y="6435495"/>
+                    <a:pt x="5571036" y="6399557"/>
+                  </a:cubicBezTo>
+                  <a:lnTo>
+                    <a:pt x="5711649" y="6288912"/>
+                  </a:lnTo>
+                  <a:cubicBezTo>
+                    <a:pt x="5902059" y="6140395"/>
+                    <a:pt x="6093257" y="5998320"/>
+                    <a:pt x="6276589" y="5852379"/>
+                  </a:cubicBezTo>
+                  <a:close/>
+                  <a:moveTo>
+                    <a:pt x="3975975" y="263"/>
+                  </a:moveTo>
+                  <a:cubicBezTo>
+                    <a:pt x="4101550" y="1809"/>
+                    <a:pt x="4226830" y="10149"/>
+                    <a:pt x="4350473" y="24963"/>
+                  </a:cubicBezTo>
+                  <a:cubicBezTo>
+                    <a:pt x="4598149" y="54846"/>
+                    <a:pt x="4842943" y="108687"/>
+                    <a:pt x="5077909" y="189450"/>
+                  </a:cubicBezTo>
+                  <a:cubicBezTo>
+                    <a:pt x="5312876" y="269955"/>
+                    <a:pt x="5537357" y="376867"/>
+                    <a:pt x="5746507" y="505804"/>
+                  </a:cubicBezTo>
+                  <a:cubicBezTo>
+                    <a:pt x="5955527" y="634999"/>
+                    <a:pt x="6148688" y="786864"/>
+                    <a:pt x="6322456" y="956633"/>
+                  </a:cubicBezTo>
+                  <a:lnTo>
+                    <a:pt x="6373761" y="1011863"/>
+                  </a:lnTo>
+                  <a:lnTo>
+                    <a:pt x="6373761" y="1185075"/>
+                  </a:lnTo>
+                  <a:lnTo>
+                    <a:pt x="6359489" y="1169497"/>
+                  </a:lnTo>
+                  <a:cubicBezTo>
+                    <a:pt x="6318811" y="1127602"/>
+                    <a:pt x="6276917" y="1086890"/>
+                    <a:pt x="6233869" y="1047442"/>
+                  </a:cubicBezTo>
+                  <a:cubicBezTo>
+                    <a:pt x="6147509" y="968870"/>
+                    <a:pt x="6056431" y="895448"/>
+                    <a:pt x="5961423" y="827953"/>
+                  </a:cubicBezTo>
+                  <a:cubicBezTo>
+                    <a:pt x="5865891" y="761102"/>
+                    <a:pt x="5766688" y="699403"/>
+                    <a:pt x="5663555" y="645304"/>
+                  </a:cubicBezTo>
+                  <a:cubicBezTo>
+                    <a:pt x="5457943" y="535816"/>
+                    <a:pt x="5238703" y="453894"/>
+                    <a:pt x="5013827" y="397863"/>
+                  </a:cubicBezTo>
+                  <a:cubicBezTo>
+                    <a:pt x="4788953" y="341703"/>
+                    <a:pt x="4558442" y="310917"/>
+                    <a:pt x="4327409" y="302545"/>
+                  </a:cubicBezTo>
+                  <a:cubicBezTo>
+                    <a:pt x="4096111" y="293012"/>
+                    <a:pt x="3867174" y="305893"/>
+                    <a:pt x="3639939" y="338868"/>
+                  </a:cubicBezTo>
+                  <a:cubicBezTo>
+                    <a:pt x="3526585" y="355999"/>
+                    <a:pt x="3413885" y="377254"/>
+                    <a:pt x="3302495" y="403659"/>
+                  </a:cubicBezTo>
+                  <a:cubicBezTo>
+                    <a:pt x="3191107" y="430451"/>
+                    <a:pt x="3080634" y="460978"/>
+                    <a:pt x="2971604" y="496273"/>
+                  </a:cubicBezTo>
+                  <a:cubicBezTo>
+                    <a:pt x="2862573" y="531437"/>
+                    <a:pt x="2754854" y="570852"/>
+                    <a:pt x="2648706" y="614389"/>
+                  </a:cubicBezTo>
+                  <a:cubicBezTo>
+                    <a:pt x="2542690" y="658056"/>
+                    <a:pt x="2438114" y="705714"/>
+                    <a:pt x="2335374" y="757109"/>
+                  </a:cubicBezTo>
+                  <a:cubicBezTo>
+                    <a:pt x="2129894" y="859769"/>
+                    <a:pt x="1931228" y="976855"/>
+                    <a:pt x="1741342" y="1107725"/>
+                  </a:cubicBezTo>
+                  <a:cubicBezTo>
+                    <a:pt x="1694035" y="1140571"/>
+                    <a:pt x="1646858" y="1173933"/>
+                    <a:pt x="1600861" y="1208710"/>
+                  </a:cubicBezTo>
+                  <a:cubicBezTo>
+                    <a:pt x="1577535" y="1225713"/>
+                    <a:pt x="1554732" y="1243361"/>
+                    <a:pt x="1531799" y="1260879"/>
+                  </a:cubicBezTo>
+                  <a:cubicBezTo>
+                    <a:pt x="1508735" y="1278267"/>
+                    <a:pt x="1486064" y="1296171"/>
+                    <a:pt x="1463655" y="1314333"/>
+                  </a:cubicBezTo>
+                  <a:cubicBezTo>
+                    <a:pt x="1373627" y="1386853"/>
+                    <a:pt x="1285564" y="1462077"/>
+                    <a:pt x="1200777" y="1541166"/>
+                  </a:cubicBezTo>
+                  <a:cubicBezTo>
+                    <a:pt x="1030810" y="1698827"/>
+                    <a:pt x="873161" y="1870785"/>
+                    <a:pt x="731501" y="2055754"/>
+                  </a:cubicBezTo>
+                  <a:cubicBezTo>
+                    <a:pt x="660734" y="2148239"/>
+                    <a:pt x="593771" y="2243944"/>
+                    <a:pt x="531393" y="2342739"/>
+                  </a:cubicBezTo>
+                  <a:cubicBezTo>
+                    <a:pt x="470063" y="2442050"/>
+                    <a:pt x="412140" y="2543810"/>
+                    <a:pt x="361033" y="2649046"/>
+                  </a:cubicBezTo>
+                  <a:cubicBezTo>
+                    <a:pt x="347798" y="2675194"/>
+                    <a:pt x="335479" y="2701728"/>
+                    <a:pt x="323292" y="2728263"/>
+                  </a:cubicBezTo>
+                  <a:lnTo>
+                    <a:pt x="304945" y="2768193"/>
+                  </a:lnTo>
+                  <a:lnTo>
+                    <a:pt x="287516" y="2808510"/>
+                  </a:lnTo>
+                  <a:cubicBezTo>
+                    <a:pt x="276115" y="2835432"/>
+                    <a:pt x="264583" y="2862352"/>
+                    <a:pt x="254230" y="2889788"/>
+                  </a:cubicBezTo>
+                  <a:cubicBezTo>
+                    <a:pt x="243877" y="2917224"/>
+                    <a:pt x="232477" y="2944274"/>
+                    <a:pt x="223042" y="2971968"/>
+                  </a:cubicBezTo>
+                  <a:cubicBezTo>
+                    <a:pt x="182679" y="3081970"/>
+                    <a:pt x="148475" y="3194291"/>
+                    <a:pt x="121611" y="3308544"/>
+                  </a:cubicBezTo>
+                  <a:cubicBezTo>
+                    <a:pt x="67096" y="3536534"/>
+                    <a:pt x="39183" y="3771224"/>
+                    <a:pt x="39314" y="4005912"/>
+                  </a:cubicBezTo>
+                  <a:cubicBezTo>
+                    <a:pt x="39969" y="4122871"/>
+                    <a:pt x="51109" y="4239571"/>
+                    <a:pt x="73910" y="4354081"/>
+                  </a:cubicBezTo>
+                  <a:cubicBezTo>
+                    <a:pt x="97892" y="4468334"/>
+                    <a:pt x="132619" y="4580140"/>
+                    <a:pt x="179534" y="4687050"/>
+                  </a:cubicBezTo>
+                  <a:cubicBezTo>
+                    <a:pt x="190673" y="4713972"/>
+                    <a:pt x="203647" y="4740249"/>
+                    <a:pt x="215964" y="4766654"/>
+                  </a:cubicBezTo>
+                  <a:cubicBezTo>
+                    <a:pt x="229332" y="4792674"/>
+                    <a:pt x="242043" y="4818950"/>
+                    <a:pt x="256457" y="4844455"/>
+                  </a:cubicBezTo>
+                  <a:cubicBezTo>
+                    <a:pt x="283978" y="4895978"/>
+                    <a:pt x="314642" y="4945956"/>
+                    <a:pt x="346225" y="4995290"/>
+                  </a:cubicBezTo>
+                  <a:cubicBezTo>
+                    <a:pt x="377676" y="5044752"/>
+                    <a:pt x="411355" y="5092926"/>
+                    <a:pt x="445296" y="5140971"/>
+                  </a:cubicBezTo>
+                  <a:cubicBezTo>
+                    <a:pt x="479760" y="5188630"/>
+                    <a:pt x="515537" y="5235645"/>
+                    <a:pt x="551443" y="5282531"/>
+                  </a:cubicBezTo>
+                  <a:cubicBezTo>
+                    <a:pt x="623387" y="5376434"/>
+                    <a:pt x="698608" y="5468402"/>
+                    <a:pt x="772387" y="5562561"/>
+                  </a:cubicBezTo>
+                  <a:cubicBezTo>
+                    <a:pt x="809472" y="5609448"/>
+                    <a:pt x="846428" y="5656719"/>
+                    <a:pt x="882858" y="5704507"/>
+                  </a:cubicBezTo>
+                  <a:cubicBezTo>
+                    <a:pt x="919159" y="5751909"/>
+                    <a:pt x="955196" y="5802273"/>
+                    <a:pt x="990316" y="5848258"/>
+                  </a:cubicBezTo>
+                  <a:cubicBezTo>
+                    <a:pt x="1025175" y="5895402"/>
+                    <a:pt x="1061736" y="5941129"/>
+                    <a:pt x="1097774" y="5987114"/>
+                  </a:cubicBezTo>
+                  <a:cubicBezTo>
+                    <a:pt x="1134860" y="6032326"/>
+                    <a:pt x="1171684" y="6077536"/>
+                    <a:pt x="1210080" y="6121203"/>
+                  </a:cubicBezTo>
+                  <a:cubicBezTo>
+                    <a:pt x="1286350" y="6209051"/>
+                    <a:pt x="1365632" y="6293677"/>
+                    <a:pt x="1448192" y="6374054"/>
+                  </a:cubicBezTo>
+                  <a:cubicBezTo>
+                    <a:pt x="1613572" y="6534420"/>
+                    <a:pt x="1792057" y="6677526"/>
+                    <a:pt x="1982991" y="6796158"/>
+                  </a:cubicBezTo>
+                  <a:lnTo>
+                    <a:pt x="2118475" y="6874714"/>
+                  </a:lnTo>
+                  <a:lnTo>
+                    <a:pt x="1569874" y="6874714"/>
+                  </a:lnTo>
+                  <a:lnTo>
+                    <a:pt x="1507802" y="6817815"/>
+                  </a:lnTo>
+                  <a:cubicBezTo>
+                    <a:pt x="1418412" y="6730595"/>
+                    <a:pt x="1334903" y="6638562"/>
+                    <a:pt x="1256865" y="6543437"/>
+                  </a:cubicBezTo>
+                  <a:cubicBezTo>
+                    <a:pt x="1179155" y="6447861"/>
+                    <a:pt x="1106817" y="6349194"/>
+                    <a:pt x="1038410" y="6248722"/>
+                  </a:cubicBezTo>
+                  <a:cubicBezTo>
+                    <a:pt x="969873" y="6148253"/>
+                    <a:pt x="905922" y="6045592"/>
+                    <a:pt x="845380" y="5941386"/>
+                  </a:cubicBezTo>
+                  <a:cubicBezTo>
+                    <a:pt x="814453" y="5888704"/>
+                    <a:pt x="786147" y="5839370"/>
+                    <a:pt x="755351" y="5788877"/>
+                  </a:cubicBezTo>
+                  <a:cubicBezTo>
+                    <a:pt x="724817" y="5738771"/>
+                    <a:pt x="693760" y="5688665"/>
+                    <a:pt x="661784" y="5638944"/>
+                  </a:cubicBezTo>
+                  <a:lnTo>
+                    <a:pt x="466525" y="5340366"/>
+                  </a:lnTo>
+                  <a:cubicBezTo>
+                    <a:pt x="434156" y="5290131"/>
+                    <a:pt x="402181" y="5239639"/>
+                    <a:pt x="370992" y="5188502"/>
+                  </a:cubicBezTo>
+                  <a:cubicBezTo>
+                    <a:pt x="339803" y="5137364"/>
+                    <a:pt x="308876" y="5086099"/>
+                    <a:pt x="280046" y="5033287"/>
+                  </a:cubicBezTo>
+                  <a:cubicBezTo>
+                    <a:pt x="222255" y="4928179"/>
+                    <a:pt x="169181" y="4819982"/>
+                    <a:pt x="126853" y="4707660"/>
+                  </a:cubicBezTo>
+                  <a:cubicBezTo>
+                    <a:pt x="83739" y="4595725"/>
+                    <a:pt x="51764" y="4479670"/>
+                    <a:pt x="30272" y="4362068"/>
+                  </a:cubicBezTo>
+                  <a:cubicBezTo>
+                    <a:pt x="9698" y="4244466"/>
+                    <a:pt x="0" y="4125060"/>
+                    <a:pt x="0" y="4005912"/>
+                  </a:cubicBezTo>
+                  <a:cubicBezTo>
+                    <a:pt x="1704" y="3530867"/>
+                    <a:pt x="95140" y="3057110"/>
+                    <a:pt x="270480" y="2610532"/>
+                  </a:cubicBezTo>
+                  <a:cubicBezTo>
+                    <a:pt x="314511" y="2498984"/>
+                    <a:pt x="362212" y="2388466"/>
+                    <a:pt x="415942" y="2280526"/>
+                  </a:cubicBezTo>
+                  <a:cubicBezTo>
+                    <a:pt x="468884" y="2172197"/>
+                    <a:pt x="527199" y="2066188"/>
+                    <a:pt x="590102" y="1962626"/>
+                  </a:cubicBezTo>
+                  <a:cubicBezTo>
+                    <a:pt x="716037" y="1755631"/>
+                    <a:pt x="859794" y="1557653"/>
+                    <a:pt x="1020719" y="1373070"/>
+                  </a:cubicBezTo>
+                  <a:cubicBezTo>
+                    <a:pt x="1101575" y="1281101"/>
+                    <a:pt x="1185969" y="1191838"/>
+                    <a:pt x="1275080" y="1107081"/>
+                  </a:cubicBezTo>
+                  <a:cubicBezTo>
+                    <a:pt x="1297227" y="1085699"/>
+                    <a:pt x="1319504" y="1064575"/>
+                    <a:pt x="1342437" y="1043965"/>
+                  </a:cubicBezTo>
+                  <a:cubicBezTo>
+                    <a:pt x="1365240" y="1023226"/>
+                    <a:pt x="1387648" y="1002102"/>
+                    <a:pt x="1411106" y="982138"/>
+                  </a:cubicBezTo>
+                  <a:cubicBezTo>
+                    <a:pt x="1457497" y="941563"/>
+                    <a:pt x="1505065" y="902276"/>
+                    <a:pt x="1553029" y="863376"/>
+                  </a:cubicBezTo>
+                  <a:cubicBezTo>
+                    <a:pt x="1745798" y="708806"/>
+                    <a:pt x="1954030" y="571882"/>
+                    <a:pt x="2173401" y="454409"/>
+                  </a:cubicBezTo>
+                  <a:cubicBezTo>
+                    <a:pt x="2612013" y="219334"/>
+                    <a:pt x="3099505" y="65666"/>
+                    <a:pt x="3599708" y="16332"/>
+                  </a:cubicBezTo>
+                  <a:cubicBezTo>
+                    <a:pt x="3724530" y="3966"/>
+                    <a:pt x="3850400" y="-1283"/>
+                    <a:pt x="3975975" y="263"/>
+                  </a:cubicBezTo>
+                  <a:close/>
+                </a:path>
+              </a:pathLst>
+            </a:custGeom>
+            <a:gradFill>
+              <a:gsLst>
+                <a:gs pos="2000">
+                  <a:schemeClr val="bg1">
+                    <a:alpha val="10000"/>
+                  </a:schemeClr>
+                </a:gs>
+                <a:gs pos="16000">
+                  <a:schemeClr val="accent6">
+                    <a:alpha val="10000"/>
+                  </a:schemeClr>
+                </a:gs>
+                <a:gs pos="100000">
+                  <a:schemeClr val="bg1">
+                    <a:alpha val="10000"/>
+                  </a:schemeClr>
+                </a:gs>
+                <a:gs pos="85000">
+                  <a:schemeClr val="accent1">
+                    <a:alpha val="10000"/>
+                  </a:schemeClr>
+                </a:gs>
+              </a:gsLst>
+              <a:lin ang="12000000" scaled="0"/>
+            </a:gradFill>
+            <a:ln>
+              <a:noFill/>
+            </a:ln>
+          </p:spPr>
+          <p:style>
+            <a:lnRef idx="2">
+              <a:schemeClr val="accent1">
+                <a:shade val="50000"/>
+              </a:schemeClr>
+            </a:lnRef>
+            <a:fillRef idx="1">
+              <a:schemeClr val="accent1"/>
+            </a:fillRef>
+            <a:effectRef idx="0">
+              <a:schemeClr val="accent1"/>
+            </a:effectRef>
+            <a:fontRef idx="minor">
+              <a:schemeClr val="lt1"/>
+            </a:fontRef>
+          </p:style>
+          <p:txBody>
+            <a:bodyPr rtlCol="0" anchor="ctr"/>
+            <a:lstStyle/>
+            <a:p>
+              <a:pPr algn="ctr"/>
+              <a:endParaRPr lang="en-US"/>
+            </a:p>
+          </p:txBody>
+        </p:sp>
+        <p:sp>
+          <p:nvSpPr>
+            <p:cNvPr id="18" name="Freeform: Shape 17">
+              <a:extLst>
+                <a:ext uri="{FF2B5EF4-FFF2-40B4-BE49-F238E27FC236}">
+                  <a16:creationId xmlns:a16="http://schemas.microsoft.com/office/drawing/2014/main" id="{61023DD2-2E6F-4419-B404-80F08460BEA5}"/>
+                </a:ext>
+                <a:ext uri="{C183D7F6-B498-43B3-948B-1728B52AA6E4}">
+                  <adec:decorative xmlns:adec="http://schemas.microsoft.com/office/drawing/2017/decorative" val="1"/>
+                </a:ext>
+              </a:extLst>
+            </p:cNvPr>
+            <p:cNvSpPr/>
+            <p:nvPr>
+              <p:extLst>
+                <p:ext uri="{386F3935-93C4-4BCD-93E2-E3B085C9AB24}">
+                  <p16:designElem xmlns:p16="http://schemas.microsoft.com/office/powerpoint/2015/main" val="1"/>
+                </p:ext>
+              </p:extLst>
+            </p:nvPr>
+          </p:nvSpPr>
+          <p:spPr>
+            <a:xfrm>
+              <a:off x="5865276" y="313387"/>
+              <a:ext cx="6326724" cy="6561326"/>
+            </a:xfrm>
+            <a:custGeom>
+              <a:avLst/>
+              <a:gdLst>
+                <a:gd name="connsiteX0" fmla="*/ 6326724 w 6326724"/>
+                <a:gd name="connsiteY0" fmla="*/ 5020808 h 6561326"/>
+                <a:gd name="connsiteX1" fmla="*/ 6326724 w 6326724"/>
+                <a:gd name="connsiteY1" fmla="*/ 5698632 h 6561326"/>
+                <a:gd name="connsiteX2" fmla="*/ 6067438 w 6326724"/>
+                <a:gd name="connsiteY2" fmla="*/ 5902509 h 6561326"/>
+                <a:gd name="connsiteX3" fmla="*/ 5799974 w 6326724"/>
+                <a:gd name="connsiteY3" fmla="*/ 6102017 h 6561326"/>
+                <a:gd name="connsiteX4" fmla="*/ 5665258 w 6326724"/>
+                <a:gd name="connsiteY4" fmla="*/ 6202100 h 6561326"/>
+                <a:gd name="connsiteX5" fmla="*/ 5526873 w 6326724"/>
+                <a:gd name="connsiteY5" fmla="*/ 6302828 h 6561326"/>
+                <a:gd name="connsiteX6" fmla="*/ 5385080 w 6326724"/>
+                <a:gd name="connsiteY6" fmla="*/ 6402268 h 6561326"/>
+                <a:gd name="connsiteX7" fmla="*/ 5238833 w 6326724"/>
+                <a:gd name="connsiteY7" fmla="*/ 6498875 h 6561326"/>
+                <a:gd name="connsiteX8" fmla="*/ 5138040 w 6326724"/>
+                <a:gd name="connsiteY8" fmla="*/ 6561326 h 6561326"/>
+                <a:gd name="connsiteX9" fmla="*/ 3946072 w 6326724"/>
+                <a:gd name="connsiteY9" fmla="*/ 6561326 h 6561326"/>
+                <a:gd name="connsiteX10" fmla="*/ 3976009 w 6326724"/>
+                <a:gd name="connsiteY10" fmla="*/ 6555242 h 6561326"/>
+                <a:gd name="connsiteX11" fmla="*/ 4404855 w 6326724"/>
+                <a:gd name="connsiteY11" fmla="*/ 6399048 h 6561326"/>
+                <a:gd name="connsiteX12" fmla="*/ 4938868 w 6326724"/>
+                <a:gd name="connsiteY12" fmla="*/ 6072132 h 6561326"/>
+                <a:gd name="connsiteX13" fmla="*/ 5068342 w 6326724"/>
+                <a:gd name="connsiteY13" fmla="*/ 5976042 h 6561326"/>
+                <a:gd name="connsiteX14" fmla="*/ 5197816 w 6326724"/>
+                <a:gd name="connsiteY14" fmla="*/ 5876730 h 6561326"/>
+                <a:gd name="connsiteX15" fmla="*/ 5460039 w 6326724"/>
+                <a:gd name="connsiteY15" fmla="*/ 5670637 h 6561326"/>
+                <a:gd name="connsiteX16" fmla="*/ 5999033 w 6326724"/>
+                <a:gd name="connsiteY16" fmla="*/ 5271718 h 6561326"/>
+                <a:gd name="connsiteX17" fmla="*/ 6258766 w 6326724"/>
+                <a:gd name="connsiteY17" fmla="*/ 5077603 h 6561326"/>
+                <a:gd name="connsiteX18" fmla="*/ 4139342 w 6326724"/>
+                <a:gd name="connsiteY18" fmla="*/ 440 h 6561326"/>
+                <a:gd name="connsiteX19" fmla="*/ 4315744 w 6326724"/>
+                <a:gd name="connsiteY19" fmla="*/ 6808 h 6561326"/>
+                <a:gd name="connsiteX20" fmla="*/ 5015400 w 6326724"/>
+                <a:gd name="connsiteY20" fmla="*/ 113591 h 6561326"/>
+                <a:gd name="connsiteX21" fmla="*/ 5681114 w 6326724"/>
+                <a:gd name="connsiteY21" fmla="*/ 361418 h 6561326"/>
+                <a:gd name="connsiteX22" fmla="*/ 6270952 w 6326724"/>
+                <a:gd name="connsiteY22" fmla="*/ 755441 h 6561326"/>
+                <a:gd name="connsiteX23" fmla="*/ 6326724 w 6326724"/>
+                <a:gd name="connsiteY23" fmla="*/ 807432 h 6561326"/>
+                <a:gd name="connsiteX24" fmla="*/ 6326724 w 6326724"/>
+                <a:gd name="connsiteY24" fmla="*/ 1231565 h 6561326"/>
+                <a:gd name="connsiteX25" fmla="*/ 6302093 w 6326724"/>
+                <a:gd name="connsiteY25" fmla="*/ 1203002 h 6561326"/>
+                <a:gd name="connsiteX26" fmla="*/ 6066914 w 6326724"/>
+                <a:gd name="connsiteY26" fmla="*/ 989616 h 6561326"/>
+                <a:gd name="connsiteX27" fmla="*/ 5533688 w 6326724"/>
+                <a:gd name="connsiteY27" fmla="*/ 647242 h 6561326"/>
+                <a:gd name="connsiteX28" fmla="*/ 4933626 w 6326724"/>
+                <a:gd name="connsiteY28" fmla="*/ 432262 h 6561326"/>
+                <a:gd name="connsiteX29" fmla="*/ 4296873 w 6326724"/>
+                <a:gd name="connsiteY29" fmla="*/ 343126 h 6561326"/>
+                <a:gd name="connsiteX30" fmla="*/ 3651602 w 6326724"/>
+                <a:gd name="connsiteY30" fmla="*/ 365797 h 6561326"/>
+                <a:gd name="connsiteX31" fmla="*/ 3018256 w 6326724"/>
+                <a:gd name="connsiteY31" fmla="*/ 496666 h 6561326"/>
+                <a:gd name="connsiteX32" fmla="*/ 2412429 w 6326724"/>
+                <a:gd name="connsiteY32" fmla="*/ 724399 h 6561326"/>
+                <a:gd name="connsiteX33" fmla="*/ 1329857 w 6326724"/>
+                <a:gd name="connsiteY33" fmla="*/ 1424086 h 6561326"/>
+                <a:gd name="connsiteX34" fmla="*/ 887314 w 6326724"/>
+                <a:gd name="connsiteY34" fmla="*/ 1891015 h 6561326"/>
+                <a:gd name="connsiteX35" fmla="*/ 537420 w 6326724"/>
+                <a:gd name="connsiteY35" fmla="*/ 2427245 h 6561326"/>
+                <a:gd name="connsiteX36" fmla="*/ 299965 w 6326724"/>
+                <a:gd name="connsiteY36" fmla="*/ 3020021 h 6561326"/>
+                <a:gd name="connsiteX37" fmla="*/ 213606 w 6326724"/>
+                <a:gd name="connsiteY37" fmla="*/ 3651953 h 6561326"/>
+                <a:gd name="connsiteX38" fmla="*/ 250036 w 6326724"/>
+                <a:gd name="connsiteY38" fmla="*/ 3961352 h 6561326"/>
+                <a:gd name="connsiteX39" fmla="*/ 357625 w 6326724"/>
+                <a:gd name="connsiteY39" fmla="*/ 4250783 h 6561326"/>
+                <a:gd name="connsiteX40" fmla="*/ 432715 w 6326724"/>
+                <a:gd name="connsiteY40" fmla="*/ 4387063 h 6561326"/>
+                <a:gd name="connsiteX41" fmla="*/ 518943 w 6326724"/>
+                <a:gd name="connsiteY41" fmla="*/ 4518962 h 6561326"/>
+                <a:gd name="connsiteX42" fmla="*/ 718133 w 6326724"/>
+                <a:gd name="connsiteY42" fmla="*/ 4773874 h 6561326"/>
+                <a:gd name="connsiteX43" fmla="*/ 933704 w 6326724"/>
+                <a:gd name="connsiteY43" fmla="*/ 5030717 h 6561326"/>
+                <a:gd name="connsiteX44" fmla="*/ 1040900 w 6326724"/>
+                <a:gd name="connsiteY44" fmla="*/ 5164806 h 6561326"/>
+                <a:gd name="connsiteX45" fmla="*/ 1092401 w 6326724"/>
+                <a:gd name="connsiteY45" fmla="*/ 5230628 h 6561326"/>
+                <a:gd name="connsiteX46" fmla="*/ 1142854 w 6326724"/>
+                <a:gd name="connsiteY46" fmla="*/ 5293615 h 6561326"/>
+                <a:gd name="connsiteX47" fmla="*/ 1576354 w 6326724"/>
+                <a:gd name="connsiteY47" fmla="*/ 5759128 h 6561326"/>
+                <a:gd name="connsiteX48" fmla="*/ 1806865 w 6326724"/>
+                <a:gd name="connsiteY48" fmla="*/ 5968571 h 6561326"/>
+                <a:gd name="connsiteX49" fmla="*/ 2048253 w 6326724"/>
+                <a:gd name="connsiteY49" fmla="*/ 6161654 h 6561326"/>
+                <a:gd name="connsiteX50" fmla="*/ 2587506 w 6326724"/>
+                <a:gd name="connsiteY50" fmla="*/ 6467059 h 6561326"/>
+                <a:gd name="connsiteX51" fmla="*/ 2889176 w 6326724"/>
+                <a:gd name="connsiteY51" fmla="*/ 6553360 h 6561326"/>
+                <a:gd name="connsiteX52" fmla="*/ 2929698 w 6326724"/>
+                <a:gd name="connsiteY52" fmla="*/ 6561326 h 6561326"/>
+                <a:gd name="connsiteX53" fmla="*/ 1816374 w 6326724"/>
+                <a:gd name="connsiteY53" fmla="*/ 6561326 h 6561326"/>
+                <a:gd name="connsiteX54" fmla="*/ 1787601 w 6326724"/>
+                <a:gd name="connsiteY54" fmla="*/ 6545761 h 6561326"/>
+                <a:gd name="connsiteX55" fmla="*/ 1225544 w 6326724"/>
+                <a:gd name="connsiteY55" fmla="*/ 6094158 h 6561326"/>
+                <a:gd name="connsiteX56" fmla="*/ 997654 w 6326724"/>
+                <a:gd name="connsiteY56" fmla="*/ 5822374 h 6561326"/>
+                <a:gd name="connsiteX57" fmla="*/ 798596 w 6326724"/>
+                <a:gd name="connsiteY57" fmla="*/ 5534615 h 6561326"/>
+                <a:gd name="connsiteX58" fmla="*/ 752075 w 6326724"/>
+                <a:gd name="connsiteY58" fmla="*/ 5461324 h 6561326"/>
+                <a:gd name="connsiteX59" fmla="*/ 707650 w 6326724"/>
+                <a:gd name="connsiteY59" fmla="*/ 5390221 h 6561326"/>
+                <a:gd name="connsiteX60" fmla="*/ 619980 w 6326724"/>
+                <a:gd name="connsiteY60" fmla="*/ 5252396 h 6561326"/>
+                <a:gd name="connsiteX61" fmla="*/ 438349 w 6326724"/>
+                <a:gd name="connsiteY61" fmla="*/ 4970822 h 6561326"/>
+                <a:gd name="connsiteX62" fmla="*/ 261044 w 6326724"/>
+                <a:gd name="connsiteY62" fmla="*/ 4673145 h 6561326"/>
+                <a:gd name="connsiteX63" fmla="*/ 181107 w 6326724"/>
+                <a:gd name="connsiteY63" fmla="*/ 4515356 h 6561326"/>
+                <a:gd name="connsiteX64" fmla="*/ 113224 w 6326724"/>
+                <a:gd name="connsiteY64" fmla="*/ 4350223 h 6561326"/>
+                <a:gd name="connsiteX65" fmla="*/ 61199 w 6326724"/>
+                <a:gd name="connsiteY65" fmla="*/ 4178908 h 6561326"/>
+                <a:gd name="connsiteX66" fmla="*/ 41804 w 6326724"/>
+                <a:gd name="connsiteY66" fmla="*/ 4091577 h 6561326"/>
+                <a:gd name="connsiteX67" fmla="*/ 33287 w 6326724"/>
+                <a:gd name="connsiteY67" fmla="*/ 4047781 h 6561326"/>
+                <a:gd name="connsiteX68" fmla="*/ 26209 w 6326724"/>
+                <a:gd name="connsiteY68" fmla="*/ 4003858 h 6561326"/>
+                <a:gd name="connsiteX69" fmla="*/ 0 w 6326724"/>
+                <a:gd name="connsiteY69" fmla="*/ 3651953 h 6561326"/>
+                <a:gd name="connsiteX70" fmla="*/ 72731 w 6326724"/>
+                <a:gd name="connsiteY70" fmla="*/ 2966307 h 6561326"/>
+                <a:gd name="connsiteX71" fmla="*/ 291316 w 6326724"/>
+                <a:gd name="connsiteY71" fmla="*/ 2309385 h 6561326"/>
+                <a:gd name="connsiteX72" fmla="*/ 1110878 w 6326724"/>
+                <a:gd name="connsiteY72" fmla="*/ 1193776 h 6561326"/>
+                <a:gd name="connsiteX73" fmla="*/ 1654327 w 6326724"/>
+                <a:gd name="connsiteY73" fmla="*/ 756730 h 6561326"/>
+                <a:gd name="connsiteX74" fmla="*/ 2261727 w 6326724"/>
+                <a:gd name="connsiteY74" fmla="*/ 409720 h 6561326"/>
+                <a:gd name="connsiteX75" fmla="*/ 3610060 w 6326724"/>
+                <a:gd name="connsiteY75" fmla="*/ 27032 h 6561326"/>
+                <a:gd name="connsiteX76" fmla="*/ 4139342 w 6326724"/>
+                <a:gd name="connsiteY76" fmla="*/ 440 h 6561326"/>
+              </a:gdLst>
+              <a:ahLst/>
+              <a:cxnLst>
+                <a:cxn ang="0">
+                  <a:pos x="connsiteX0" y="connsiteY0"/>
+                </a:cxn>
+                <a:cxn ang="0">
+                  <a:pos x="connsiteX1" y="connsiteY1"/>
+                </a:cxn>
+                <a:cxn ang="0">
+                  <a:pos x="connsiteX2" y="connsiteY2"/>
+                </a:cxn>
+                <a:cxn ang="0">
+                  <a:pos x="connsiteX3" y="connsiteY3"/>
+                </a:cxn>
+                <a:cxn ang="0">
+                  <a:pos x="connsiteX4" y="connsiteY4"/>
+                </a:cxn>
+                <a:cxn ang="0">
+                  <a:pos x="connsiteX5" y="connsiteY5"/>
+                </a:cxn>
+                <a:cxn ang="0">
+                  <a:pos x="connsiteX6" y="connsiteY6"/>
+                </a:cxn>
+                <a:cxn ang="0">
+                  <a:pos x="connsiteX7" y="connsiteY7"/>
+                </a:cxn>
+                <a:cxn ang="0">
+                  <a:pos x="connsiteX8" y="connsiteY8"/>
+                </a:cxn>
+                <a:cxn ang="0">
+                  <a:pos x="connsiteX9" y="connsiteY9"/>
+                </a:cxn>
+                <a:cxn ang="0">
+                  <a:pos x="connsiteX10" y="connsiteY10"/>
+                </a:cxn>
+                <a:cxn ang="0">
+                  <a:pos x="connsiteX11" y="connsiteY11"/>
+                </a:cxn>
+                <a:cxn ang="0">
+                  <a:pos x="connsiteX12" y="connsiteY12"/>
+                </a:cxn>
+                <a:cxn ang="0">
+                  <a:pos x="connsiteX13" y="connsiteY13"/>
+                </a:cxn>
+                <a:cxn ang="0">
+                  <a:pos x="connsiteX14" y="connsiteY14"/>
+                </a:cxn>
+                <a:cxn ang="0">
+                  <a:pos x="connsiteX15" y="connsiteY15"/>
+                </a:cxn>
+                <a:cxn ang="0">
+                  <a:pos x="connsiteX16" y="connsiteY16"/>
+                </a:cxn>
+                <a:cxn ang="0">
+                  <a:pos x="connsiteX17" y="connsiteY17"/>
+                </a:cxn>
+                <a:cxn ang="0">
+                  <a:pos x="connsiteX18" y="connsiteY18"/>
+                </a:cxn>
+                <a:cxn ang="0">
+                  <a:pos x="connsiteX19" y="connsiteY19"/>
+                </a:cxn>
+                <a:cxn ang="0">
+                  <a:pos x="connsiteX20" y="connsiteY20"/>
+                </a:cxn>
+                <a:cxn ang="0">
+                  <a:pos x="connsiteX21" y="connsiteY21"/>
+                </a:cxn>
+                <a:cxn ang="0">
+                  <a:pos x="connsiteX22" y="connsiteY22"/>
+                </a:cxn>
+                <a:cxn ang="0">
+                  <a:pos x="connsiteX23" y="connsiteY23"/>
+                </a:cxn>
+                <a:cxn ang="0">
+                  <a:pos x="connsiteX24" y="connsiteY24"/>
+                </a:cxn>
+                <a:cxn ang="0">
+                  <a:pos x="connsiteX25" y="connsiteY25"/>
+                </a:cxn>
+                <a:cxn ang="0">
+                  <a:pos x="connsiteX26" y="connsiteY26"/>
+                </a:cxn>
+                <a:cxn ang="0">
+                  <a:pos x="connsiteX27" y="connsiteY27"/>
+                </a:cxn>
+                <a:cxn ang="0">
+                  <a:pos x="connsiteX28" y="connsiteY28"/>
+                </a:cxn>
+                <a:cxn ang="0">
+                  <a:pos x="connsiteX29" y="connsiteY29"/>
+                </a:cxn>
+                <a:cxn ang="0">
+                  <a:pos x="connsiteX30" y="connsiteY30"/>
+                </a:cxn>
+                <a:cxn ang="0">
+                  <a:pos x="connsiteX31" y="connsiteY31"/>
+                </a:cxn>
+                <a:cxn ang="0">
+                  <a:pos x="connsiteX32" y="connsiteY32"/>
+                </a:cxn>
+                <a:cxn ang="0">
+                  <a:pos x="connsiteX33" y="connsiteY33"/>
+                </a:cxn>
+                <a:cxn ang="0">
+                  <a:pos x="connsiteX34" y="connsiteY34"/>
+                </a:cxn>
+                <a:cxn ang="0">
+                  <a:pos x="connsiteX35" y="connsiteY35"/>
+                </a:cxn>
+                <a:cxn ang="0">
+                  <a:pos x="connsiteX36" y="connsiteY36"/>
+                </a:cxn>
+                <a:cxn ang="0">
+                  <a:pos x="connsiteX37" y="connsiteY37"/>
+                </a:cxn>
+                <a:cxn ang="0">
+                  <a:pos x="connsiteX38" y="connsiteY38"/>
+                </a:cxn>
+                <a:cxn ang="0">
+                  <a:pos x="connsiteX39" y="connsiteY39"/>
+                </a:cxn>
+                <a:cxn ang="0">
+                  <a:pos x="connsiteX40" y="connsiteY40"/>
+                </a:cxn>
+                <a:cxn ang="0">
+                  <a:pos x="connsiteX41" y="connsiteY41"/>
+                </a:cxn>
+                <a:cxn ang="0">
+                  <a:pos x="connsiteX42" y="connsiteY42"/>
+                </a:cxn>
+                <a:cxn ang="0">
+                  <a:pos x="connsiteX43" y="connsiteY43"/>
+                </a:cxn>
+                <a:cxn ang="0">
+                  <a:pos x="connsiteX44" y="connsiteY44"/>
+                </a:cxn>
+                <a:cxn ang="0">
+                  <a:pos x="connsiteX45" y="connsiteY45"/>
+                </a:cxn>
+                <a:cxn ang="0">
+                  <a:pos x="connsiteX46" y="connsiteY46"/>
+                </a:cxn>
+                <a:cxn ang="0">
+                  <a:pos x="connsiteX47" y="connsiteY47"/>
+                </a:cxn>
+                <a:cxn ang="0">
+                  <a:pos x="connsiteX48" y="connsiteY48"/>
+                </a:cxn>
+                <a:cxn ang="0">
+                  <a:pos x="connsiteX49" y="connsiteY49"/>
+                </a:cxn>
+                <a:cxn ang="0">
+                  <a:pos x="connsiteX50" y="connsiteY50"/>
+                </a:cxn>
+                <a:cxn ang="0">
+                  <a:pos x="connsiteX51" y="connsiteY51"/>
+                </a:cxn>
+                <a:cxn ang="0">
+                  <a:pos x="connsiteX52" y="connsiteY52"/>
+                </a:cxn>
+                <a:cxn ang="0">
+                  <a:pos x="connsiteX53" y="connsiteY53"/>
+                </a:cxn>
+                <a:cxn ang="0">
+                  <a:pos x="connsiteX54" y="connsiteY54"/>
+                </a:cxn>
+                <a:cxn ang="0">
+                  <a:pos x="connsiteX55" y="connsiteY55"/>
+                </a:cxn>
+                <a:cxn ang="0">
+                  <a:pos x="connsiteX56" y="connsiteY56"/>
+                </a:cxn>
+                <a:cxn ang="0">
+                  <a:pos x="connsiteX57" y="connsiteY57"/>
+                </a:cxn>
+                <a:cxn ang="0">
+                  <a:pos x="connsiteX58" y="connsiteY58"/>
+                </a:cxn>
+                <a:cxn ang="0">
+                  <a:pos x="connsiteX59" y="connsiteY59"/>
+                </a:cxn>
+                <a:cxn ang="0">
+                  <a:pos x="connsiteX60" y="connsiteY60"/>
+                </a:cxn>
+                <a:cxn ang="0">
+                  <a:pos x="connsiteX61" y="connsiteY61"/>
+                </a:cxn>
+                <a:cxn ang="0">
+                  <a:pos x="connsiteX62" y="connsiteY62"/>
+                </a:cxn>
+                <a:cxn ang="0">
+                  <a:pos x="connsiteX63" y="connsiteY63"/>
+                </a:cxn>
+                <a:cxn ang="0">
+                  <a:pos x="connsiteX64" y="connsiteY64"/>
+                </a:cxn>
+                <a:cxn ang="0">
+                  <a:pos x="connsiteX65" y="connsiteY65"/>
+                </a:cxn>
+                <a:cxn ang="0">
+                  <a:pos x="connsiteX66" y="connsiteY66"/>
+                </a:cxn>
+                <a:cxn ang="0">
+                  <a:pos x="connsiteX67" y="connsiteY67"/>
+                </a:cxn>
+                <a:cxn ang="0">
+                  <a:pos x="connsiteX68" y="connsiteY68"/>
+                </a:cxn>
+                <a:cxn ang="0">
+                  <a:pos x="connsiteX69" y="connsiteY69"/>
+                </a:cxn>
+                <a:cxn ang="0">
+                  <a:pos x="connsiteX70" y="connsiteY70"/>
+                </a:cxn>
+                <a:cxn ang="0">
+                  <a:pos x="connsiteX71" y="connsiteY71"/>
+                </a:cxn>
+                <a:cxn ang="0">
+                  <a:pos x="connsiteX72" y="connsiteY72"/>
+                </a:cxn>
+                <a:cxn ang="0">
+                  <a:pos x="connsiteX73" y="connsiteY73"/>
+                </a:cxn>
+                <a:cxn ang="0">
+                  <a:pos x="connsiteX74" y="connsiteY74"/>
+                </a:cxn>
+                <a:cxn ang="0">
+                  <a:pos x="connsiteX75" y="connsiteY75"/>
+                </a:cxn>
+                <a:cxn ang="0">
+                  <a:pos x="connsiteX76" y="connsiteY76"/>
+                </a:cxn>
+              </a:cxnLst>
+              <a:rect l="l" t="t" r="r" b="b"/>
+              <a:pathLst>
+                <a:path w="6326724" h="6561326">
+                  <a:moveTo>
+                    <a:pt x="6326724" y="5020808"/>
+                  </a:moveTo>
+                  <a:lnTo>
+                    <a:pt x="6326724" y="5698632"/>
+                  </a:lnTo>
+                  <a:lnTo>
+                    <a:pt x="6067438" y="5902509"/>
+                  </a:lnTo>
+                  <a:cubicBezTo>
+                    <a:pt x="5977868" y="5970407"/>
+                    <a:pt x="5888364" y="6036453"/>
+                    <a:pt x="5799974" y="6102017"/>
+                  </a:cubicBezTo>
+                  <a:lnTo>
+                    <a:pt x="5665258" y="6202100"/>
+                  </a:lnTo>
+                  <a:cubicBezTo>
+                    <a:pt x="5619654" y="6235719"/>
+                    <a:pt x="5573656" y="6269596"/>
+                    <a:pt x="5526873" y="6302828"/>
+                  </a:cubicBezTo>
+                  <a:cubicBezTo>
+                    <a:pt x="5480220" y="6336189"/>
+                    <a:pt x="5433044" y="6369423"/>
+                    <a:pt x="5385080" y="6402268"/>
+                  </a:cubicBezTo>
+                  <a:cubicBezTo>
+                    <a:pt x="5336988" y="6434857"/>
+                    <a:pt x="5288500" y="6467187"/>
+                    <a:pt x="5238833" y="6498875"/>
+                  </a:cubicBezTo>
+                  <a:lnTo>
+                    <a:pt x="5138040" y="6561326"/>
+                  </a:lnTo>
+                  <a:lnTo>
+                    <a:pt x="3946072" y="6561326"/>
+                  </a:lnTo>
+                  <a:lnTo>
+                    <a:pt x="3976009" y="6555242"/>
+                  </a:lnTo>
+                  <a:cubicBezTo>
+                    <a:pt x="4123712" y="6519227"/>
+                    <a:pt x="4266863" y="6466383"/>
+                    <a:pt x="4404855" y="6399048"/>
+                  </a:cubicBezTo>
+                  <a:cubicBezTo>
+                    <a:pt x="4589500" y="6310299"/>
+                    <a:pt x="4765232" y="6196690"/>
+                    <a:pt x="4938868" y="6072132"/>
+                  </a:cubicBezTo>
+                  <a:cubicBezTo>
+                    <a:pt x="4982245" y="6041089"/>
+                    <a:pt x="5025359" y="6008630"/>
+                    <a:pt x="5068342" y="5976042"/>
+                  </a:cubicBezTo>
+                  <a:cubicBezTo>
+                    <a:pt x="5111588" y="5943453"/>
+                    <a:pt x="5154702" y="5910349"/>
+                    <a:pt x="5197816" y="5876730"/>
+                  </a:cubicBezTo>
+                  <a:lnTo>
+                    <a:pt x="5460039" y="5670637"/>
+                  </a:lnTo>
+                  <a:cubicBezTo>
+                    <a:pt x="5639966" y="5530365"/>
+                    <a:pt x="5821596" y="5399753"/>
+                    <a:pt x="5999033" y="5271718"/>
+                  </a:cubicBezTo>
+                  <a:cubicBezTo>
+                    <a:pt x="6087686" y="5207700"/>
+                    <a:pt x="6174667" y="5143360"/>
+                    <a:pt x="6258766" y="5077603"/>
+                  </a:cubicBezTo>
+                  <a:close/>
+                  <a:moveTo>
+                    <a:pt x="4139342" y="440"/>
+                  </a:moveTo>
+                  <a:cubicBezTo>
+                    <a:pt x="4198237" y="1301"/>
+                    <a:pt x="4257068" y="3427"/>
+                    <a:pt x="4315744" y="6808"/>
+                  </a:cubicBezTo>
+                  <a:cubicBezTo>
+                    <a:pt x="4550841" y="20849"/>
+                    <a:pt x="4785806" y="55240"/>
+                    <a:pt x="5015400" y="113591"/>
+                  </a:cubicBezTo>
+                  <a:cubicBezTo>
+                    <a:pt x="5244992" y="171812"/>
+                    <a:pt x="5469212" y="254249"/>
+                    <a:pt x="5681114" y="361418"/>
+                  </a:cubicBezTo>
+                  <a:cubicBezTo>
+                    <a:pt x="5892754" y="468586"/>
+                    <a:pt x="6093124" y="599584"/>
+                    <a:pt x="6270952" y="755441"/>
+                  </a:cubicBezTo>
+                  <a:lnTo>
+                    <a:pt x="6326724" y="807432"/>
+                  </a:lnTo>
+                  <a:lnTo>
+                    <a:pt x="6326724" y="1231565"/>
+                  </a:lnTo>
+                  <a:lnTo>
+                    <a:pt x="6302093" y="1203002"/>
+                  </a:lnTo>
+                  <a:cubicBezTo>
+                    <a:pt x="6227937" y="1127247"/>
+                    <a:pt x="6149211" y="1056081"/>
+                    <a:pt x="6066914" y="989616"/>
+                  </a:cubicBezTo>
+                  <a:cubicBezTo>
+                    <a:pt x="5902714" y="856299"/>
+                    <a:pt x="5724360" y="740371"/>
+                    <a:pt x="5533688" y="647242"/>
+                  </a:cubicBezTo>
+                  <a:cubicBezTo>
+                    <a:pt x="5343146" y="553857"/>
+                    <a:pt x="5141466" y="482239"/>
+                    <a:pt x="4933626" y="432262"/>
+                  </a:cubicBezTo>
+                  <a:cubicBezTo>
+                    <a:pt x="4725788" y="382156"/>
+                    <a:pt x="4512182" y="353303"/>
+                    <a:pt x="4296873" y="343126"/>
+                  </a:cubicBezTo>
+                  <a:cubicBezTo>
+                    <a:pt x="4081172" y="332435"/>
+                    <a:pt x="3865732" y="339520"/>
+                    <a:pt x="3651602" y="365797"/>
+                  </a:cubicBezTo>
+                  <a:cubicBezTo>
+                    <a:pt x="3437604" y="392202"/>
+                    <a:pt x="3225572" y="436384"/>
+                    <a:pt x="3018256" y="496666"/>
+                  </a:cubicBezTo>
+                  <a:cubicBezTo>
+                    <a:pt x="2810809" y="556691"/>
+                    <a:pt x="2608474" y="634362"/>
+                    <a:pt x="2412429" y="724399"/>
+                  </a:cubicBezTo>
+                  <a:cubicBezTo>
+                    <a:pt x="2019160" y="902541"/>
+                    <a:pt x="1651969" y="1138775"/>
+                    <a:pt x="1329857" y="1424086"/>
+                  </a:cubicBezTo>
+                  <a:cubicBezTo>
+                    <a:pt x="1169326" y="1567192"/>
+                    <a:pt x="1020588" y="1723307"/>
+                    <a:pt x="887314" y="1891015"/>
+                  </a:cubicBezTo>
+                  <a:cubicBezTo>
+                    <a:pt x="753778" y="2058466"/>
+                    <a:pt x="635967" y="2238026"/>
+                    <a:pt x="537420" y="2427245"/>
+                  </a:cubicBezTo>
+                  <a:cubicBezTo>
+                    <a:pt x="438874" y="2616335"/>
+                    <a:pt x="356839" y="2814313"/>
+                    <a:pt x="299965" y="3020021"/>
+                  </a:cubicBezTo>
+                  <a:cubicBezTo>
+                    <a:pt x="242961" y="3225212"/>
+                    <a:pt x="213474" y="3438518"/>
+                    <a:pt x="213606" y="3651953"/>
+                  </a:cubicBezTo>
+                  <a:cubicBezTo>
+                    <a:pt x="214785" y="3756804"/>
+                    <a:pt x="225269" y="3860881"/>
+                    <a:pt x="250036" y="3961352"/>
+                  </a:cubicBezTo>
+                  <a:cubicBezTo>
+                    <a:pt x="274412" y="4061950"/>
+                    <a:pt x="312284" y="4158171"/>
+                    <a:pt x="357625" y="4250783"/>
+                  </a:cubicBezTo>
+                  <a:cubicBezTo>
+                    <a:pt x="380558" y="4297025"/>
+                    <a:pt x="405982" y="4342366"/>
+                    <a:pt x="432715" y="4387063"/>
+                  </a:cubicBezTo>
+                  <a:cubicBezTo>
+                    <a:pt x="459841" y="4431630"/>
+                    <a:pt x="488803" y="4475554"/>
+                    <a:pt x="518943" y="4518962"/>
+                  </a:cubicBezTo>
+                  <a:cubicBezTo>
+                    <a:pt x="580011" y="4605521"/>
+                    <a:pt x="647893" y="4689504"/>
+                    <a:pt x="718133" y="4773874"/>
+                  </a:cubicBezTo>
+                  <a:cubicBezTo>
+                    <a:pt x="788374" y="4858372"/>
+                    <a:pt x="861760" y="4942871"/>
+                    <a:pt x="933704" y="5030717"/>
+                  </a:cubicBezTo>
+                  <a:cubicBezTo>
+                    <a:pt x="969742" y="5074512"/>
+                    <a:pt x="1005387" y="5119337"/>
+                    <a:pt x="1040900" y="5164806"/>
+                  </a:cubicBezTo>
+                  <a:lnTo>
+                    <a:pt x="1092401" y="5230628"/>
+                  </a:lnTo>
+                  <a:cubicBezTo>
+                    <a:pt x="1109306" y="5251624"/>
+                    <a:pt x="1125425" y="5273135"/>
+                    <a:pt x="1142854" y="5293615"/>
+                  </a:cubicBezTo>
+                  <a:cubicBezTo>
+                    <a:pt x="1278880" y="5460293"/>
+                    <a:pt x="1426438" y="5613704"/>
+                    <a:pt x="1576354" y="5759128"/>
+                  </a:cubicBezTo>
+                  <a:cubicBezTo>
+                    <a:pt x="1651706" y="5831519"/>
+                    <a:pt x="1728368" y="5901461"/>
+                    <a:pt x="1806865" y="5968571"/>
+                  </a:cubicBezTo>
+                  <a:cubicBezTo>
+                    <a:pt x="1885362" y="6035680"/>
+                    <a:pt x="1965299" y="6100599"/>
+                    <a:pt x="2048253" y="6161654"/>
+                  </a:cubicBezTo>
+                  <a:cubicBezTo>
+                    <a:pt x="2213502" y="6284022"/>
+                    <a:pt x="2391724" y="6393380"/>
+                    <a:pt x="2587506" y="6467059"/>
+                  </a:cubicBezTo>
+                  <a:cubicBezTo>
+                    <a:pt x="2685137" y="6503898"/>
+                    <a:pt x="2786304" y="6532106"/>
+                    <a:pt x="2889176" y="6553360"/>
+                  </a:cubicBezTo>
+                  <a:lnTo>
+                    <a:pt x="2929698" y="6561326"/>
+                  </a:lnTo>
+                  <a:lnTo>
+                    <a:pt x="1816374" y="6561326"/>
+                  </a:lnTo>
+                  <a:lnTo>
+                    <a:pt x="1787601" y="6545761"/>
+                  </a:lnTo>
+                  <a:cubicBezTo>
+                    <a:pt x="1577272" y="6422749"/>
+                    <a:pt x="1389483" y="6266761"/>
+                    <a:pt x="1225544" y="6094158"/>
+                  </a:cubicBezTo>
+                  <a:cubicBezTo>
+                    <a:pt x="1143116" y="6007986"/>
+                    <a:pt x="1068158" y="5916274"/>
+                    <a:pt x="997654" y="5822374"/>
+                  </a:cubicBezTo>
+                  <a:cubicBezTo>
+                    <a:pt x="927546" y="5728086"/>
+                    <a:pt x="860842" y="5632381"/>
+                    <a:pt x="798596" y="5534615"/>
+                  </a:cubicBezTo>
+                  <a:cubicBezTo>
+                    <a:pt x="782608" y="5510399"/>
+                    <a:pt x="767537" y="5485797"/>
+                    <a:pt x="752075" y="5461324"/>
+                  </a:cubicBezTo>
+                  <a:lnTo>
+                    <a:pt x="707650" y="5390221"/>
+                  </a:lnTo>
+                  <a:cubicBezTo>
+                    <a:pt x="679213" y="5344237"/>
+                    <a:pt x="649728" y="5298638"/>
+                    <a:pt x="619980" y="5252396"/>
+                  </a:cubicBezTo>
+                  <a:lnTo>
+                    <a:pt x="438349" y="4970822"/>
+                  </a:lnTo>
+                  <a:cubicBezTo>
+                    <a:pt x="377413" y="4874860"/>
+                    <a:pt x="317263" y="4776064"/>
+                    <a:pt x="261044" y="4673145"/>
+                  </a:cubicBezTo>
+                  <a:cubicBezTo>
+                    <a:pt x="233000" y="4621622"/>
+                    <a:pt x="205874" y="4569197"/>
+                    <a:pt x="181107" y="4515356"/>
+                  </a:cubicBezTo>
+                  <a:cubicBezTo>
+                    <a:pt x="156470" y="4461385"/>
+                    <a:pt x="133537" y="4406385"/>
+                    <a:pt x="113224" y="4350223"/>
+                  </a:cubicBezTo>
+                  <a:cubicBezTo>
+                    <a:pt x="93305" y="4293934"/>
+                    <a:pt x="75614" y="4236872"/>
+                    <a:pt x="61199" y="4178908"/>
+                  </a:cubicBezTo>
+                  <a:cubicBezTo>
+                    <a:pt x="54385" y="4149927"/>
+                    <a:pt x="47440" y="4120815"/>
+                    <a:pt x="41804" y="4091577"/>
+                  </a:cubicBezTo>
+                  <a:lnTo>
+                    <a:pt x="33287" y="4047781"/>
+                  </a:lnTo>
+                  <a:lnTo>
+                    <a:pt x="26209" y="4003858"/>
+                  </a:lnTo>
+                  <a:cubicBezTo>
+                    <a:pt x="7732" y="3886643"/>
+                    <a:pt x="0" y="3768783"/>
+                    <a:pt x="0" y="3651953"/>
+                  </a:cubicBezTo>
+                  <a:cubicBezTo>
+                    <a:pt x="524" y="3422031"/>
+                    <a:pt x="25030" y="3192109"/>
+                    <a:pt x="72731" y="2966307"/>
+                  </a:cubicBezTo>
+                  <a:cubicBezTo>
+                    <a:pt x="120301" y="2740634"/>
+                    <a:pt x="193163" y="2519343"/>
+                    <a:pt x="291316" y="2309385"/>
+                  </a:cubicBezTo>
+                  <a:cubicBezTo>
+                    <a:pt x="488540" y="1889469"/>
+                    <a:pt x="774352" y="1513736"/>
+                    <a:pt x="1110878" y="1193776"/>
+                  </a:cubicBezTo>
+                  <a:cubicBezTo>
+                    <a:pt x="1279535" y="1033797"/>
+                    <a:pt x="1461821" y="887856"/>
+                    <a:pt x="1654327" y="756730"/>
+                  </a:cubicBezTo>
+                  <a:cubicBezTo>
+                    <a:pt x="1847096" y="625732"/>
+                    <a:pt x="2049956" y="509031"/>
+                    <a:pt x="2261727" y="409720"/>
+                  </a:cubicBezTo>
+                  <a:cubicBezTo>
+                    <a:pt x="2685792" y="212515"/>
+                    <a:pt x="3142357" y="82162"/>
+                    <a:pt x="3610060" y="27032"/>
+                  </a:cubicBezTo>
+                  <a:cubicBezTo>
+                    <a:pt x="3785399" y="6647"/>
+                    <a:pt x="3962657" y="-2144"/>
+                    <a:pt x="4139342" y="440"/>
+                  </a:cubicBezTo>
+                  <a:close/>
+                </a:path>
+              </a:pathLst>
+            </a:custGeom>
+            <a:gradFill>
+              <a:gsLst>
+                <a:gs pos="2000">
+                  <a:schemeClr val="bg1">
+                    <a:alpha val="10000"/>
+                  </a:schemeClr>
+                </a:gs>
+                <a:gs pos="16000">
+                  <a:schemeClr val="accent6">
+                    <a:alpha val="10000"/>
+                  </a:schemeClr>
+                </a:gs>
+                <a:gs pos="100000">
+                  <a:schemeClr val="bg1">
+                    <a:alpha val="10000"/>
+                  </a:schemeClr>
+                </a:gs>
+                <a:gs pos="85000">
+                  <a:schemeClr val="accent1">
+                    <a:alpha val="10000"/>
+                  </a:schemeClr>
+                </a:gs>
+              </a:gsLst>
+              <a:lin ang="12000000" scaled="0"/>
+            </a:gradFill>
+            <a:ln>
+              <a:noFill/>
+            </a:ln>
+          </p:spPr>
+          <p:style>
+            <a:lnRef idx="2">
+              <a:schemeClr val="accent1">
+                <a:shade val="50000"/>
+              </a:schemeClr>
+            </a:lnRef>
+            <a:fillRef idx="1">
+              <a:schemeClr val="accent1"/>
+            </a:fillRef>
+            <a:effectRef idx="0">
+              <a:schemeClr val="accent1"/>
+            </a:effectRef>
+            <a:fontRef idx="minor">
+              <a:schemeClr val="lt1"/>
+            </a:fontRef>
+          </p:style>
+          <p:txBody>
+            <a:bodyPr rtlCol="0" anchor="ctr"/>
+            <a:lstStyle/>
+            <a:p>
+              <a:pPr algn="ctr"/>
+              <a:endParaRPr lang="en-US"/>
+            </a:p>
+          </p:txBody>
+        </p:sp>
+        <p:sp>
+          <p:nvSpPr>
+            <p:cNvPr id="19" name="Freeform: Shape 18">
+              <a:extLst>
+                <a:ext uri="{FF2B5EF4-FFF2-40B4-BE49-F238E27FC236}">
+                  <a16:creationId xmlns:a16="http://schemas.microsoft.com/office/drawing/2014/main" id="{BC4A6C98-F96E-4587-B01F-A9B01BBFAD01}"/>
+                </a:ext>
+                <a:ext uri="{C183D7F6-B498-43B3-948B-1728B52AA6E4}">
+                  <adec:decorative xmlns:adec="http://schemas.microsoft.com/office/drawing/2017/decorative" val="1"/>
+                </a:ext>
+              </a:extLst>
+            </p:cNvPr>
+            <p:cNvSpPr/>
+            <p:nvPr>
+              <p:extLst>
+                <p:ext uri="{386F3935-93C4-4BCD-93E2-E3B085C9AB24}">
+                  <p16:designElem xmlns:p16="http://schemas.microsoft.com/office/powerpoint/2015/main" val="1"/>
+                </p:ext>
+              </p:extLst>
+            </p:nvPr>
+          </p:nvSpPr>
+          <p:spPr>
+            <a:xfrm>
+              <a:off x="5870322" y="353119"/>
+              <a:ext cx="6321679" cy="6521594"/>
+            </a:xfrm>
+            <a:custGeom>
+              <a:avLst/>
+              <a:gdLst>
+                <a:gd name="connsiteX0" fmla="*/ 4150102 w 6321679"/>
+                <a:gd name="connsiteY0" fmla="*/ 0 h 6521594"/>
+                <a:gd name="connsiteX1" fmla="*/ 6083891 w 6321679"/>
+                <a:gd name="connsiteY1" fmla="*/ 619943 h 6521594"/>
+                <a:gd name="connsiteX2" fmla="*/ 6321679 w 6321679"/>
+                <a:gd name="connsiteY2" fmla="*/ 822247 h 6521594"/>
+                <a:gd name="connsiteX3" fmla="*/ 6321679 w 6321679"/>
+                <a:gd name="connsiteY3" fmla="*/ 1866928 h 6521594"/>
+                <a:gd name="connsiteX4" fmla="*/ 6212358 w 6321679"/>
+                <a:gd name="connsiteY4" fmla="*/ 1689281 h 6521594"/>
+                <a:gd name="connsiteX5" fmla="*/ 6049880 w 6321679"/>
+                <a:gd name="connsiteY5" fmla="*/ 1477173 h 6521594"/>
+                <a:gd name="connsiteX6" fmla="*/ 5248663 w 6321679"/>
+                <a:gd name="connsiteY6" fmla="*/ 869327 h 6521594"/>
+                <a:gd name="connsiteX7" fmla="*/ 4150102 w 6321679"/>
+                <a:gd name="connsiteY7" fmla="*/ 644042 h 6521594"/>
+                <a:gd name="connsiteX8" fmla="*/ 2867946 w 6321679"/>
+                <a:gd name="connsiteY8" fmla="*/ 886459 h 6521594"/>
+                <a:gd name="connsiteX9" fmla="*/ 1728892 w 6321679"/>
+                <a:gd name="connsiteY9" fmla="*/ 1552397 h 6521594"/>
+                <a:gd name="connsiteX10" fmla="*/ 941043 w 6321679"/>
+                <a:gd name="connsiteY10" fmla="*/ 2512664 h 6521594"/>
+                <a:gd name="connsiteX11" fmla="*/ 655362 w 6321679"/>
+                <a:gd name="connsiteY11" fmla="*/ 3630204 h 6521594"/>
+                <a:gd name="connsiteX12" fmla="*/ 1128177 w 6321679"/>
+                <a:gd name="connsiteY12" fmla="*/ 4667883 h 6521594"/>
+                <a:gd name="connsiteX13" fmla="*/ 1366419 w 6321679"/>
+                <a:gd name="connsiteY13" fmla="*/ 4997246 h 6521594"/>
+                <a:gd name="connsiteX14" fmla="*/ 3601937 w 6321679"/>
+                <a:gd name="connsiteY14" fmla="*/ 6284685 h 6521594"/>
+                <a:gd name="connsiteX15" fmla="*/ 5298985 w 6321679"/>
+                <a:gd name="connsiteY15" fmla="*/ 5492643 h 6521594"/>
+                <a:gd name="connsiteX16" fmla="*/ 5505513 w 6321679"/>
+                <a:gd name="connsiteY16" fmla="*/ 5335367 h 6521594"/>
+                <a:gd name="connsiteX17" fmla="*/ 6252618 w 6321679"/>
+                <a:gd name="connsiteY17" fmla="*/ 4722492 h 6521594"/>
+                <a:gd name="connsiteX18" fmla="*/ 6321679 w 6321679"/>
+                <a:gd name="connsiteY18" fmla="*/ 4651477 h 6521594"/>
+                <a:gd name="connsiteX19" fmla="*/ 6321679 w 6321679"/>
+                <a:gd name="connsiteY19" fmla="*/ 5523097 h 6521594"/>
+                <a:gd name="connsiteX20" fmla="*/ 6024428 w 6321679"/>
+                <a:gd name="connsiteY20" fmla="*/ 5754969 h 6521594"/>
+                <a:gd name="connsiteX21" fmla="*/ 5702345 w 6321679"/>
+                <a:gd name="connsiteY21" fmla="*/ 6000018 h 6521594"/>
+                <a:gd name="connsiteX22" fmla="*/ 4988380 w 6321679"/>
+                <a:gd name="connsiteY22" fmla="*/ 6506549 h 6521594"/>
+                <a:gd name="connsiteX23" fmla="*/ 4961490 w 6321679"/>
+                <a:gd name="connsiteY23" fmla="*/ 6521594 h 6521594"/>
+                <a:gd name="connsiteX24" fmla="*/ 2011326 w 6321679"/>
+                <a:gd name="connsiteY24" fmla="*/ 6521594 h 6521594"/>
+                <a:gd name="connsiteX25" fmla="*/ 1982893 w 6321679"/>
+                <a:gd name="connsiteY25" fmla="*/ 6505768 h 6521594"/>
+                <a:gd name="connsiteX26" fmla="*/ 824149 w 6321679"/>
+                <a:gd name="connsiteY26" fmla="*/ 5358682 h 6521594"/>
+                <a:gd name="connsiteX27" fmla="*/ 0 w 6321679"/>
+                <a:gd name="connsiteY27" fmla="*/ 3630075 h 6521594"/>
+                <a:gd name="connsiteX28" fmla="*/ 4150102 w 6321679"/>
+                <a:gd name="connsiteY28" fmla="*/ 0 h 6521594"/>
+              </a:gdLst>
+              <a:ahLst/>
+              <a:cxnLst>
+                <a:cxn ang="0">
+                  <a:pos x="connsiteX0" y="connsiteY0"/>
+                </a:cxn>
+                <a:cxn ang="0">
+                  <a:pos x="connsiteX1" y="connsiteY1"/>
+                </a:cxn>
+                <a:cxn ang="0">
+                  <a:pos x="connsiteX2" y="connsiteY2"/>
+                </a:cxn>
+                <a:cxn ang="0">
+                  <a:pos x="connsiteX3" y="connsiteY3"/>
+                </a:cxn>
+                <a:cxn ang="0">
+                  <a:pos x="connsiteX4" y="connsiteY4"/>
+                </a:cxn>
+                <a:cxn ang="0">
+                  <a:pos x="connsiteX5" y="connsiteY5"/>
+                </a:cxn>
+                <a:cxn ang="0">
+                  <a:pos x="connsiteX6" y="connsiteY6"/>
+                </a:cxn>
+                <a:cxn ang="0">
+                  <a:pos x="connsiteX7" y="connsiteY7"/>
+                </a:cxn>
+                <a:cxn ang="0">
+                  <a:pos x="connsiteX8" y="connsiteY8"/>
+                </a:cxn>
+                <a:cxn ang="0">
+                  <a:pos x="connsiteX9" y="connsiteY9"/>
+                </a:cxn>
+                <a:cxn ang="0">
+                  <a:pos x="connsiteX10" y="connsiteY10"/>
+                </a:cxn>
+                <a:cxn ang="0">
+                  <a:pos x="connsiteX11" y="connsiteY11"/>
+                </a:cxn>
+                <a:cxn ang="0">
+                  <a:pos x="connsiteX12" y="connsiteY12"/>
+                </a:cxn>
+                <a:cxn ang="0">
+                  <a:pos x="connsiteX13" y="connsiteY13"/>
+                </a:cxn>
+                <a:cxn ang="0">
+                  <a:pos x="connsiteX14" y="connsiteY14"/>
+                </a:cxn>
+                <a:cxn ang="0">
+                  <a:pos x="connsiteX15" y="connsiteY15"/>
+                </a:cxn>
+                <a:cxn ang="0">
+                  <a:pos x="connsiteX16" y="connsiteY16"/>
+                </a:cxn>
+                <a:cxn ang="0">
+                  <a:pos x="connsiteX17" y="connsiteY17"/>
+                </a:cxn>
+                <a:cxn ang="0">
+                  <a:pos x="connsiteX18" y="connsiteY18"/>
+                </a:cxn>
+                <a:cxn ang="0">
+                  <a:pos x="connsiteX19" y="connsiteY19"/>
+                </a:cxn>
+                <a:cxn ang="0">
+                  <a:pos x="connsiteX20" y="connsiteY20"/>
+                </a:cxn>
+                <a:cxn ang="0">
+                  <a:pos x="connsiteX21" y="connsiteY21"/>
+                </a:cxn>
+                <a:cxn ang="0">
+                  <a:pos x="connsiteX22" y="connsiteY22"/>
+                </a:cxn>
+                <a:cxn ang="0">
+                  <a:pos x="connsiteX23" y="connsiteY23"/>
+                </a:cxn>
+                <a:cxn ang="0">
+                  <a:pos x="connsiteX24" y="connsiteY24"/>
+                </a:cxn>
+                <a:cxn ang="0">
+                  <a:pos x="connsiteX25" y="connsiteY25"/>
+                </a:cxn>
+                <a:cxn ang="0">
+                  <a:pos x="connsiteX26" y="connsiteY26"/>
+                </a:cxn>
+                <a:cxn ang="0">
+                  <a:pos x="connsiteX27" y="connsiteY27"/>
+                </a:cxn>
+                <a:cxn ang="0">
+                  <a:pos x="connsiteX28" y="connsiteY28"/>
+                </a:cxn>
+              </a:cxnLst>
+              <a:rect l="l" t="t" r="r" b="b"/>
+              <a:pathLst>
+                <a:path w="6321679" h="6521594">
+                  <a:moveTo>
+                    <a:pt x="4150102" y="0"/>
+                  </a:moveTo>
+                  <a:cubicBezTo>
+                    <a:pt x="4918148" y="0"/>
+                    <a:pt x="5569597" y="228540"/>
+                    <a:pt x="6083891" y="619943"/>
+                  </a:cubicBezTo>
+                  <a:lnTo>
+                    <a:pt x="6321679" y="822247"/>
+                  </a:lnTo>
+                  <a:lnTo>
+                    <a:pt x="6321679" y="1866928"/>
+                  </a:lnTo>
+                  <a:lnTo>
+                    <a:pt x="6212358" y="1689281"/>
+                  </a:lnTo>
+                  <a:cubicBezTo>
+                    <a:pt x="6161484" y="1615222"/>
+                    <a:pt x="6107295" y="1544427"/>
+                    <a:pt x="6049880" y="1477173"/>
+                  </a:cubicBezTo>
+                  <a:cubicBezTo>
+                    <a:pt x="5825135" y="1214018"/>
+                    <a:pt x="5555573" y="1009470"/>
+                    <a:pt x="5248663" y="869327"/>
+                  </a:cubicBezTo>
+                  <a:cubicBezTo>
+                    <a:pt x="4921178" y="719909"/>
+                    <a:pt x="4551627" y="644042"/>
+                    <a:pt x="4150102" y="644042"/>
+                  </a:cubicBezTo>
+                  <a:cubicBezTo>
+                    <a:pt x="3724203" y="644042"/>
+                    <a:pt x="3292799" y="725448"/>
+                    <a:pt x="2867946" y="886459"/>
+                  </a:cubicBezTo>
+                  <a:cubicBezTo>
+                    <a:pt x="2454234" y="1042832"/>
+                    <a:pt x="2060440" y="1273141"/>
+                    <a:pt x="1728892" y="1552397"/>
+                  </a:cubicBezTo>
+                  <a:cubicBezTo>
+                    <a:pt x="1391580" y="1836419"/>
+                    <a:pt x="1126473" y="2159600"/>
+                    <a:pt x="941043" y="2512664"/>
+                  </a:cubicBezTo>
+                  <a:cubicBezTo>
+                    <a:pt x="751551" y="2873583"/>
+                    <a:pt x="655362" y="3249575"/>
+                    <a:pt x="655362" y="3630204"/>
+                  </a:cubicBezTo>
+                  <a:cubicBezTo>
+                    <a:pt x="655362" y="4013537"/>
+                    <a:pt x="808817" y="4237405"/>
+                    <a:pt x="1128177" y="4667883"/>
+                  </a:cubicBezTo>
+                  <a:cubicBezTo>
+                    <a:pt x="1205232" y="4771702"/>
+                    <a:pt x="1284908" y="4879129"/>
+                    <a:pt x="1366419" y="4997246"/>
+                  </a:cubicBezTo>
+                  <a:cubicBezTo>
+                    <a:pt x="1989282" y="5899677"/>
+                    <a:pt x="2657880" y="6284685"/>
+                    <a:pt x="3601937" y="6284685"/>
+                  </a:cubicBezTo>
+                  <a:cubicBezTo>
+                    <a:pt x="4221523" y="6284685"/>
+                    <a:pt x="4676122" y="5971036"/>
+                    <a:pt x="5298985" y="5492643"/>
+                  </a:cubicBezTo>
+                  <a:cubicBezTo>
+                    <a:pt x="5368571" y="5439187"/>
+                    <a:pt x="5438156" y="5386375"/>
+                    <a:pt x="5505513" y="5335367"/>
+                  </a:cubicBezTo>
+                  <a:cubicBezTo>
+                    <a:pt x="5779335" y="5127761"/>
+                    <a:pt x="6041730" y="4928776"/>
+                    <a:pt x="6252618" y="4722492"/>
+                  </a:cubicBezTo>
+                  <a:lnTo>
+                    <a:pt x="6321679" y="4651477"/>
+                  </a:lnTo>
+                  <a:lnTo>
+                    <a:pt x="6321679" y="5523097"/>
+                  </a:lnTo>
+                  <a:lnTo>
+                    <a:pt x="6024428" y="5754969"/>
+                  </a:lnTo>
+                  <a:cubicBezTo>
+                    <a:pt x="5918395" y="5835747"/>
+                    <a:pt x="5810491" y="5916953"/>
+                    <a:pt x="5702345" y="6000018"/>
+                  </a:cubicBezTo>
+                  <a:cubicBezTo>
+                    <a:pt x="5466020" y="6181541"/>
+                    <a:pt x="5232938" y="6357503"/>
+                    <a:pt x="4988380" y="6506549"/>
+                  </a:cubicBezTo>
+                  <a:lnTo>
+                    <a:pt x="4961490" y="6521594"/>
+                  </a:lnTo>
+                  <a:lnTo>
+                    <a:pt x="2011326" y="6521594"/>
+                  </a:lnTo>
+                  <a:lnTo>
+                    <a:pt x="1982893" y="6505768"/>
+                  </a:lnTo>
+                  <a:cubicBezTo>
+                    <a:pt x="1531799" y="6233999"/>
+                    <a:pt x="1157400" y="5841520"/>
+                    <a:pt x="824149" y="5358682"/>
+                  </a:cubicBezTo>
+                  <a:cubicBezTo>
+                    <a:pt x="424196" y="4779302"/>
+                    <a:pt x="0" y="4381929"/>
+                    <a:pt x="0" y="3630075"/>
+                  </a:cubicBezTo>
+                  <a:cubicBezTo>
+                    <a:pt x="0" y="1625174"/>
+                    <a:pt x="2089794" y="0"/>
+                    <a:pt x="4150102" y="0"/>
+                  </a:cubicBezTo>
+                  <a:close/>
+                </a:path>
+              </a:pathLst>
+            </a:custGeom>
+            <a:gradFill>
+              <a:gsLst>
+                <a:gs pos="2000">
+                  <a:schemeClr val="bg1">
+                    <a:alpha val="10000"/>
+                  </a:schemeClr>
+                </a:gs>
+                <a:gs pos="16000">
+                  <a:schemeClr val="accent6">
+                    <a:alpha val="10000"/>
+                  </a:schemeClr>
+                </a:gs>
+                <a:gs pos="100000">
+                  <a:schemeClr val="bg1">
+                    <a:alpha val="10000"/>
+                  </a:schemeClr>
+                </a:gs>
+                <a:gs pos="85000">
+                  <a:schemeClr val="accent1">
+                    <a:alpha val="10000"/>
+                  </a:schemeClr>
+                </a:gs>
+              </a:gsLst>
+              <a:lin ang="12000000" scaled="0"/>
+            </a:gradFill>
+            <a:ln>
+              <a:noFill/>
+            </a:ln>
+          </p:spPr>
+          <p:style>
+            <a:lnRef idx="2">
+              <a:schemeClr val="accent1">
+                <a:shade val="50000"/>
+              </a:schemeClr>
+            </a:lnRef>
+            <a:fillRef idx="1">
+              <a:schemeClr val="accent1"/>
+            </a:fillRef>
+            <a:effectRef idx="0">
+              <a:schemeClr val="accent1"/>
+            </a:effectRef>
+            <a:fontRef idx="minor">
+              <a:schemeClr val="lt1"/>
+            </a:fontRef>
+          </p:style>
+          <p:txBody>
+            <a:bodyPr rtlCol="0" anchor="ctr"/>
+            <a:lstStyle/>
+            <a:p>
+              <a:pPr algn="ctr"/>
+              <a:endParaRPr lang="en-US"/>
+            </a:p>
+          </p:txBody>
+        </p:sp>
+        <p:sp>
+          <p:nvSpPr>
+            <p:cNvPr id="20" name="Freeform: Shape 19">
+              <a:extLst>
+                <a:ext uri="{FF2B5EF4-FFF2-40B4-BE49-F238E27FC236}">
+                  <a16:creationId xmlns:a16="http://schemas.microsoft.com/office/drawing/2014/main" id="{A66409EC-9CC3-482A-A4A5-54ED092B3F22}"/>
+                </a:ext>
+                <a:ext uri="{C183D7F6-B498-43B3-948B-1728B52AA6E4}">
+                  <adec:decorative xmlns:adec="http://schemas.microsoft.com/office/drawing/2017/decorative" val="1"/>
+                </a:ext>
+              </a:extLst>
+            </p:cNvPr>
+            <p:cNvSpPr/>
+            <p:nvPr>
+              <p:extLst>
+                <p:ext uri="{386F3935-93C4-4BCD-93E2-E3B085C9AB24}">
+                  <p16:designElem xmlns:p16="http://schemas.microsoft.com/office/powerpoint/2015/main" val="1"/>
+                </p:ext>
+              </p:extLst>
+            </p:nvPr>
+          </p:nvSpPr>
+          <p:spPr>
+            <a:xfrm>
+              <a:off x="5870322" y="353119"/>
+              <a:ext cx="6321679" cy="6521594"/>
+            </a:xfrm>
+            <a:custGeom>
+              <a:avLst/>
+              <a:gdLst>
+                <a:gd name="connsiteX0" fmla="*/ 4150102 w 6321679"/>
+                <a:gd name="connsiteY0" fmla="*/ 0 h 6521594"/>
+                <a:gd name="connsiteX1" fmla="*/ 6083891 w 6321679"/>
+                <a:gd name="connsiteY1" fmla="*/ 619943 h 6521594"/>
+                <a:gd name="connsiteX2" fmla="*/ 6321679 w 6321679"/>
+                <a:gd name="connsiteY2" fmla="*/ 822247 h 6521594"/>
+                <a:gd name="connsiteX3" fmla="*/ 6321679 w 6321679"/>
+                <a:gd name="connsiteY3" fmla="*/ 2150195 h 6521594"/>
+                <a:gd name="connsiteX4" fmla="*/ 6241288 w 6321679"/>
+                <a:gd name="connsiteY4" fmla="*/ 1985338 h 6521594"/>
+                <a:gd name="connsiteX5" fmla="*/ 5949367 w 6321679"/>
+                <a:gd name="connsiteY5" fmla="*/ 1559997 h 6521594"/>
+                <a:gd name="connsiteX6" fmla="*/ 5193362 w 6321679"/>
+                <a:gd name="connsiteY6" fmla="*/ 986156 h 6521594"/>
+                <a:gd name="connsiteX7" fmla="*/ 4150102 w 6321679"/>
+                <a:gd name="connsiteY7" fmla="*/ 772850 h 6521594"/>
+                <a:gd name="connsiteX8" fmla="*/ 2914861 w 6321679"/>
+                <a:gd name="connsiteY8" fmla="*/ 1006637 h 6521594"/>
+                <a:gd name="connsiteX9" fmla="*/ 1814073 w 6321679"/>
+                <a:gd name="connsiteY9" fmla="*/ 1650163 h 6521594"/>
+                <a:gd name="connsiteX10" fmla="*/ 1057412 w 6321679"/>
+                <a:gd name="connsiteY10" fmla="*/ 2571657 h 6521594"/>
+                <a:gd name="connsiteX11" fmla="*/ 786277 w 6321679"/>
+                <a:gd name="connsiteY11" fmla="*/ 3630204 h 6521594"/>
+                <a:gd name="connsiteX12" fmla="*/ 1233931 w 6321679"/>
+                <a:gd name="connsiteY12" fmla="*/ 4592016 h 6521594"/>
+                <a:gd name="connsiteX13" fmla="*/ 1474795 w 6321679"/>
+                <a:gd name="connsiteY13" fmla="*/ 4924985 h 6521594"/>
+                <a:gd name="connsiteX14" fmla="*/ 2393691 w 6321679"/>
+                <a:gd name="connsiteY14" fmla="*/ 5846995 h 6521594"/>
+                <a:gd name="connsiteX15" fmla="*/ 3601805 w 6321679"/>
+                <a:gd name="connsiteY15" fmla="*/ 6155876 h 6521594"/>
+                <a:gd name="connsiteX16" fmla="*/ 4378909 w 6321679"/>
+                <a:gd name="connsiteY16" fmla="*/ 5959186 h 6521594"/>
+                <a:gd name="connsiteX17" fmla="*/ 5218129 w 6321679"/>
+                <a:gd name="connsiteY17" fmla="*/ 5391271 h 6521594"/>
+                <a:gd name="connsiteX18" fmla="*/ 5425313 w 6321679"/>
+                <a:gd name="connsiteY18" fmla="*/ 5233481 h 6521594"/>
+                <a:gd name="connsiteX19" fmla="*/ 6254366 w 6321679"/>
+                <a:gd name="connsiteY19" fmla="*/ 4534301 h 6521594"/>
+                <a:gd name="connsiteX20" fmla="*/ 6321679 w 6321679"/>
+                <a:gd name="connsiteY20" fmla="*/ 4456641 h 6521594"/>
+                <a:gd name="connsiteX21" fmla="*/ 6321679 w 6321679"/>
+                <a:gd name="connsiteY21" fmla="*/ 5523097 h 6521594"/>
+                <a:gd name="connsiteX22" fmla="*/ 6024428 w 6321679"/>
+                <a:gd name="connsiteY22" fmla="*/ 5754969 h 6521594"/>
+                <a:gd name="connsiteX23" fmla="*/ 5702345 w 6321679"/>
+                <a:gd name="connsiteY23" fmla="*/ 6000018 h 6521594"/>
+                <a:gd name="connsiteX24" fmla="*/ 4988380 w 6321679"/>
+                <a:gd name="connsiteY24" fmla="*/ 6506549 h 6521594"/>
+                <a:gd name="connsiteX25" fmla="*/ 4961490 w 6321679"/>
+                <a:gd name="connsiteY25" fmla="*/ 6521594 h 6521594"/>
+                <a:gd name="connsiteX26" fmla="*/ 2011326 w 6321679"/>
+                <a:gd name="connsiteY26" fmla="*/ 6521594 h 6521594"/>
+                <a:gd name="connsiteX27" fmla="*/ 1982893 w 6321679"/>
+                <a:gd name="connsiteY27" fmla="*/ 6505768 h 6521594"/>
+                <a:gd name="connsiteX28" fmla="*/ 824149 w 6321679"/>
+                <a:gd name="connsiteY28" fmla="*/ 5358682 h 6521594"/>
+                <a:gd name="connsiteX29" fmla="*/ 0 w 6321679"/>
+                <a:gd name="connsiteY29" fmla="*/ 3630075 h 6521594"/>
+                <a:gd name="connsiteX30" fmla="*/ 4150102 w 6321679"/>
+                <a:gd name="connsiteY30" fmla="*/ 0 h 6521594"/>
+              </a:gdLst>
+              <a:ahLst/>
+              <a:cxnLst>
+                <a:cxn ang="0">
+                  <a:pos x="connsiteX0" y="connsiteY0"/>
+                </a:cxn>
+                <a:cxn ang="0">
+                  <a:pos x="connsiteX1" y="connsiteY1"/>
+                </a:cxn>
+                <a:cxn ang="0">
+                  <a:pos x="connsiteX2" y="connsiteY2"/>
+                </a:cxn>
+                <a:cxn ang="0">
+                  <a:pos x="connsiteX3" y="connsiteY3"/>
+                </a:cxn>
+                <a:cxn ang="0">
+                  <a:pos x="connsiteX4" y="connsiteY4"/>
+                </a:cxn>
+                <a:cxn ang="0">
+                  <a:pos x="connsiteX5" y="connsiteY5"/>
+                </a:cxn>
+                <a:cxn ang="0">
+                  <a:pos x="connsiteX6" y="connsiteY6"/>
+                </a:cxn>
+                <a:cxn ang="0">
+                  <a:pos x="connsiteX7" y="connsiteY7"/>
+                </a:cxn>
+                <a:cxn ang="0">
+                  <a:pos x="connsiteX8" y="connsiteY8"/>
+                </a:cxn>
+                <a:cxn ang="0">
+                  <a:pos x="connsiteX9" y="connsiteY9"/>
+                </a:cxn>
+                <a:cxn ang="0">
+                  <a:pos x="connsiteX10" y="connsiteY10"/>
+                </a:cxn>
+                <a:cxn ang="0">
+                  <a:pos x="connsiteX11" y="connsiteY11"/>
+                </a:cxn>
+                <a:cxn ang="0">
+                  <a:pos x="connsiteX12" y="connsiteY12"/>
+                </a:cxn>
+                <a:cxn ang="0">
+                  <a:pos x="connsiteX13" y="connsiteY13"/>
+                </a:cxn>
+                <a:cxn ang="0">
+                  <a:pos x="connsiteX14" y="connsiteY14"/>
+                </a:cxn>
+                <a:cxn ang="0">
+                  <a:pos x="connsiteX15" y="connsiteY15"/>
+                </a:cxn>
+                <a:cxn ang="0">
+                  <a:pos x="connsiteX16" y="connsiteY16"/>
+                </a:cxn>
+                <a:cxn ang="0">
+                  <a:pos x="connsiteX17" y="connsiteY17"/>
+                </a:cxn>
+                <a:cxn ang="0">
+                  <a:pos x="connsiteX18" y="connsiteY18"/>
+                </a:cxn>
+                <a:cxn ang="0">
+                  <a:pos x="connsiteX19" y="connsiteY19"/>
+                </a:cxn>
+                <a:cxn ang="0">
+                  <a:pos x="connsiteX20" y="connsiteY20"/>
+                </a:cxn>
+                <a:cxn ang="0">
+                  <a:pos x="connsiteX21" y="connsiteY21"/>
+                </a:cxn>
+                <a:cxn ang="0">
+                  <a:pos x="connsiteX22" y="connsiteY22"/>
+                </a:cxn>
+                <a:cxn ang="0">
+                  <a:pos x="connsiteX23" y="connsiteY23"/>
+                </a:cxn>
+                <a:cxn ang="0">
+                  <a:pos x="connsiteX24" y="connsiteY24"/>
+                </a:cxn>
+                <a:cxn ang="0">
+                  <a:pos x="connsiteX25" y="connsiteY25"/>
+                </a:cxn>
+                <a:cxn ang="0">
+                  <a:pos x="connsiteX26" y="connsiteY26"/>
+                </a:cxn>
+                <a:cxn ang="0">
+                  <a:pos x="connsiteX27" y="connsiteY27"/>
+                </a:cxn>
+                <a:cxn ang="0">
+                  <a:pos x="connsiteX28" y="connsiteY28"/>
+                </a:cxn>
+                <a:cxn ang="0">
+                  <a:pos x="connsiteX29" y="connsiteY29"/>
+                </a:cxn>
+                <a:cxn ang="0">
+                  <a:pos x="connsiteX30" y="connsiteY30"/>
+                </a:cxn>
+              </a:cxnLst>
+              <a:rect l="l" t="t" r="r" b="b"/>
+              <a:pathLst>
+                <a:path w="6321679" h="6521594">
+                  <a:moveTo>
+                    <a:pt x="4150102" y="0"/>
+                  </a:moveTo>
+                  <a:cubicBezTo>
+                    <a:pt x="4918148" y="0"/>
+                    <a:pt x="5569597" y="228540"/>
+                    <a:pt x="6083891" y="619943"/>
+                  </a:cubicBezTo>
+                  <a:lnTo>
+                    <a:pt x="6321679" y="822247"/>
+                  </a:lnTo>
+                  <a:lnTo>
+                    <a:pt x="6321679" y="2150195"/>
+                  </a:lnTo>
+                  <a:lnTo>
+                    <a:pt x="6241288" y="1985338"/>
+                  </a:lnTo>
+                  <a:cubicBezTo>
+                    <a:pt x="6156788" y="1831195"/>
+                    <a:pt x="6059249" y="1688709"/>
+                    <a:pt x="5949367" y="1559997"/>
+                  </a:cubicBezTo>
+                  <a:cubicBezTo>
+                    <a:pt x="5737073" y="1311397"/>
+                    <a:pt x="5482843" y="1118314"/>
+                    <a:pt x="5193362" y="986156"/>
+                  </a:cubicBezTo>
+                  <a:cubicBezTo>
+                    <a:pt x="4883437" y="844596"/>
+                    <a:pt x="4532365" y="772850"/>
+                    <a:pt x="4150102" y="772850"/>
+                  </a:cubicBezTo>
+                  <a:cubicBezTo>
+                    <a:pt x="3746218" y="772850"/>
+                    <a:pt x="3319008" y="853613"/>
+                    <a:pt x="2914861" y="1006637"/>
+                  </a:cubicBezTo>
+                  <a:cubicBezTo>
+                    <a:pt x="2515039" y="1157857"/>
+                    <a:pt x="2134350" y="1380438"/>
+                    <a:pt x="1814073" y="1650163"/>
+                  </a:cubicBezTo>
+                  <a:cubicBezTo>
+                    <a:pt x="1494190" y="1919502"/>
+                    <a:pt x="1232622" y="2238173"/>
+                    <a:pt x="1057412" y="2571657"/>
+                  </a:cubicBezTo>
+                  <a:cubicBezTo>
+                    <a:pt x="877486" y="2914158"/>
+                    <a:pt x="786277" y="3270313"/>
+                    <a:pt x="786277" y="3630204"/>
+                  </a:cubicBezTo>
+                  <a:cubicBezTo>
+                    <a:pt x="786277" y="3974121"/>
+                    <a:pt x="923483" y="4173646"/>
+                    <a:pt x="1233931" y="4592016"/>
+                  </a:cubicBezTo>
+                  <a:cubicBezTo>
+                    <a:pt x="1311641" y="4696736"/>
+                    <a:pt x="1391972" y="4805064"/>
+                    <a:pt x="1474795" y="4924985"/>
+                  </a:cubicBezTo>
+                  <a:cubicBezTo>
+                    <a:pt x="1767682" y="5349278"/>
+                    <a:pt x="2068172" y="5650948"/>
+                    <a:pt x="2393691" y="5846995"/>
+                  </a:cubicBezTo>
+                  <a:cubicBezTo>
+                    <a:pt x="2738735" y="6054891"/>
+                    <a:pt x="3133971" y="6155876"/>
+                    <a:pt x="3601805" y="6155876"/>
+                  </a:cubicBezTo>
+                  <a:cubicBezTo>
+                    <a:pt x="3867305" y="6155876"/>
+                    <a:pt x="4114196" y="6093405"/>
+                    <a:pt x="4378909" y="5959186"/>
+                  </a:cubicBezTo>
+                  <a:cubicBezTo>
+                    <a:pt x="4650699" y="5821362"/>
+                    <a:pt x="4919737" y="5620421"/>
+                    <a:pt x="5218129" y="5391271"/>
+                  </a:cubicBezTo>
+                  <a:cubicBezTo>
+                    <a:pt x="5288107" y="5337558"/>
+                    <a:pt x="5357824" y="5284617"/>
+                    <a:pt x="5425313" y="5233481"/>
+                  </a:cubicBezTo>
+                  <a:cubicBezTo>
+                    <a:pt x="5739037" y="4995556"/>
+                    <a:pt x="6037512" y="4769168"/>
+                    <a:pt x="6254366" y="4534301"/>
+                  </a:cubicBezTo>
+                  <a:lnTo>
+                    <a:pt x="6321679" y="4456641"/>
+                  </a:lnTo>
+                  <a:lnTo>
+                    <a:pt x="6321679" y="5523097"/>
+                  </a:lnTo>
+                  <a:lnTo>
+                    <a:pt x="6024428" y="5754969"/>
+                  </a:lnTo>
+                  <a:cubicBezTo>
+                    <a:pt x="5918395" y="5835747"/>
+                    <a:pt x="5810491" y="5916953"/>
+                    <a:pt x="5702345" y="6000018"/>
+                  </a:cubicBezTo>
+                  <a:cubicBezTo>
+                    <a:pt x="5466020" y="6181541"/>
+                    <a:pt x="5232938" y="6357503"/>
+                    <a:pt x="4988380" y="6506549"/>
+                  </a:cubicBezTo>
+                  <a:lnTo>
+                    <a:pt x="4961490" y="6521594"/>
+                  </a:lnTo>
+                  <a:lnTo>
+                    <a:pt x="2011326" y="6521594"/>
+                  </a:lnTo>
+                  <a:lnTo>
+                    <a:pt x="1982893" y="6505768"/>
+                  </a:lnTo>
+                  <a:cubicBezTo>
+                    <a:pt x="1531799" y="6233999"/>
+                    <a:pt x="1157400" y="5841520"/>
+                    <a:pt x="824149" y="5358682"/>
+                  </a:cubicBezTo>
+                  <a:cubicBezTo>
+                    <a:pt x="424196" y="4779302"/>
+                    <a:pt x="0" y="4381929"/>
+                    <a:pt x="0" y="3630075"/>
+                  </a:cubicBezTo>
+                  <a:cubicBezTo>
+                    <a:pt x="0" y="1625174"/>
+                    <a:pt x="2089794" y="0"/>
+                    <a:pt x="4150102" y="0"/>
+                  </a:cubicBezTo>
+                  <a:close/>
+                </a:path>
+              </a:pathLst>
+            </a:custGeom>
+            <a:gradFill>
+              <a:gsLst>
+                <a:gs pos="2000">
+                  <a:schemeClr val="bg1">
+                    <a:alpha val="10000"/>
+                  </a:schemeClr>
+                </a:gs>
+                <a:gs pos="16000">
+                  <a:schemeClr val="accent6">
+                    <a:alpha val="10000"/>
+                  </a:schemeClr>
+                </a:gs>
+                <a:gs pos="100000">
+                  <a:schemeClr val="bg1">
+                    <a:alpha val="10000"/>
+                  </a:schemeClr>
+                </a:gs>
+                <a:gs pos="85000">
+                  <a:schemeClr val="accent1">
+                    <a:alpha val="10000"/>
+                  </a:schemeClr>
+                </a:gs>
+              </a:gsLst>
+              <a:lin ang="12000000" scaled="0"/>
+            </a:gradFill>
+            <a:ln>
+              <a:noFill/>
+            </a:ln>
+          </p:spPr>
+          <p:style>
+            <a:lnRef idx="2">
+              <a:schemeClr val="accent1">
+                <a:shade val="50000"/>
+              </a:schemeClr>
+            </a:lnRef>
+            <a:fillRef idx="1">
+              <a:schemeClr val="accent1"/>
+            </a:fillRef>
+            <a:effectRef idx="0">
+              <a:schemeClr val="accent1"/>
+            </a:effectRef>
+            <a:fontRef idx="minor">
+              <a:schemeClr val="lt1"/>
+            </a:fontRef>
+          </p:style>
+          <p:txBody>
+            <a:bodyPr rtlCol="0" anchor="ctr"/>
+            <a:lstStyle/>
+            <a:p>
+              <a:pPr algn="ctr"/>
+              <a:endParaRPr lang="en-US"/>
+            </a:p>
+          </p:txBody>
+        </p:sp>
+      </p:grpSp>
+      <p:pic>
+        <p:nvPicPr>
+          <p:cNvPr id="7" name="Imagen 6">
+            <a:extLst>
+              <a:ext uri="{FF2B5EF4-FFF2-40B4-BE49-F238E27FC236}">
+                <a16:creationId xmlns:a16="http://schemas.microsoft.com/office/drawing/2014/main" id="{78DECC96-2693-7B08-33AB-D5B0D8CB3771}"/>
+              </a:ext>
+            </a:extLst>
+          </p:cNvPr>
+          <p:cNvPicPr>
+            <a:picLocks noChangeAspect="1"/>
+          </p:cNvPicPr>
+          <p:nvPr/>
+        </p:nvPicPr>
+        <p:blipFill>
+          <a:blip r:embed="rId3"/>
+          <a:stretch>
+            <a:fillRect/>
+          </a:stretch>
+        </p:blipFill>
+        <p:spPr>
+          <a:xfrm>
+            <a:off x="7986897" y="1700784"/>
+            <a:ext cx="3585222" cy="4379976"/>
+          </a:xfrm>
+          <a:prstGeom prst="rect">
+            <a:avLst/>
+          </a:prstGeom>
+        </p:spPr>
+      </p:pic>
     </p:spTree>
     <p:extLst>
       <p:ext uri="{BB962C8B-B14F-4D97-AF65-F5344CB8AC3E}">
@@ -13838,9 +16812,58 @@
               </a:lnSpc>
             </a:pPr>
             <a:r>
-              <a:rPr lang="en-US" sz="2800"/>
-              <a:t>Importancia de los modelos de vectores en la ciencia y tecnología</a:t>
-            </a:r>
+              <a:rPr lang="en-US" sz="2800" dirty="0" err="1"/>
+              <a:t>Importancia</a:t>
+            </a:r>
+            <a:r>
+              <a:rPr lang="en-US" sz="2800" dirty="0"/>
+              <a:t> de </a:t>
+            </a:r>
+            <a:r>
+              <a:rPr lang="en-US" sz="2800" dirty="0" err="1"/>
+              <a:t>los</a:t>
+            </a:r>
+            <a:r>
+              <a:rPr lang="en-US" sz="2800" dirty="0"/>
+              <a:t> </a:t>
+            </a:r>
+            <a:r>
+              <a:rPr lang="en-US" sz="2800" dirty="0" err="1"/>
+              <a:t>modelos</a:t>
+            </a:r>
+            <a:r>
+              <a:rPr lang="en-US" sz="2800" dirty="0"/>
+              <a:t> de </a:t>
+            </a:r>
+            <a:r>
+              <a:rPr lang="en-US" sz="2800" dirty="0" err="1"/>
+              <a:t>vectores</a:t>
+            </a:r>
+            <a:r>
+              <a:rPr lang="en-US" sz="2800" dirty="0"/>
+              <a:t> </a:t>
+            </a:r>
+            <a:r>
+              <a:rPr lang="en-US" sz="2800" dirty="0" err="1"/>
+              <a:t>en</a:t>
+            </a:r>
+            <a:r>
+              <a:rPr lang="en-US" sz="2800" dirty="0"/>
+              <a:t> la </a:t>
+            </a:r>
+            <a:r>
+              <a:rPr lang="en-US" sz="2800" dirty="0" err="1"/>
+              <a:t>ciencia</a:t>
+            </a:r>
+            <a:r>
+              <a:rPr lang="en-US" sz="2800" dirty="0"/>
+              <a:t> y </a:t>
+            </a:r>
+            <a:r>
+              <a:rPr lang="en-US" sz="2800" dirty="0" err="1"/>
+              <a:t>tecnología</a:t>
+            </a:r>
+            <a:endParaRPr lang="en-US" sz="2800" dirty="0"/>
           </a:p>
         </p:txBody>
       </p:sp>
@@ -13949,35 +16972,49 @@
       </p:sp>
       <p:pic>
         <p:nvPicPr>
-          <p:cNvPr id="5" name="Marcador de contenido 4" descr="Vista angular del circuito con forma de cerebro">
+          <p:cNvPr id="1028" name="Picture 4" descr="Los niveles de la conducción autónoma">
             <a:extLst>
               <a:ext uri="{FF2B5EF4-FFF2-40B4-BE49-F238E27FC236}">
-                <a16:creationId xmlns:a16="http://schemas.microsoft.com/office/drawing/2014/main" id="{B542A540-B736-4566-B4D1-4690093041C3}"/>
+                <a16:creationId xmlns:a16="http://schemas.microsoft.com/office/drawing/2014/main" id="{4D1C0A48-DECF-5E1C-D588-484F82D1184D}"/>
               </a:ext>
             </a:extLst>
           </p:cNvPr>
           <p:cNvPicPr>
-            <a:picLocks noGrp="1" noChangeAspect="1"/>
+            <a:picLocks noChangeAspect="1" noChangeArrowheads="1"/>
           </p:cNvPicPr>
-          <p:nvPr>
-            <p:ph sz="half" idx="1"/>
-          </p:nvPr>
+          <p:nvPr/>
         </p:nvPicPr>
         <p:blipFill>
-          <a:blip r:embed="rId3"/>
-          <a:srcRect l="30050" r="28488" b="2"/>
+          <a:blip r:embed="rId3">
+            <a:extLst>
+              <a:ext uri="{28A0092B-C50C-407E-A947-70E740481C1C}">
+                <a14:useLocalDpi xmlns:a14="http://schemas.microsoft.com/office/drawing/2010/main" val="0"/>
+              </a:ext>
+            </a:extLst>
+          </a:blip>
+          <a:srcRect/>
           <a:stretch>
             <a:fillRect/>
           </a:stretch>
         </p:blipFill>
-        <p:spPr>
+        <p:spPr bwMode="auto">
           <a:xfrm>
-            <a:off x="8115300" y="10"/>
-            <a:ext cx="4076700" cy="6857990"/>
+            <a:off x="7681913" y="2040731"/>
+            <a:ext cx="4172392" cy="2776537"/>
           </a:xfrm>
           <a:prstGeom prst="rect">
             <a:avLst/>
           </a:prstGeom>
+          <a:noFill/>
+          <a:extLst>
+            <a:ext uri="{909E8E84-426E-40DD-AFC4-6F175D3DCCD1}">
+              <a14:hiddenFill xmlns:a14="http://schemas.microsoft.com/office/drawing/2010/main">
+                <a:solidFill>
+                  <a:srgbClr val="FFFFFF"/>
+                </a:solidFill>
+              </a14:hiddenFill>
+            </a:ext>
+          </a:extLst>
         </p:spPr>
       </p:pic>
     </p:spTree>
@@ -14185,7 +17222,7 @@
               </a:lnSpc>
             </a:pPr>
             <a:r>
-              <a:rPr lang="es-MX" sz="2500"/>
+              <a:rPr lang="es-MX" sz="2500" dirty="0"/>
               <a:t>Definición y características principales de los modelos de vectores</a:t>
             </a:r>
           </a:p>
@@ -14206,6 +17243,9 @@
           <p:nvPr>
             <p:ph idx="1"/>
             <p:extLst>
+              <p:ext uri="{D42A27DB-BD31-4B8C-83A1-F6EECF244321}">
+                <p14:modId xmlns:p14="http://schemas.microsoft.com/office/powerpoint/2010/main" val="689124373"/>
+              </p:ext>
               <p:ext uri="{E7BDC344-281C-4309-B0C6-D0EE65EED2A8}">
                 <p202:designPr xmlns:p202="http://schemas.microsoft.com/office/powerpoint/2020/02/main">
                   <p202:designTagLst>
@@ -14853,39 +17893,6 @@
           </a:p>
         </p:txBody>
       </p:sp>
-      <p:pic>
-        <p:nvPicPr>
-          <p:cNvPr id="5" name="Marcador de contenido 4" descr="Crecimiento de la inversión verde sostenible">
-            <a:extLst>
-              <a:ext uri="{FF2B5EF4-FFF2-40B4-BE49-F238E27FC236}">
-                <a16:creationId xmlns:a16="http://schemas.microsoft.com/office/drawing/2014/main" id="{D52FA85D-39D6-4F9D-97E6-883E24848591}"/>
-              </a:ext>
-            </a:extLst>
-          </p:cNvPr>
-          <p:cNvPicPr>
-            <a:picLocks noGrp="1" noChangeAspect="1"/>
-          </p:cNvPicPr>
-          <p:nvPr>
-            <p:ph sz="half" idx="1"/>
-          </p:nvPr>
-        </p:nvPicPr>
-        <p:blipFill>
-          <a:blip r:embed="rId3"/>
-          <a:srcRect l="41409" r="17759" b="2"/>
-          <a:stretch>
-            <a:fillRect/>
-          </a:stretch>
-        </p:blipFill>
-        <p:spPr>
-          <a:xfrm>
-            <a:off x="20" y="-17929"/>
-            <a:ext cx="4206220" cy="6875929"/>
-          </a:xfrm>
-          <a:prstGeom prst="rect">
-            <a:avLst/>
-          </a:prstGeom>
-        </p:spPr>
-      </p:pic>
       <p:sp>
         <p:nvSpPr>
           <p:cNvPr id="4" name="Marcador de contenido 3">
@@ -14989,6 +17996,58 @@
           </a:p>
         </p:txBody>
       </p:sp>
+      <p:pic>
+        <p:nvPicPr>
+          <p:cNvPr id="2050" name="Picture 2" descr="ANÁLISIS DE ESTRUCTURAS. METODO DE NODOS. TEORÍA 👨‍🏫">
+            <a:extLst>
+              <a:ext uri="{FF2B5EF4-FFF2-40B4-BE49-F238E27FC236}">
+                <a16:creationId xmlns:a16="http://schemas.microsoft.com/office/drawing/2014/main" id="{0120E4BD-475D-5627-5638-6C75EB1FEB2E}"/>
+              </a:ext>
+            </a:extLst>
+          </p:cNvPr>
+          <p:cNvPicPr>
+            <a:picLocks noChangeAspect="1" noChangeArrowheads="1"/>
+          </p:cNvPicPr>
+          <p:nvPr/>
+        </p:nvPicPr>
+        <p:blipFill rotWithShape="1">
+          <a:blip r:embed="rId3">
+            <a:extLst>
+              <a:ext uri="{28A0092B-C50C-407E-A947-70E740481C1C}">
+                <a14:useLocalDpi xmlns:a14="http://schemas.microsoft.com/office/drawing/2010/main" val="0"/>
+              </a:ext>
+            </a:extLst>
+          </a:blip>
+          <a:srcRect l="2162" t="3529" r="2309" b="4118"/>
+          <a:stretch/>
+        </p:blipFill>
+        <p:spPr bwMode="auto">
+          <a:xfrm>
+            <a:off x="512619" y="1080655"/>
+            <a:ext cx="4017818" cy="2175163"/>
+          </a:xfrm>
+          <a:prstGeom prst="rect">
+            <a:avLst/>
+          </a:prstGeom>
+          <a:noFill/>
+          <a:effectLst>
+            <a:outerShdw blurRad="50800" dist="38100" dir="2700000" algn="tl" rotWithShape="0">
+              <a:prstClr val="black">
+                <a:alpha val="40000"/>
+              </a:prstClr>
+            </a:outerShdw>
+          </a:effectLst>
+          <a:extLst>
+            <a:ext uri="{909E8E84-426E-40DD-AFC4-6F175D3DCCD1}">
+              <a14:hiddenFill xmlns:a14="http://schemas.microsoft.com/office/drawing/2010/main">
+                <a:solidFill>
+                  <a:srgbClr val="FFFFFF"/>
+                </a:solidFill>
+              </a14:hiddenFill>
+            </a:ext>
+          </a:extLst>
+        </p:spPr>
+      </p:pic>
     </p:spTree>
     <p:extLst>
       <p:ext uri="{BB962C8B-B14F-4D97-AF65-F5344CB8AC3E}">
@@ -15258,9 +18317,26 @@
           <a:p>
             <a:pPr defTabSz="914400"/>
             <a:r>
-              <a:rPr lang="en-US" sz="4000"/>
-              <a:t>Concepto del espacio euclidiano</a:t>
-            </a:r>
+              <a:rPr lang="en-US" sz="4000" dirty="0" err="1"/>
+              <a:t>Concepto</a:t>
+            </a:r>
+            <a:r>
+              <a:rPr lang="en-US" sz="4000" dirty="0"/>
+              <a:t> del </a:t>
+            </a:r>
+            <a:r>
+              <a:rPr lang="en-US" sz="4000" dirty="0" err="1"/>
+              <a:t>espacio</a:t>
+            </a:r>
+            <a:r>
+              <a:rPr lang="en-US" sz="4000" dirty="0"/>
+              <a:t> </a:t>
+            </a:r>
+            <a:r>
+              <a:rPr lang="en-US" sz="4000" dirty="0" err="1"/>
+              <a:t>euclidiano</a:t>
+            </a:r>
+            <a:endParaRPr lang="en-US" sz="4000" dirty="0"/>
           </a:p>
         </p:txBody>
       </p:sp>
@@ -15367,6 +18443,36 @@
           </a:p>
         </p:txBody>
       </p:sp>
+      <p:pic>
+        <p:nvPicPr>
+          <p:cNvPr id="3" name="Imagen 2">
+            <a:extLst>
+              <a:ext uri="{FF2B5EF4-FFF2-40B4-BE49-F238E27FC236}">
+                <a16:creationId xmlns:a16="http://schemas.microsoft.com/office/drawing/2014/main" id="{17886FE3-13F4-5D6A-E8B9-6F67B8EA3F66}"/>
+              </a:ext>
+            </a:extLst>
+          </p:cNvPr>
+          <p:cNvPicPr>
+            <a:picLocks noChangeAspect="1"/>
+          </p:cNvPicPr>
+          <p:nvPr/>
+        </p:nvPicPr>
+        <p:blipFill>
+          <a:blip r:embed="rId3"/>
+          <a:stretch>
+            <a:fillRect/>
+          </a:stretch>
+        </p:blipFill>
+        <p:spPr>
+          <a:xfrm>
+            <a:off x="6606938" y="943472"/>
+            <a:ext cx="4272314" cy="4141146"/>
+          </a:xfrm>
+          <a:prstGeom prst="rect">
+            <a:avLst/>
+          </a:prstGeom>
+        </p:spPr>
+      </p:pic>
     </p:spTree>
     <p:extLst>
       <p:ext uri="{BB962C8B-B14F-4D97-AF65-F5344CB8AC3E}">
@@ -15717,9 +18823,26 @@
           <a:p>
             <a:pPr defTabSz="914400"/>
             <a:r>
-              <a:rPr lang="en-US"/>
-              <a:t>Cálculo de distancias euclidianas</a:t>
-            </a:r>
+              <a:rPr lang="en-US" dirty="0" err="1"/>
+              <a:t>Cálculo</a:t>
+            </a:r>
+            <a:r>
+              <a:rPr lang="en-US" dirty="0"/>
+              <a:t> de </a:t>
+            </a:r>
+            <a:r>
+              <a:rPr lang="en-US" dirty="0" err="1"/>
+              <a:t>distancias</a:t>
+            </a:r>
+            <a:r>
+              <a:rPr lang="en-US" dirty="0"/>
+              <a:t> </a:t>
+            </a:r>
+            <a:r>
+              <a:rPr lang="en-US" dirty="0" err="1"/>
+              <a:t>euclidianas</a:t>
+            </a:r>
+            <a:endParaRPr lang="en-US" dirty="0"/>
           </a:p>
         </p:txBody>
       </p:sp>
@@ -15752,7 +18875,7 @@
         <p:spPr>
           <a:xfrm>
             <a:off x="6797004" y="670559"/>
-            <a:ext cx="4555782" cy="5445076"/>
+            <a:ext cx="4555782" cy="5965768"/>
           </a:xfrm>
         </p:spPr>
         <p:txBody>
@@ -15768,7 +18891,7 @@
               <a:buNone/>
             </a:pPr>
             <a:r>
-              <a:rPr lang="es-ES" sz="1400" b="1"/>
+              <a:rPr lang="es-ES" sz="1400" b="1" dirty="0"/>
               <a:t>Definición matemática</a:t>
             </a:r>
           </a:p>
@@ -15777,9 +18900,33 @@
               <a:buNone/>
             </a:pPr>
             <a:r>
-              <a:rPr lang="es-ES" sz="1400"/>
+              <a:rPr lang="es-ES" sz="1400" dirty="0"/>
               <a:t>La distancia euclidiana es la raíz cuadrada de la suma de las diferencias al cuadrado entre coordenadas.</a:t>
             </a:r>
+          </a:p>
+          <a:p>
+            <a:pPr marL="0" lvl="1" indent="0">
+              <a:buNone/>
+            </a:pPr>
+            <a:endParaRPr lang="es-ES" sz="1400" dirty="0"/>
+          </a:p>
+          <a:p>
+            <a:pPr marL="0" lvl="1" indent="0">
+              <a:buNone/>
+            </a:pPr>
+            <a:endParaRPr lang="es-ES" sz="1400" dirty="0"/>
+          </a:p>
+          <a:p>
+            <a:pPr marL="0" lvl="1" indent="0">
+              <a:buNone/>
+            </a:pPr>
+            <a:endParaRPr lang="es-ES" sz="1400" dirty="0"/>
+          </a:p>
+          <a:p>
+            <a:pPr marL="0" lvl="1" indent="0">
+              <a:buNone/>
+            </a:pPr>
+            <a:endParaRPr lang="es-ES" sz="1400" dirty="0"/>
           </a:p>
           <a:p>
             <a:pPr marL="0" indent="0">
@@ -15789,7 +18936,7 @@
               <a:buNone/>
             </a:pPr>
             <a:r>
-              <a:rPr lang="es-ES" sz="1400" b="1"/>
+              <a:rPr lang="es-ES" sz="1400" b="1" dirty="0"/>
               <a:t>Interpretación geométrica</a:t>
             </a:r>
           </a:p>
@@ -15798,9 +18945,45 @@
               <a:buNone/>
             </a:pPr>
             <a:r>
-              <a:rPr lang="es-ES" sz="1400"/>
+              <a:rPr lang="es-ES" sz="1400" dirty="0"/>
               <a:t>Representa la distancia recta o mínima entre dos puntos en un espacio multidimensional.</a:t>
             </a:r>
+          </a:p>
+          <a:p>
+            <a:pPr marL="0" lvl="1" indent="0">
+              <a:buNone/>
+            </a:pPr>
+            <a:endParaRPr lang="es-ES" sz="1400" dirty="0"/>
+          </a:p>
+          <a:p>
+            <a:pPr marL="0" lvl="1" indent="0">
+              <a:buNone/>
+            </a:pPr>
+            <a:endParaRPr lang="es-ES" sz="1400" dirty="0"/>
+          </a:p>
+          <a:p>
+            <a:pPr marL="0" lvl="1" indent="0">
+              <a:buNone/>
+            </a:pPr>
+            <a:endParaRPr lang="es-ES" sz="1400" dirty="0"/>
+          </a:p>
+          <a:p>
+            <a:pPr marL="0" lvl="1" indent="0">
+              <a:buNone/>
+            </a:pPr>
+            <a:endParaRPr lang="es-ES" sz="1400" dirty="0"/>
+          </a:p>
+          <a:p>
+            <a:pPr marL="0" lvl="1" indent="0">
+              <a:buNone/>
+            </a:pPr>
+            <a:endParaRPr lang="es-ES" sz="1400" dirty="0"/>
+          </a:p>
+          <a:p>
+            <a:pPr marL="0" lvl="1" indent="0">
+              <a:buNone/>
+            </a:pPr>
+            <a:endParaRPr lang="es-ES" sz="1400" dirty="0"/>
           </a:p>
           <a:p>
             <a:pPr marL="0" indent="0">
@@ -15809,8 +18992,17 @@
               </a:spcBef>
               <a:buNone/>
             </a:pPr>
-            <a:r>
-              <a:rPr lang="es-ES" sz="1400" b="1"/>
+            <a:endParaRPr lang="es-ES" sz="1400" b="1" dirty="0"/>
+          </a:p>
+          <a:p>
+            <a:pPr marL="0" indent="0">
+              <a:spcBef>
+                <a:spcPts val="2500"/>
+              </a:spcBef>
+              <a:buNone/>
+            </a:pPr>
+            <a:r>
+              <a:rPr lang="es-ES" sz="1400" b="1" dirty="0"/>
               <a:t>Aplicación en espacios multidimensionales</a:t>
             </a:r>
           </a:p>
@@ -15819,13 +19011,72 @@
               <a:buNone/>
             </a:pPr>
             <a:r>
-              <a:rPr lang="es-ES" sz="1400"/>
+              <a:rPr lang="es-ES" sz="1400" dirty="0"/>
               <a:t>Es una medida intuitiva de proximidad en espacios con múltiples dimensiones o variables.</a:t>
             </a:r>
-            <a:endParaRPr lang="es-MX" sz="1400"/>
+            <a:endParaRPr lang="es-MX" sz="1400" dirty="0"/>
           </a:p>
         </p:txBody>
       </p:sp>
+      <p:pic>
+        <p:nvPicPr>
+          <p:cNvPr id="3" name="Imagen 2">
+            <a:extLst>
+              <a:ext uri="{FF2B5EF4-FFF2-40B4-BE49-F238E27FC236}">
+                <a16:creationId xmlns:a16="http://schemas.microsoft.com/office/drawing/2014/main" id="{E27B5525-65B0-C2E6-C9D2-842091BDAAD2}"/>
+              </a:ext>
+            </a:extLst>
+          </p:cNvPr>
+          <p:cNvPicPr>
+            <a:picLocks noChangeAspect="1"/>
+          </p:cNvPicPr>
+          <p:nvPr/>
+        </p:nvPicPr>
+        <p:blipFill>
+          <a:blip r:embed="rId3"/>
+          <a:srcRect t="38482" b="16722"/>
+          <a:stretch/>
+        </p:blipFill>
+        <p:spPr>
+          <a:xfrm>
+            <a:off x="6791501" y="1364673"/>
+            <a:ext cx="3821257" cy="963176"/>
+          </a:xfrm>
+          <a:prstGeom prst="rect">
+            <a:avLst/>
+          </a:prstGeom>
+        </p:spPr>
+      </p:pic>
+      <p:pic>
+        <p:nvPicPr>
+          <p:cNvPr id="5" name="Imagen 4">
+            <a:extLst>
+              <a:ext uri="{FF2B5EF4-FFF2-40B4-BE49-F238E27FC236}">
+                <a16:creationId xmlns:a16="http://schemas.microsoft.com/office/drawing/2014/main" id="{6E765B05-0909-E54A-1149-D52FCA4516FD}"/>
+              </a:ext>
+            </a:extLst>
+          </p:cNvPr>
+          <p:cNvPicPr>
+            <a:picLocks noChangeAspect="1"/>
+          </p:cNvPicPr>
+          <p:nvPr/>
+        </p:nvPicPr>
+        <p:blipFill>
+          <a:blip r:embed="rId4"/>
+          <a:stretch>
+            <a:fillRect/>
+          </a:stretch>
+        </p:blipFill>
+        <p:spPr>
+          <a:xfrm>
+            <a:off x="7333910" y="3589911"/>
+            <a:ext cx="2734625" cy="1784353"/>
+          </a:xfrm>
+          <a:prstGeom prst="rect">
+            <a:avLst/>
+          </a:prstGeom>
+        </p:spPr>
+      </p:pic>
     </p:spTree>
     <p:extLst>
       <p:ext uri="{BB962C8B-B14F-4D97-AF65-F5344CB8AC3E}">
@@ -16772,15 +20023,6 @@
 </file>
 
 <file path=customXml/item1.xml><?xml version="1.0" encoding="utf-8"?>
-<?mso-contentType ?>
-<FormTemplates xmlns="http://schemas.microsoft.com/sharepoint/v3/contenttype/forms">
-  <Display>DocumentLibraryForm</Display>
-  <Edit>DocumentLibraryForm</Edit>
-  <New>DocumentLibraryForm</New>
-</FormTemplates>
-</file>
-
-<file path=customXml/item2.xml><?xml version="1.0" encoding="utf-8"?>
 <p:properties xmlns:p="http://schemas.microsoft.com/office/2006/metadata/properties" xmlns:xsi="http://www.w3.org/2001/XMLSchema-instance" xmlns:pc="http://schemas.microsoft.com/office/infopath/2007/PartnerControls">
   <documentManagement>
     <Status xmlns="71af3243-3dd4-4a8d-8c0d-dd76da1f02a5">Not started</Status>
@@ -16797,6 +20039,15 @@
     <MediaServiceKeyPoints xmlns="71af3243-3dd4-4a8d-8c0d-dd76da1f02a5" xsi:nil="true"/>
   </documentManagement>
 </p:properties>
+</file>
+
+<file path=customXml/item2.xml><?xml version="1.0" encoding="utf-8"?>
+<?mso-contentType ?>
+<FormTemplates xmlns="http://schemas.microsoft.com/sharepoint/v3/contenttype/forms">
+  <Display>DocumentLibraryForm</Display>
+  <Edit>DocumentLibraryForm</Edit>
+  <New>DocumentLibraryForm</New>
+</FormTemplates>
 </file>
 
 <file path=customXml/item3.xml><?xml version="1.0" encoding="utf-8"?>
@@ -17076,14 +20327,6 @@
 </file>
 
 <file path=customXml/itemProps1.xml><?xml version="1.0" encoding="utf-8"?>
-<ds:datastoreItem xmlns:ds="http://schemas.openxmlformats.org/officeDocument/2006/customXml" ds:itemID="{77DD0DBF-30B2-4FC6-A5E7-8374DC718037}">
-  <ds:schemaRefs>
-    <ds:schemaRef ds:uri="http://schemas.microsoft.com/sharepoint/v3/contenttype/forms"/>
-  </ds:schemaRefs>
-</ds:datastoreItem>
-</file>
-
-<file path=customXml/itemProps2.xml><?xml version="1.0" encoding="utf-8"?>
 <ds:datastoreItem xmlns:ds="http://schemas.openxmlformats.org/officeDocument/2006/customXml" ds:itemID="{1C44B501-5DE1-46D9-B449-400C46FE1425}">
   <ds:schemaRefs>
     <ds:schemaRef ds:uri="http://schemas.microsoft.com/office/2006/metadata/properties"/>
@@ -17091,6 +20334,14 @@
     <ds:schemaRef ds:uri="71af3243-3dd4-4a8d-8c0d-dd76da1f02a5"/>
     <ds:schemaRef ds:uri="http://schemas.microsoft.com/sharepoint/v3"/>
     <ds:schemaRef ds:uri="230e9df3-be65-4c73-a93b-d1236ebd677e"/>
+  </ds:schemaRefs>
+</ds:datastoreItem>
+</file>
+
+<file path=customXml/itemProps2.xml><?xml version="1.0" encoding="utf-8"?>
+<ds:datastoreItem xmlns:ds="http://schemas.openxmlformats.org/officeDocument/2006/customXml" ds:itemID="{77DD0DBF-30B2-4FC6-A5E7-8374DC718037}">
+  <ds:schemaRefs>
+    <ds:schemaRef ds:uri="http://schemas.microsoft.com/sharepoint/v3/contenttype/forms"/>
   </ds:schemaRefs>
 </ds:datastoreItem>
 </file>

--- a/Infografía sobre Tipos de Modelos Vectoriales y sus aplicaciones.pptx
+++ b/Infografía sobre Tipos de Modelos Vectoriales y sus aplicaciones.pptx
@@ -202,7 +202,7 @@
 <file path=ppt/revisionInfo.xml><?xml version="1.0" encoding="utf-8"?>
 <p1510:revInfo xmlns:a="http://schemas.openxmlformats.org/drawingml/2006/main" xmlns:r="http://schemas.openxmlformats.org/officeDocument/2006/relationships" xmlns:p1510="http://schemas.microsoft.com/office/powerpoint/2015/10/main">
   <p1510:revLst>
-    <p1510:client id="{D955883F-B946-40F1-BFEB-003862376058}" v="106" dt="2025-08-21T00:42:10.261"/>
+    <p1510:client id="{D955883F-B946-40F1-BFEB-003862376058}" v="124" dt="2025-08-23T17:32:54.178"/>
   </p1510:revLst>
 </p1510:revInfo>
 </file>
@@ -212,7 +212,7 @@
   <pc:docChgLst>
     <pc:chgData name="Luis de la Garza" userId="5365f7fcd4da17b0" providerId="LiveId" clId="{D955883F-B946-40F1-BFEB-003862376058}"/>
     <pc:docChg chg="undo custSel addSld modSld">
-      <pc:chgData name="Luis de la Garza" userId="5365f7fcd4da17b0" providerId="LiveId" clId="{D955883F-B946-40F1-BFEB-003862376058}" dt="2025-08-21T00:42:13.095" v="175" actId="1076"/>
+      <pc:chgData name="Luis de la Garza" userId="5365f7fcd4da17b0" providerId="LiveId" clId="{D955883F-B946-40F1-BFEB-003862376058}" dt="2025-08-23T17:33:03.302" v="196" actId="1076"/>
       <pc:docMkLst>
         <pc:docMk/>
       </pc:docMkLst>
@@ -245,30 +245,6 @@
           <pc:docMk/>
           <pc:sldMk cId="104034423" sldId="2566"/>
         </pc:sldMkLst>
-        <pc:spChg chg="add del mod">
-          <ac:chgData name="Luis de la Garza" userId="5365f7fcd4da17b0" providerId="LiveId" clId="{D955883F-B946-40F1-BFEB-003862376058}" dt="2025-08-21T00:04:53.097" v="23" actId="478"/>
-          <ac:spMkLst>
-            <pc:docMk/>
-            <pc:sldMk cId="104034423" sldId="2566"/>
-            <ac:spMk id="6" creationId="{53F2DBF0-BE9E-98A8-67E9-AFA4EDFD3AD8}"/>
-          </ac:spMkLst>
-        </pc:spChg>
-        <pc:picChg chg="del">
-          <ac:chgData name="Luis de la Garza" userId="5365f7fcd4da17b0" providerId="LiveId" clId="{D955883F-B946-40F1-BFEB-003862376058}" dt="2025-08-21T00:04:39.480" v="19" actId="478"/>
-          <ac:picMkLst>
-            <pc:docMk/>
-            <pc:sldMk cId="104034423" sldId="2566"/>
-            <ac:picMk id="5" creationId="{B542A540-B736-4566-B4D1-4690093041C3}"/>
-          </ac:picMkLst>
-        </pc:picChg>
-        <pc:picChg chg="add del mod">
-          <ac:chgData name="Luis de la Garza" userId="5365f7fcd4da17b0" providerId="LiveId" clId="{D955883F-B946-40F1-BFEB-003862376058}" dt="2025-08-21T00:05:36.628" v="26" actId="478"/>
-          <ac:picMkLst>
-            <pc:docMk/>
-            <pc:sldMk cId="104034423" sldId="2566"/>
-            <ac:picMk id="1026" creationId="{F2D58015-C0C4-5C55-EF60-13B074E95A37}"/>
-          </ac:picMkLst>
-        </pc:picChg>
         <pc:picChg chg="add mod">
           <ac:chgData name="Luis de la Garza" userId="5365f7fcd4da17b0" providerId="LiveId" clId="{D955883F-B946-40F1-BFEB-003862376058}" dt="2025-08-21T00:06:18.449" v="32" actId="1076"/>
           <ac:picMkLst>
@@ -385,14 +361,6 @@
             <ac:picMk id="5" creationId="{BC602C80-D958-DC41-ADFB-ECF002549F01}"/>
           </ac:picMkLst>
         </pc:picChg>
-        <pc:cxnChg chg="del">
-          <ac:chgData name="Luis de la Garza" userId="5365f7fcd4da17b0" providerId="LiveId" clId="{D955883F-B946-40F1-BFEB-003862376058}" dt="2025-08-21T00:31:22.584" v="109" actId="700"/>
-          <ac:cxnSpMkLst>
-            <pc:docMk/>
-            <pc:sldMk cId="1241161601" sldId="2571"/>
-            <ac:cxnSpMk id="10" creationId="{CD8BC200-CFA3-C21D-9306-5C7BA0186540}"/>
-          </ac:cxnSpMkLst>
-        </pc:cxnChg>
       </pc:sldChg>
       <pc:sldChg chg="addSp modSp mod">
         <pc:chgData name="Luis de la Garza" userId="5365f7fcd4da17b0" providerId="LiveId" clId="{D955883F-B946-40F1-BFEB-003862376058}" dt="2025-08-21T00:42:13.095" v="175" actId="1076"/>
@@ -416,6 +384,105 @@
             <ac:picMk id="3" creationId="{6B5272D2-FD1D-3536-CB99-2616077A74F0}"/>
           </ac:picMkLst>
         </pc:picChg>
+      </pc:sldChg>
+      <pc:sldChg chg="addSp modSp">
+        <pc:chgData name="Luis de la Garza" userId="5365f7fcd4da17b0" providerId="LiveId" clId="{D955883F-B946-40F1-BFEB-003862376058}" dt="2025-08-23T17:26:42.582" v="179" actId="403"/>
+        <pc:sldMkLst>
+          <pc:docMk/>
+          <pc:sldMk cId="1096300489" sldId="2573"/>
+        </pc:sldMkLst>
+        <pc:spChg chg="mod">
+          <ac:chgData name="Luis de la Garza" userId="5365f7fcd4da17b0" providerId="LiveId" clId="{D955883F-B946-40F1-BFEB-003862376058}" dt="2025-08-23T17:26:42.582" v="179" actId="403"/>
+          <ac:spMkLst>
+            <pc:docMk/>
+            <pc:sldMk cId="1096300489" sldId="2573"/>
+            <ac:spMk id="4" creationId="{729223E9-9733-FAA2-0DB2-D5365278A8B9}"/>
+          </ac:spMkLst>
+        </pc:spChg>
+        <pc:picChg chg="add mod">
+          <ac:chgData name="Luis de la Garza" userId="5365f7fcd4da17b0" providerId="LiveId" clId="{D955883F-B946-40F1-BFEB-003862376058}" dt="2025-08-23T17:26:37.094" v="178" actId="1076"/>
+          <ac:picMkLst>
+            <pc:docMk/>
+            <pc:sldMk cId="1096300489" sldId="2573"/>
+            <ac:picMk id="1026" creationId="{00701AE1-9D84-E865-7F16-CAC579B59649}"/>
+          </ac:picMkLst>
+        </pc:picChg>
+      </pc:sldChg>
+      <pc:sldChg chg="addSp modSp">
+        <pc:chgData name="Luis de la Garza" userId="5365f7fcd4da17b0" providerId="LiveId" clId="{D955883F-B946-40F1-BFEB-003862376058}" dt="2025-08-23T17:28:12.786" v="182" actId="1076"/>
+        <pc:sldMkLst>
+          <pc:docMk/>
+          <pc:sldMk cId="2531338179" sldId="2575"/>
+        </pc:sldMkLst>
+        <pc:picChg chg="add mod">
+          <ac:chgData name="Luis de la Garza" userId="5365f7fcd4da17b0" providerId="LiveId" clId="{D955883F-B946-40F1-BFEB-003862376058}" dt="2025-08-23T17:28:12.786" v="182" actId="1076"/>
+          <ac:picMkLst>
+            <pc:docMk/>
+            <pc:sldMk cId="2531338179" sldId="2575"/>
+            <ac:picMk id="2050" creationId="{C68802D1-71F2-6A53-3784-C285362A4DA4}"/>
+          </ac:picMkLst>
+        </pc:picChg>
+      </pc:sldChg>
+      <pc:sldChg chg="addSp modSp">
+        <pc:chgData name="Luis de la Garza" userId="5365f7fcd4da17b0" providerId="LiveId" clId="{D955883F-B946-40F1-BFEB-003862376058}" dt="2025-08-23T17:30:29.697" v="187" actId="403"/>
+        <pc:sldMkLst>
+          <pc:docMk/>
+          <pc:sldMk cId="1312074204" sldId="2576"/>
+        </pc:sldMkLst>
+        <pc:spChg chg="mod">
+          <ac:chgData name="Luis de la Garza" userId="5365f7fcd4da17b0" providerId="LiveId" clId="{D955883F-B946-40F1-BFEB-003862376058}" dt="2025-08-23T17:30:29.697" v="187" actId="403"/>
+          <ac:spMkLst>
+            <pc:docMk/>
+            <pc:sldMk cId="1312074204" sldId="2576"/>
+            <ac:spMk id="4" creationId="{30A8FA49-B808-E007-070F-6E4CA696E775}"/>
+          </ac:spMkLst>
+        </pc:spChg>
+        <pc:picChg chg="add mod">
+          <ac:chgData name="Luis de la Garza" userId="5365f7fcd4da17b0" providerId="LiveId" clId="{D955883F-B946-40F1-BFEB-003862376058}" dt="2025-08-23T17:30:23.916" v="185" actId="1076"/>
+          <ac:picMkLst>
+            <pc:docMk/>
+            <pc:sldMk cId="1312074204" sldId="2576"/>
+            <ac:picMk id="3074" creationId="{EAD49B6A-A2D8-0392-64B9-9E4089C67E4C}"/>
+          </ac:picMkLst>
+        </pc:picChg>
+      </pc:sldChg>
+      <pc:sldChg chg="addSp modSp mod">
+        <pc:chgData name="Luis de la Garza" userId="5365f7fcd4da17b0" providerId="LiveId" clId="{D955883F-B946-40F1-BFEB-003862376058}" dt="2025-08-23T17:32:44.585" v="193" actId="14100"/>
+        <pc:sldMkLst>
+          <pc:docMk/>
+          <pc:sldMk cId="1918802772" sldId="2577"/>
+        </pc:sldMkLst>
+        <pc:spChg chg="mod">
+          <ac:chgData name="Luis de la Garza" userId="5365f7fcd4da17b0" providerId="LiveId" clId="{D955883F-B946-40F1-BFEB-003862376058}" dt="2025-08-23T17:32:44.585" v="193" actId="14100"/>
+          <ac:spMkLst>
+            <pc:docMk/>
+            <pc:sldMk cId="1918802772" sldId="2577"/>
+            <ac:spMk id="4" creationId="{C2DF5E57-E7FC-6D5B-BC96-F02A6AEFAB3B}"/>
+          </ac:spMkLst>
+        </pc:spChg>
+        <pc:picChg chg="add mod">
+          <ac:chgData name="Luis de la Garza" userId="5365f7fcd4da17b0" providerId="LiveId" clId="{D955883F-B946-40F1-BFEB-003862376058}" dt="2025-08-23T17:32:28.476" v="189" actId="1076"/>
+          <ac:picMkLst>
+            <pc:docMk/>
+            <pc:sldMk cId="1918802772" sldId="2577"/>
+            <ac:picMk id="4098" creationId="{3A155E66-CD9F-C348-48D8-281086E3CA5D}"/>
+          </ac:picMkLst>
+        </pc:picChg>
+      </pc:sldChg>
+      <pc:sldChg chg="modSp mod">
+        <pc:chgData name="Luis de la Garza" userId="5365f7fcd4da17b0" providerId="LiveId" clId="{D955883F-B946-40F1-BFEB-003862376058}" dt="2025-08-23T17:33:03.302" v="196" actId="1076"/>
+        <pc:sldMkLst>
+          <pc:docMk/>
+          <pc:sldMk cId="3649770442" sldId="2578"/>
+        </pc:sldMkLst>
+        <pc:spChg chg="mod">
+          <ac:chgData name="Luis de la Garza" userId="5365f7fcd4da17b0" providerId="LiveId" clId="{D955883F-B946-40F1-BFEB-003862376058}" dt="2025-08-23T17:33:03.302" v="196" actId="1076"/>
+          <ac:spMkLst>
+            <pc:docMk/>
+            <pc:sldMk cId="3649770442" sldId="2578"/>
+            <ac:spMk id="2" creationId="{55661550-D7EE-09D8-79A4-EDC3ACEB204F}"/>
+          </ac:spMkLst>
+        </pc:spChg>
       </pc:sldChg>
       <pc:sldChg chg="delSp modSp add setBg delDesignElem">
         <pc:chgData name="Luis de la Garza" userId="5365f7fcd4da17b0" providerId="LiveId" clId="{D955883F-B946-40F1-BFEB-003862376058}" dt="2025-08-21T00:10:11.127" v="44"/>
@@ -454,14 +521,6 @@
             <ac:spMk id="4" creationId="{C21B9B35-135E-A23E-3848-61AF188F042E}"/>
           </ac:spMkLst>
         </pc:spChg>
-        <pc:spChg chg="add del mod">
-          <ac:chgData name="Luis de la Garza" userId="5365f7fcd4da17b0" providerId="LiveId" clId="{D955883F-B946-40F1-BFEB-003862376058}" dt="2025-08-21T00:01:29.423" v="14" actId="478"/>
-          <ac:spMkLst>
-            <pc:docMk/>
-            <pc:sldMk cId="1890312496" sldId="2580"/>
-            <ac:spMk id="6" creationId="{3007F93B-B469-65F6-0E76-8DCCEC1C7DAC}"/>
-          </ac:spMkLst>
-        </pc:spChg>
         <pc:spChg chg="add">
           <ac:chgData name="Luis de la Garza" userId="5365f7fcd4da17b0" providerId="LiveId" clId="{D955883F-B946-40F1-BFEB-003862376058}" dt="2025-08-21T00:01:59.463" v="18" actId="26606"/>
           <ac:spMkLst>
@@ -486,14 +545,6 @@
             <ac:grpSpMk id="16" creationId="{DD354807-230F-4402-B1B9-F733A8F1F190}"/>
           </ac:grpSpMkLst>
         </pc:grpChg>
-        <pc:picChg chg="del">
-          <ac:chgData name="Luis de la Garza" userId="5365f7fcd4da17b0" providerId="LiveId" clId="{D955883F-B946-40F1-BFEB-003862376058}" dt="2025-08-21T00:01:16.763" v="13" actId="478"/>
-          <ac:picMkLst>
-            <pc:docMk/>
-            <pc:sldMk cId="1890312496" sldId="2580"/>
-            <ac:picMk id="5" creationId="{79B2EDD8-DF47-4229-B649-477652E6E1EB}"/>
-          </ac:picMkLst>
-        </pc:picChg>
         <pc:picChg chg="add mod">
           <ac:chgData name="Luis de la Garza" userId="5365f7fcd4da17b0" providerId="LiveId" clId="{D955883F-B946-40F1-BFEB-003862376058}" dt="2025-08-21T00:01:59.463" v="18" actId="26606"/>
           <ac:picMkLst>
@@ -509,44 +560,12 @@
           <pc:docMk/>
           <pc:sldMk cId="956211739" sldId="2581"/>
         </pc:sldMkLst>
-        <pc:spChg chg="add del mod">
-          <ac:chgData name="Luis de la Garza" userId="5365f7fcd4da17b0" providerId="LiveId" clId="{D955883F-B946-40F1-BFEB-003862376058}" dt="2025-08-21T00:11:42.899" v="49"/>
-          <ac:spMkLst>
-            <pc:docMk/>
-            <pc:sldMk cId="956211739" sldId="2581"/>
-            <ac:spMk id="6" creationId="{C2A55B31-E2E1-2BF4-0E81-E60D8920AA60}"/>
-          </ac:spMkLst>
-        </pc:spChg>
-        <pc:spChg chg="add del mod">
-          <ac:chgData name="Luis de la Garza" userId="5365f7fcd4da17b0" providerId="LiveId" clId="{D955883F-B946-40F1-BFEB-003862376058}" dt="2025-08-21T00:11:51.118" v="51" actId="478"/>
-          <ac:spMkLst>
-            <pc:docMk/>
-            <pc:sldMk cId="956211739" sldId="2581"/>
-            <ac:spMk id="7" creationId="{56B50325-1DB6-5E32-79E2-E8CC6760ECE5}"/>
-          </ac:spMkLst>
-        </pc:spChg>
-        <pc:picChg chg="del">
-          <ac:chgData name="Luis de la Garza" userId="5365f7fcd4da17b0" providerId="LiveId" clId="{D955883F-B946-40F1-BFEB-003862376058}" dt="2025-08-21T00:11:35.145" v="45" actId="478"/>
-          <ac:picMkLst>
-            <pc:docMk/>
-            <pc:sldMk cId="956211739" sldId="2581"/>
-            <ac:picMk id="5" creationId="{D52FA85D-39D6-4F9D-97E6-883E24848591}"/>
-          </ac:picMkLst>
-        </pc:picChg>
         <pc:picChg chg="add mod">
           <ac:chgData name="Luis de la Garza" userId="5365f7fcd4da17b0" providerId="LiveId" clId="{D955883F-B946-40F1-BFEB-003862376058}" dt="2025-08-21T00:12:45.761" v="58" actId="14861"/>
           <ac:picMkLst>
             <pc:docMk/>
             <pc:sldMk cId="956211739" sldId="2581"/>
             <ac:picMk id="2050" creationId="{0120E4BD-475D-5627-5638-6C75EB1FEB2E}"/>
-          </ac:picMkLst>
-        </pc:picChg>
-        <pc:picChg chg="add del mod">
-          <ac:chgData name="Luis de la Garza" userId="5365f7fcd4da17b0" providerId="LiveId" clId="{D955883F-B946-40F1-BFEB-003862376058}" dt="2025-08-21T00:11:46.238" v="50" actId="478"/>
-          <ac:picMkLst>
-            <pc:docMk/>
-            <pc:sldMk cId="956211739" sldId="2581"/>
-            <ac:picMk id="2052" creationId="{A5F4D026-C2BB-71FE-A49D-A5B8AA692EE5}"/>
           </ac:picMkLst>
         </pc:picChg>
       </pc:sldChg>
@@ -3653,7 +3672,7 @@
           <a:p>
             <a:fld id="{AB505267-8F40-4A5B-806C-35C64449E8D6}" type="datetime1">
               <a:rPr lang="es-MX" smtClean="0"/>
-              <a:t>20/08/2025</a:t>
+              <a:t>23/08/2025</a:t>
             </a:fld>
             <a:endParaRPr lang="es-MX"/>
           </a:p>
@@ -3833,7 +3852,7 @@
             <a:pPr rtl="0"/>
             <a:fld id="{A1C2A63E-AC03-4FF8-BE60-543974565F08}" type="datetime1">
               <a:rPr lang="es-MX" noProof="0" smtClean="0"/>
-              <a:t>20/08/2025</a:t>
+              <a:t>23/08/2025</a:t>
             </a:fld>
             <a:endParaRPr lang="es-MX" noProof="0"/>
           </a:p>
@@ -5912,7 +5931,7 @@
             <a:pPr rtl="0"/>
             <a:fld id="{9A1095BD-2D6F-4C94-B78D-4BA24B78BE5F}" type="datetime1">
               <a:rPr lang="es-MX" noProof="0" smtClean="0"/>
-              <a:t>20/08/2025</a:t>
+              <a:t>23/08/2025</a:t>
             </a:fld>
             <a:endParaRPr lang="es-MX" noProof="0"/>
           </a:p>
@@ -6132,7 +6151,7 @@
             <a:pPr rtl="0"/>
             <a:fld id="{93A3F6A2-DF51-4D55-B5E3-408D4E3D00E8}" type="datetime1">
               <a:rPr lang="es-MX" noProof="0" smtClean="0"/>
-              <a:t>20/08/2025</a:t>
+              <a:t>23/08/2025</a:t>
             </a:fld>
             <a:endParaRPr lang="es-MX" noProof="0"/>
           </a:p>
@@ -6334,7 +6353,7 @@
           <a:p>
             <a:fld id="{157B6794-849E-4626-908B-D15793550EFB}" type="datetime1">
               <a:rPr lang="en-US" smtClean="0"/>
-              <a:t>8/20/2025</a:t>
+              <a:t>8/23/2025</a:t>
             </a:fld>
             <a:endParaRPr lang="en-US"/>
           </a:p>
@@ -6656,7 +6675,7 @@
             <a:pPr rtl="0"/>
             <a:fld id="{D1D7B879-DB92-4F7E-89A0-251D0539E6AF}" type="datetime1">
               <a:rPr lang="es-MX" noProof="0" smtClean="0"/>
-              <a:t>20/08/2025</a:t>
+              <a:t>23/08/2025</a:t>
             </a:fld>
             <a:endParaRPr lang="es-MX" noProof="0"/>
           </a:p>
@@ -7364,7 +7383,7 @@
             <a:pPr rtl="0"/>
             <a:fld id="{F3597D2B-C196-4B48-8A8F-D73EC5DA8CC3}" type="datetime1">
               <a:rPr lang="es-MX" noProof="0" smtClean="0"/>
-              <a:t>20/08/2025</a:t>
+              <a:t>23/08/2025</a:t>
             </a:fld>
             <a:endParaRPr lang="es-MX" noProof="0"/>
           </a:p>
@@ -7798,7 +7817,7 @@
             <a:pPr rtl="0"/>
             <a:fld id="{63228F18-82D7-416B-822F-F90BEBADB8B6}" type="datetime1">
               <a:rPr lang="es-MX" noProof="0" smtClean="0"/>
-              <a:t>20/08/2025</a:t>
+              <a:t>23/08/2025</a:t>
             </a:fld>
             <a:endParaRPr lang="es-MX" noProof="0"/>
           </a:p>
@@ -7952,7 +7971,7 @@
             <a:pPr rtl="0"/>
             <a:fld id="{BF75BBF6-87F1-4259-ACE2-18F6CF7F572C}" type="datetime1">
               <a:rPr lang="es-MX" noProof="0" smtClean="0"/>
-              <a:t>20/08/2025</a:t>
+              <a:t>23/08/2025</a:t>
             </a:fld>
             <a:endParaRPr lang="es-MX" noProof="0"/>
           </a:p>
@@ -8068,7 +8087,7 @@
             <a:pPr rtl="0"/>
             <a:fld id="{2D0193F4-B3A5-4614-9212-3A3F22F60B66}" type="datetime1">
               <a:rPr lang="es-MX" noProof="0" smtClean="0"/>
-              <a:t>20/08/2025</a:t>
+              <a:t>23/08/2025</a:t>
             </a:fld>
             <a:endParaRPr lang="es-MX" noProof="0"/>
           </a:p>
@@ -8394,7 +8413,7 @@
             <a:pPr rtl="0"/>
             <a:fld id="{DB93246C-3CD3-489B-86D0-90FB76E7C5ED}" type="datetime1">
               <a:rPr lang="es-MX" noProof="0" smtClean="0"/>
-              <a:t>20/08/2025</a:t>
+              <a:t>23/08/2025</a:t>
             </a:fld>
             <a:endParaRPr lang="es-MX" noProof="0"/>
           </a:p>
@@ -8701,7 +8720,7 @@
             <a:pPr rtl="0"/>
             <a:fld id="{28B4A694-2858-4143-8702-54EF74EB0EFF}" type="datetime1">
               <a:rPr lang="es-MX" noProof="0" smtClean="0"/>
-              <a:t>20/08/2025</a:t>
+              <a:t>23/08/2025</a:t>
             </a:fld>
             <a:endParaRPr lang="es-MX" noProof="0"/>
           </a:p>
@@ -8949,7 +8968,7 @@
             <a:pPr rtl="0"/>
             <a:fld id="{6D7440A9-06B7-4A73-9E19-B3D9CAB48B8D}" type="datetime1">
               <a:rPr lang="es-MX" noProof="0" smtClean="0"/>
-              <a:t>20/08/2025</a:t>
+              <a:t>23/08/2025</a:t>
             </a:fld>
             <a:endParaRPr lang="es-MX" noProof="0"/>
           </a:p>
@@ -11250,7 +11269,7 @@
               <a:buNone/>
             </a:pPr>
             <a:r>
-              <a:rPr lang="es-ES" sz="1400" b="1" dirty="0"/>
+              <a:rPr lang="es-ES" sz="1600" b="1" dirty="0"/>
               <a:t>Asignación de pesos a vectores</a:t>
             </a:r>
           </a:p>
@@ -11259,7 +11278,7 @@
               <a:buNone/>
             </a:pPr>
             <a:r>
-              <a:rPr lang="es-ES" sz="1400" dirty="0"/>
+              <a:rPr lang="es-ES" sz="1600" dirty="0"/>
               <a:t>Los modelos ponderados asignan diferentes pesos para reflejar la importancia relativa de cada característica vectorial.</a:t>
             </a:r>
           </a:p>
@@ -11271,7 +11290,7 @@
               <a:buNone/>
             </a:pPr>
             <a:r>
-              <a:rPr lang="es-ES" sz="1400" b="1" dirty="0"/>
+              <a:rPr lang="es-ES" sz="1600" b="1" dirty="0"/>
               <a:t>Precisión mejorada</a:t>
             </a:r>
           </a:p>
@@ -11280,10 +11299,10 @@
               <a:buNone/>
             </a:pPr>
             <a:r>
-              <a:rPr lang="es-ES" sz="1400" dirty="0"/>
+              <a:rPr lang="es-ES" sz="1600" dirty="0"/>
               <a:t>El uso de pesos mejora la precisión y relevancia en tareas como búsqueda y análisis de datos.</a:t>
             </a:r>
-            <a:endParaRPr lang="es-MX" sz="1400" dirty="0"/>
+            <a:endParaRPr lang="es-MX" sz="1600" dirty="0"/>
           </a:p>
         </p:txBody>
       </p:sp>
@@ -11464,6 +11483,53 @@
           </p:txBody>
         </p:sp>
       </p:grpSp>
+      <p:pic>
+        <p:nvPicPr>
+          <p:cNvPr id="1026" name="Picture 2" descr="Técnicas avanzadas de recuperación de información: Modelo Vectorial">
+            <a:extLst>
+              <a:ext uri="{FF2B5EF4-FFF2-40B4-BE49-F238E27FC236}">
+                <a16:creationId xmlns:a16="http://schemas.microsoft.com/office/drawing/2014/main" id="{00701AE1-9D84-E865-7F16-CAC579B59649}"/>
+              </a:ext>
+            </a:extLst>
+          </p:cNvPr>
+          <p:cNvPicPr>
+            <a:picLocks noChangeAspect="1" noChangeArrowheads="1"/>
+          </p:cNvPicPr>
+          <p:nvPr/>
+        </p:nvPicPr>
+        <p:blipFill>
+          <a:blip r:embed="rId3">
+            <a:extLst>
+              <a:ext uri="{28A0092B-C50C-407E-A947-70E740481C1C}">
+                <a14:useLocalDpi xmlns:a14="http://schemas.microsoft.com/office/drawing/2010/main" val="0"/>
+              </a:ext>
+            </a:extLst>
+          </a:blip>
+          <a:srcRect/>
+          <a:stretch>
+            <a:fillRect/>
+          </a:stretch>
+        </p:blipFill>
+        <p:spPr bwMode="auto">
+          <a:xfrm>
+            <a:off x="876693" y="2909454"/>
+            <a:ext cx="3769399" cy="2632364"/>
+          </a:xfrm>
+          <a:prstGeom prst="rect">
+            <a:avLst/>
+          </a:prstGeom>
+          <a:noFill/>
+          <a:extLst>
+            <a:ext uri="{909E8E84-426E-40DD-AFC4-6F175D3DCCD1}">
+              <a14:hiddenFill xmlns:a14="http://schemas.microsoft.com/office/drawing/2010/main">
+                <a:solidFill>
+                  <a:srgbClr val="FFFFFF"/>
+                </a:solidFill>
+              </a14:hiddenFill>
+            </a:ext>
+          </a:extLst>
+        </p:spPr>
+      </p:pic>
     </p:spTree>
     <p:extLst>
       <p:ext uri="{BB962C8B-B14F-4D97-AF65-F5344CB8AC3E}">
@@ -12023,6 +12089,53 @@
           </a:p>
         </p:txBody>
       </p:sp>
+      <p:pic>
+        <p:nvPicPr>
+          <p:cNvPr id="2050" name="Picture 2" descr="Técnicas avanzadas de recuperación de información: Modelo Vectorial">
+            <a:extLst>
+              <a:ext uri="{FF2B5EF4-FFF2-40B4-BE49-F238E27FC236}">
+                <a16:creationId xmlns:a16="http://schemas.microsoft.com/office/drawing/2014/main" id="{C68802D1-71F2-6A53-3784-C285362A4DA4}"/>
+              </a:ext>
+            </a:extLst>
+          </p:cNvPr>
+          <p:cNvPicPr>
+            <a:picLocks noChangeAspect="1" noChangeArrowheads="1"/>
+          </p:cNvPicPr>
+          <p:nvPr/>
+        </p:nvPicPr>
+        <p:blipFill>
+          <a:blip r:embed="rId3">
+            <a:extLst>
+              <a:ext uri="{28A0092B-C50C-407E-A947-70E740481C1C}">
+                <a14:useLocalDpi xmlns:a14="http://schemas.microsoft.com/office/drawing/2010/main" val="0"/>
+              </a:ext>
+            </a:extLst>
+          </a:blip>
+          <a:srcRect/>
+          <a:stretch>
+            <a:fillRect/>
+          </a:stretch>
+        </p:blipFill>
+        <p:spPr bwMode="auto">
+          <a:xfrm>
+            <a:off x="2500311" y="3917161"/>
+            <a:ext cx="7534275" cy="2232814"/>
+          </a:xfrm>
+          <a:prstGeom prst="rect">
+            <a:avLst/>
+          </a:prstGeom>
+          <a:noFill/>
+          <a:extLst>
+            <a:ext uri="{909E8E84-426E-40DD-AFC4-6F175D3DCCD1}">
+              <a14:hiddenFill xmlns:a14="http://schemas.microsoft.com/office/drawing/2010/main">
+                <a:solidFill>
+                  <a:srgbClr val="FFFFFF"/>
+                </a:solidFill>
+              </a14:hiddenFill>
+            </a:ext>
+          </a:extLst>
+        </p:spPr>
+      </p:pic>
     </p:spTree>
     <p:extLst>
       <p:ext uri="{BB962C8B-B14F-4D97-AF65-F5344CB8AC3E}">
@@ -12373,8 +12486,36 @@
           <a:p>
             <a:pPr defTabSz="914400"/>
             <a:r>
-              <a:rPr lang="en-US" sz="3700"/>
-              <a:t>Aplicaciones en reconocimiento de patrones y machine learning</a:t>
+              <a:rPr lang="en-US" sz="3700" dirty="0" err="1"/>
+              <a:t>Aplicaciones</a:t>
+            </a:r>
+            <a:r>
+              <a:rPr lang="en-US" sz="3700" dirty="0"/>
+              <a:t> </a:t>
+            </a:r>
+            <a:r>
+              <a:rPr lang="en-US" sz="3700" dirty="0" err="1"/>
+              <a:t>en</a:t>
+            </a:r>
+            <a:r>
+              <a:rPr lang="en-US" sz="3700" dirty="0"/>
+              <a:t> </a:t>
+            </a:r>
+            <a:r>
+              <a:rPr lang="en-US" sz="3700" dirty="0" err="1"/>
+              <a:t>reconocimiento</a:t>
+            </a:r>
+            <a:r>
+              <a:rPr lang="en-US" sz="3700" dirty="0"/>
+              <a:t> de </a:t>
+            </a:r>
+            <a:r>
+              <a:rPr lang="en-US" sz="3700" dirty="0" err="1"/>
+              <a:t>patrones</a:t>
+            </a:r>
+            <a:r>
+              <a:rPr lang="en-US" sz="3700" dirty="0"/>
+              <a:t> y machine learning</a:t>
             </a:r>
           </a:p>
         </p:txBody>
@@ -12424,7 +12565,7 @@
               <a:buNone/>
             </a:pPr>
             <a:r>
-              <a:rPr lang="es-ES" sz="1400" b="1"/>
+              <a:rPr lang="es-ES" sz="1800" b="1" dirty="0"/>
               <a:t>Modelos vectoriales</a:t>
             </a:r>
           </a:p>
@@ -12433,7 +12574,7 @@
               <a:buNone/>
             </a:pPr>
             <a:r>
-              <a:rPr lang="es-ES" sz="1400"/>
+              <a:rPr lang="es-ES" sz="1800" dirty="0"/>
               <a:t>Los modelos vectoriales representan datos para facilitar el análisis y la identificación precisa de patrones en aprendizaje automático.</a:t>
             </a:r>
           </a:p>
@@ -12445,7 +12586,7 @@
               <a:buNone/>
             </a:pPr>
             <a:r>
-              <a:rPr lang="es-ES" sz="1400" b="1"/>
+              <a:rPr lang="es-ES" sz="1800" b="1" dirty="0"/>
               <a:t>Identificación de patrones</a:t>
             </a:r>
           </a:p>
@@ -12454,7 +12595,7 @@
               <a:buNone/>
             </a:pPr>
             <a:r>
-              <a:rPr lang="es-ES" sz="1400"/>
+              <a:rPr lang="es-ES" sz="1800" dirty="0"/>
               <a:t>Los algoritmos entrenados con modelos vectoriales detectan patrones complejos para clasificar y predecir con alta precisión.</a:t>
             </a:r>
           </a:p>
@@ -12466,7 +12607,7 @@
               <a:buNone/>
             </a:pPr>
             <a:r>
-              <a:rPr lang="es-ES" sz="1400" b="1"/>
+              <a:rPr lang="es-ES" sz="1800" b="1" dirty="0"/>
               <a:t>Clasificación y predicción</a:t>
             </a:r>
           </a:p>
@@ -12475,13 +12616,68 @@
               <a:buNone/>
             </a:pPr>
             <a:r>
-              <a:rPr lang="es-ES" sz="1400"/>
-              <a:t>Los sistemas de machine learning usan características vectoriales para clasificar datos y hacer predicciones confiables en diversos campos.</a:t>
-            </a:r>
-            <a:endParaRPr lang="es-MX" sz="1400"/>
+              <a:rPr lang="es-ES" sz="1800" dirty="0"/>
+              <a:t>Los sistemas de machine </a:t>
+            </a:r>
+            <a:r>
+              <a:rPr lang="es-ES" sz="1800" dirty="0" err="1"/>
+              <a:t>learning</a:t>
+            </a:r>
+            <a:r>
+              <a:rPr lang="es-ES" sz="1800" dirty="0"/>
+              <a:t> usan características vectoriales para clasificar datos y hacer predicciones confiables en diversos campos.</a:t>
+            </a:r>
+            <a:endParaRPr lang="es-MX" sz="1800" dirty="0"/>
           </a:p>
         </p:txBody>
       </p:sp>
+      <p:pic>
+        <p:nvPicPr>
+          <p:cNvPr id="3074" name="Picture 2" descr="Reconocimiento de patrones (Pattern Recognition) - MATLAB &amp; Simulink">
+            <a:extLst>
+              <a:ext uri="{FF2B5EF4-FFF2-40B4-BE49-F238E27FC236}">
+                <a16:creationId xmlns:a16="http://schemas.microsoft.com/office/drawing/2014/main" id="{EAD49B6A-A2D8-0392-64B9-9E4089C67E4C}"/>
+              </a:ext>
+            </a:extLst>
+          </p:cNvPr>
+          <p:cNvPicPr>
+            <a:picLocks noChangeAspect="1" noChangeArrowheads="1"/>
+          </p:cNvPicPr>
+          <p:nvPr/>
+        </p:nvPicPr>
+        <p:blipFill>
+          <a:blip r:embed="rId3">
+            <a:extLst>
+              <a:ext uri="{28A0092B-C50C-407E-A947-70E740481C1C}">
+                <a14:useLocalDpi xmlns:a14="http://schemas.microsoft.com/office/drawing/2010/main" val="0"/>
+              </a:ext>
+            </a:extLst>
+          </a:blip>
+          <a:srcRect/>
+          <a:stretch>
+            <a:fillRect/>
+          </a:stretch>
+        </p:blipFill>
+        <p:spPr bwMode="auto">
+          <a:xfrm>
+            <a:off x="1046849" y="3054423"/>
+            <a:ext cx="4555782" cy="2403402"/>
+          </a:xfrm>
+          <a:prstGeom prst="rect">
+            <a:avLst/>
+          </a:prstGeom>
+          <a:noFill/>
+          <a:extLst>
+            <a:ext uri="{909E8E84-426E-40DD-AFC4-6F175D3DCCD1}">
+              <a14:hiddenFill xmlns:a14="http://schemas.microsoft.com/office/drawing/2010/main">
+                <a:solidFill>
+                  <a:srgbClr val="FFFFFF"/>
+                </a:solidFill>
+              </a14:hiddenFill>
+            </a:ext>
+          </a:extLst>
+        </p:spPr>
+      </p:pic>
     </p:spTree>
     <p:extLst>
       <p:ext uri="{BB962C8B-B14F-4D97-AF65-F5344CB8AC3E}">
@@ -12751,9 +12947,50 @@
           <a:p>
             <a:pPr defTabSz="914400"/>
             <a:r>
-              <a:rPr lang="en-US" sz="3100"/>
-              <a:t>Implementación en sistemas de recomendación y análisis de similitud</a:t>
-            </a:r>
+              <a:rPr lang="en-US" sz="3100" dirty="0" err="1"/>
+              <a:t>Implementación</a:t>
+            </a:r>
+            <a:r>
+              <a:rPr lang="en-US" sz="3100" dirty="0"/>
+              <a:t> </a:t>
+            </a:r>
+            <a:r>
+              <a:rPr lang="en-US" sz="3100" dirty="0" err="1"/>
+              <a:t>en</a:t>
+            </a:r>
+            <a:r>
+              <a:rPr lang="en-US" sz="3100" dirty="0"/>
+              <a:t> </a:t>
+            </a:r>
+            <a:r>
+              <a:rPr lang="en-US" sz="3100" dirty="0" err="1"/>
+              <a:t>sistemas</a:t>
+            </a:r>
+            <a:r>
+              <a:rPr lang="en-US" sz="3100" dirty="0"/>
+              <a:t> de </a:t>
+            </a:r>
+            <a:r>
+              <a:rPr lang="en-US" sz="3100" dirty="0" err="1"/>
+              <a:t>recomendación</a:t>
+            </a:r>
+            <a:r>
+              <a:rPr lang="en-US" sz="3100" dirty="0"/>
+              <a:t> y </a:t>
+            </a:r>
+            <a:r>
+              <a:rPr lang="en-US" sz="3100" dirty="0" err="1"/>
+              <a:t>análisis</a:t>
+            </a:r>
+            <a:r>
+              <a:rPr lang="en-US" sz="3100" dirty="0"/>
+              <a:t> de </a:t>
+            </a:r>
+            <a:r>
+              <a:rPr lang="en-US" sz="3100" dirty="0" err="1"/>
+              <a:t>similitud</a:t>
+            </a:r>
+            <a:endParaRPr lang="en-US" sz="3100" dirty="0"/>
           </a:p>
         </p:txBody>
       </p:sp>
@@ -12785,13 +13022,13 @@
         </p:nvSpPr>
         <p:spPr>
           <a:xfrm>
-            <a:off x="6857803" y="1050877"/>
-            <a:ext cx="5334197" cy="3769835"/>
+            <a:off x="6857804" y="1050877"/>
+            <a:ext cx="4957960" cy="4949873"/>
           </a:xfrm>
         </p:spPr>
         <p:txBody>
           <a:bodyPr>
-            <a:normAutofit/>
+            <a:noAutofit/>
           </a:bodyPr>
           <a:lstStyle/>
           <a:p>
@@ -12802,7 +13039,7 @@
               <a:buNone/>
             </a:pPr>
             <a:r>
-              <a:rPr lang="es-ES" sz="1400" b="1" dirty="0"/>
+              <a:rPr lang="es-ES" sz="1800" b="1" dirty="0"/>
               <a:t>Evaluación de similitud</a:t>
             </a:r>
           </a:p>
@@ -12811,7 +13048,7 @@
               <a:buNone/>
             </a:pPr>
             <a:r>
-              <a:rPr lang="es-ES" sz="1400" dirty="0"/>
+              <a:rPr lang="es-ES" sz="1800" dirty="0"/>
               <a:t>Los modelos analizan la similitud entre usuarios o ítems para identificar preferencias comunes y patrones.</a:t>
             </a:r>
           </a:p>
@@ -12823,7 +13060,7 @@
               <a:buNone/>
             </a:pPr>
             <a:r>
-              <a:rPr lang="es-ES" sz="1400" b="1" dirty="0"/>
+              <a:rPr lang="es-ES" sz="1800" b="1" dirty="0"/>
               <a:t>Recomendaciones personalizadas</a:t>
             </a:r>
           </a:p>
@@ -12832,7 +13069,7 @@
               <a:buNone/>
             </a:pPr>
             <a:r>
-              <a:rPr lang="es-ES" sz="1400" dirty="0"/>
+              <a:rPr lang="es-ES" sz="1800" dirty="0"/>
               <a:t>Se generan recomendaciones adaptadas para mejorar la experiencia individual en plataformas digitales.</a:t>
             </a:r>
           </a:p>
@@ -12844,7 +13081,7 @@
               <a:buNone/>
             </a:pPr>
             <a:r>
-              <a:rPr lang="es-ES" sz="1400" b="1" dirty="0"/>
+              <a:rPr lang="es-ES" sz="1800" b="1" dirty="0"/>
               <a:t>Aplicaciones comerciales</a:t>
             </a:r>
           </a:p>
@@ -12853,13 +13090,60 @@
               <a:buNone/>
             </a:pPr>
             <a:r>
-              <a:rPr lang="es-ES" sz="1400" dirty="0"/>
+              <a:rPr lang="es-ES" sz="1800" dirty="0"/>
               <a:t>Estos sistemas se aplican en plataformas comerciales para aumentar la satisfacción y fidelización del cliente.</a:t>
             </a:r>
-            <a:endParaRPr lang="es-MX" sz="1400" dirty="0"/>
+            <a:endParaRPr lang="es-MX" sz="1800" dirty="0"/>
           </a:p>
         </p:txBody>
       </p:sp>
+      <p:pic>
+        <p:nvPicPr>
+          <p:cNvPr id="4098" name="Picture 2" descr="El Filtrado colaborativo y los motores de recomendación – Juan Barrios">
+            <a:extLst>
+              <a:ext uri="{FF2B5EF4-FFF2-40B4-BE49-F238E27FC236}">
+                <a16:creationId xmlns:a16="http://schemas.microsoft.com/office/drawing/2014/main" id="{3A155E66-CD9F-C348-48D8-281086E3CA5D}"/>
+              </a:ext>
+            </a:extLst>
+          </p:cNvPr>
+          <p:cNvPicPr>
+            <a:picLocks noChangeAspect="1" noChangeArrowheads="1"/>
+          </p:cNvPicPr>
+          <p:nvPr/>
+        </p:nvPicPr>
+        <p:blipFill>
+          <a:blip r:embed="rId3">
+            <a:extLst>
+              <a:ext uri="{28A0092B-C50C-407E-A947-70E740481C1C}">
+                <a14:useLocalDpi xmlns:a14="http://schemas.microsoft.com/office/drawing/2010/main" val="0"/>
+              </a:ext>
+            </a:extLst>
+          </a:blip>
+          <a:srcRect/>
+          <a:stretch>
+            <a:fillRect/>
+          </a:stretch>
+        </p:blipFill>
+        <p:spPr bwMode="auto">
+          <a:xfrm>
+            <a:off x="761800" y="2935794"/>
+            <a:ext cx="5715000" cy="2962275"/>
+          </a:xfrm>
+          <a:prstGeom prst="rect">
+            <a:avLst/>
+          </a:prstGeom>
+          <a:noFill/>
+          <a:extLst>
+            <a:ext uri="{909E8E84-426E-40DD-AFC4-6F175D3DCCD1}">
+              <a14:hiddenFill xmlns:a14="http://schemas.microsoft.com/office/drawing/2010/main">
+                <a:solidFill>
+                  <a:srgbClr val="FFFFFF"/>
+                </a:solidFill>
+              </a14:hiddenFill>
+            </a:ext>
+          </a:extLst>
+        </p:spPr>
+      </p:pic>
     </p:spTree>
     <p:extLst>
       <p:ext uri="{BB962C8B-B14F-4D97-AF65-F5344CB8AC3E}">
@@ -13094,7 +13378,7 @@
         </p:nvSpPr>
         <p:spPr>
           <a:xfrm>
-            <a:off x="839789" y="2057401"/>
+            <a:off x="6340477" y="1523206"/>
             <a:ext cx="3932237" cy="3811588"/>
           </a:xfrm>
         </p:spPr>
@@ -13111,7 +13395,7 @@
               <a:buNone/>
             </a:pPr>
             <a:r>
-              <a:rPr lang="es-ES" sz="1400" b="1"/>
+              <a:rPr lang="es-ES" sz="1800" b="1" dirty="0"/>
               <a:t>Importancia de modelos vectoriales</a:t>
             </a:r>
           </a:p>
@@ -13120,7 +13404,7 @@
               <a:buNone/>
             </a:pPr>
             <a:r>
-              <a:rPr lang="es-ES"/>
+              <a:rPr lang="es-ES" sz="1800" dirty="0"/>
               <a:t>Los modelos vectoriales son esenciales para representar datos complejos en varios formatos y disciplinas científicas.</a:t>
             </a:r>
           </a:p>
@@ -13132,7 +13416,7 @@
               <a:buNone/>
             </a:pPr>
             <a:r>
-              <a:rPr lang="es-ES" sz="1400" b="1"/>
+              <a:rPr lang="es-ES" sz="1800" b="1" dirty="0"/>
               <a:t>Aplicaciones prácticas</a:t>
             </a:r>
           </a:p>
@@ -13141,7 +13425,7 @@
               <a:buNone/>
             </a:pPr>
             <a:r>
-              <a:rPr lang="es-ES"/>
+              <a:rPr lang="es-ES" sz="1800" dirty="0"/>
               <a:t>Estos modelos se emplean en análisis avanzados, ciencia y tecnología para facilitar la comprensión de información diversa.</a:t>
             </a:r>
           </a:p>
@@ -20023,6 +20307,15 @@
 </file>
 
 <file path=customXml/item1.xml><?xml version="1.0" encoding="utf-8"?>
+<?mso-contentType ?>
+<FormTemplates xmlns="http://schemas.microsoft.com/sharepoint/v3/contenttype/forms">
+  <Display>DocumentLibraryForm</Display>
+  <Edit>DocumentLibraryForm</Edit>
+  <New>DocumentLibraryForm</New>
+</FormTemplates>
+</file>
+
+<file path=customXml/item2.xml><?xml version="1.0" encoding="utf-8"?>
 <p:properties xmlns:p="http://schemas.microsoft.com/office/2006/metadata/properties" xmlns:xsi="http://www.w3.org/2001/XMLSchema-instance" xmlns:pc="http://schemas.microsoft.com/office/infopath/2007/PartnerControls">
   <documentManagement>
     <Status xmlns="71af3243-3dd4-4a8d-8c0d-dd76da1f02a5">Not started</Status>
@@ -20039,15 +20332,6 @@
     <MediaServiceKeyPoints xmlns="71af3243-3dd4-4a8d-8c0d-dd76da1f02a5" xsi:nil="true"/>
   </documentManagement>
 </p:properties>
-</file>
-
-<file path=customXml/item2.xml><?xml version="1.0" encoding="utf-8"?>
-<?mso-contentType ?>
-<FormTemplates xmlns="http://schemas.microsoft.com/sharepoint/v3/contenttype/forms">
-  <Display>DocumentLibraryForm</Display>
-  <Edit>DocumentLibraryForm</Edit>
-  <New>DocumentLibraryForm</New>
-</FormTemplates>
 </file>
 
 <file path=customXml/item3.xml><?xml version="1.0" encoding="utf-8"?>
@@ -20327,6 +20611,14 @@
 </file>
 
 <file path=customXml/itemProps1.xml><?xml version="1.0" encoding="utf-8"?>
+<ds:datastoreItem xmlns:ds="http://schemas.openxmlformats.org/officeDocument/2006/customXml" ds:itemID="{77DD0DBF-30B2-4FC6-A5E7-8374DC718037}">
+  <ds:schemaRefs>
+    <ds:schemaRef ds:uri="http://schemas.microsoft.com/sharepoint/v3/contenttype/forms"/>
+  </ds:schemaRefs>
+</ds:datastoreItem>
+</file>
+
+<file path=customXml/itemProps2.xml><?xml version="1.0" encoding="utf-8"?>
 <ds:datastoreItem xmlns:ds="http://schemas.openxmlformats.org/officeDocument/2006/customXml" ds:itemID="{1C44B501-5DE1-46D9-B449-400C46FE1425}">
   <ds:schemaRefs>
     <ds:schemaRef ds:uri="http://schemas.microsoft.com/office/2006/metadata/properties"/>
@@ -20334,14 +20626,6 @@
     <ds:schemaRef ds:uri="71af3243-3dd4-4a8d-8c0d-dd76da1f02a5"/>
     <ds:schemaRef ds:uri="http://schemas.microsoft.com/sharepoint/v3"/>
     <ds:schemaRef ds:uri="230e9df3-be65-4c73-a93b-d1236ebd677e"/>
-  </ds:schemaRefs>
-</ds:datastoreItem>
-</file>
-
-<file path=customXml/itemProps2.xml><?xml version="1.0" encoding="utf-8"?>
-<ds:datastoreItem xmlns:ds="http://schemas.openxmlformats.org/officeDocument/2006/customXml" ds:itemID="{77DD0DBF-30B2-4FC6-A5E7-8374DC718037}">
-  <ds:schemaRefs>
-    <ds:schemaRef ds:uri="http://schemas.microsoft.com/sharepoint/v3/contenttype/forms"/>
   </ds:schemaRefs>
 </ds:datastoreItem>
 </file>
